--- a/data/sites/sales/Competitive Intelligence/market-positioning-brief.pptx
+++ b/data/sites/sales/Competitive Intelligence/market-positioning-brief.pptx
@@ -7,8 +7,18 @@
   <p:sldIdLst>
     <p:sldId id="256" r:id="rId7"/>
     <p:sldId id="257" r:id="rId8"/>
+    <p:sldId id="258" r:id="rId9"/>
+    <p:sldId id="259" r:id="rId10"/>
+    <p:sldId id="260" r:id="rId11"/>
+    <p:sldId id="261" r:id="rId12"/>
+    <p:sldId id="262" r:id="rId13"/>
+    <p:sldId id="263" r:id="rId14"/>
+    <p:sldId id="264" r:id="rId15"/>
+    <p:sldId id="265" r:id="rId16"/>
+    <p:sldId id="266" r:id="rId17"/>
+    <p:sldId id="267" r:id="rId18"/>
   </p:sldIdLst>
-  <p:sldSz cx="9144000" cy="6858000" type="screen4x3"/>
+  <p:sldSz cx="12191695" cy="6858000" type="screen4x3"/>
   <p:notesSz cx="6858000" cy="9144000"/>
   <p:defaultTextStyle>
     <a:defPPr>
@@ -3096,7 +3106,7 @@
             <a:spLocks noGrp="1"/>
           </p:cNvSpPr>
           <p:nvPr>
-            <p:ph type="ctrTitle"/>
+            <p:ph type="title"/>
           </p:nvPr>
         </p:nvSpPr>
         <p:spPr/>
@@ -3105,19 +3115,19 @@
           <a:lstStyle/>
           <a:p>
             <a:r>
-              <a:t>Market Positioning Brief</a:t>
+              <a:t>1. Executive Summary &amp; Scope - Market Positioning Brief</a:t>
             </a:r>
           </a:p>
         </p:txBody>
       </p:sp>
       <p:sp>
         <p:nvSpPr>
-          <p:cNvPr id="3" name="Subtitle 2"/>
+          <p:cNvPr id="3" name="Content Placeholder 2"/>
           <p:cNvSpPr>
             <a:spLocks noGrp="1"/>
           </p:cNvSpPr>
           <p:nvPr>
-            <p:ph type="subTitle" idx="1"/>
+            <p:ph idx="1"/>
           </p:nvPr>
         </p:nvSpPr>
         <p:spPr/>
@@ -3126,16 +3136,1649 @@
           <a:lstStyle/>
           <a:p>
             <a:r>
-              <a:t>Sales &amp; Marketing Knowledge Hub | Competitive Intelligence</a:t>
-            </a:r>
-          </a:p>
-          <a:p>
-            <a:r>
-              <a:t>Owner: Nina Patel  |  Last updated: October 30, 2026</a:t>
+              <a:t>Summarizes the competitive landscape and recommended positioning statement for the current fiscal year. Section 1 (Executive Summary &amp; Scope) applies to Competitive Intelligence within Sales &amp; Marketing Knowledge Hub and is maintained by Nina Patel. Defines the operational charter, scope boundaries, and executive accountability.</a:t>
+            </a:r>
+          </a:p>
+          <a:p>
+            <a:pPr lvl="1"/>
+            <a:r>
+              <a:t>Three primary competitors are tracked across pricing, features, and market presence.</a:t>
+            </a:r>
+          </a:p>
+          <a:p>
+            <a:pPr lvl="1"/>
+            <a:r>
+              <a:t>Recommended positioning emphasizes real-time data freshness and integration breadth.</a:t>
+            </a:r>
+          </a:p>
+          <a:p>
+            <a:pPr lvl="1"/>
+            <a:r>
+              <a:t>Section 1 review cadence is tracked by Nina Patel under Competitive Intelligence governance.</a:t>
             </a:r>
           </a:p>
         </p:txBody>
       </p:sp>
+      <p:graphicFrame>
+        <p:nvGraphicFramePr>
+          <p:cNvPr id="4" name="Table 3"/>
+          <p:cNvGraphicFramePr>
+            <a:graphicFrameLocks noGrp="1"/>
+          </p:cNvGraphicFramePr>
+          <p:nvPr/>
+        </p:nvGraphicFramePr>
+        <p:xfrm>
+          <a:off x="548640" y="3749039"/>
+          <a:ext cx="5669280" cy="1389888"/>
+        </p:xfrm>
+        <a:graphic>
+          <a:graphicData uri="http://schemas.openxmlformats.org/drawingml/2006/table">
+            <a:tbl>
+              <a:tblPr firstRow="1" bandRow="1">
+                <a:tableStyleId>{5C22544A-7EE6-4342-B048-85BDC9FD1C3A}</a:tableStyleId>
+              </a:tblPr>
+              <a:tblGrid>
+                <a:gridCol w="1417320"/>
+                <a:gridCol w="1417320"/>
+                <a:gridCol w="1417320"/>
+                <a:gridCol w="1417320"/>
+              </a:tblGrid>
+              <a:tr h="347472">
+                <a:tc>
+                  <a:txBody>
+                    <a:bodyPr/>
+                    <a:lstStyle/>
+                    <a:p>
+                      <a:pPr>
+                        <a:defRPr b="1" sz="1100"/>
+                      </a:pPr>
+                      <a:r>
+                        <a:t>Control Area</a:t>
+                      </a:r>
+                    </a:p>
+                  </a:txBody>
+                  <a:tcPr/>
+                </a:tc>
+                <a:tc>
+                  <a:txBody>
+                    <a:bodyPr/>
+                    <a:lstStyle/>
+                    <a:p>
+                      <a:pPr>
+                        <a:defRPr b="1" sz="1100"/>
+                      </a:pPr>
+                      <a:r>
+                        <a:t>Owner</a:t>
+                      </a:r>
+                    </a:p>
+                  </a:txBody>
+                  <a:tcPr/>
+                </a:tc>
+                <a:tc>
+                  <a:txBody>
+                    <a:bodyPr/>
+                    <a:lstStyle/>
+                    <a:p>
+                      <a:pPr>
+                        <a:defRPr b="1" sz="1100"/>
+                      </a:pPr>
+                      <a:r>
+                        <a:t>Target SLA</a:t>
+                      </a:r>
+                    </a:p>
+                  </a:txBody>
+                  <a:tcPr/>
+                </a:tc>
+                <a:tc>
+                  <a:txBody>
+                    <a:bodyPr/>
+                    <a:lstStyle/>
+                    <a:p>
+                      <a:pPr>
+                        <a:defRPr b="1" sz="1100"/>
+                      </a:pPr>
+                      <a:r>
+                        <a:t>Verification Status</a:t>
+                      </a:r>
+                    </a:p>
+                  </a:txBody>
+                  <a:tcPr/>
+                </a:tc>
+              </a:tr>
+              <a:tr h="347472">
+                <a:tc>
+                  <a:txBody>
+                    <a:bodyPr/>
+                    <a:lstStyle/>
+                    <a:p>
+                      <a:pPr>
+                        <a:defRPr sz="1000"/>
+                      </a:pPr>
+                      <a:r>
+                        <a:t>Competitive Intelligence</a:t>
+                      </a:r>
+                    </a:p>
+                  </a:txBody>
+                  <a:tcPr/>
+                </a:tc>
+                <a:tc>
+                  <a:txBody>
+                    <a:bodyPr/>
+                    <a:lstStyle/>
+                    <a:p>
+                      <a:pPr>
+                        <a:defRPr sz="1000"/>
+                      </a:pPr>
+                      <a:r>
+                        <a:t>Nina Patel</a:t>
+                      </a:r>
+                    </a:p>
+                  </a:txBody>
+                  <a:tcPr/>
+                </a:tc>
+                <a:tc>
+                  <a:txBody>
+                    <a:bodyPr/>
+                    <a:lstStyle/>
+                    <a:p>
+                      <a:pPr>
+                        <a:defRPr sz="1000"/>
+                      </a:pPr>
+                      <a:r>
+                        <a:t>5 business days</a:t>
+                      </a:r>
+                    </a:p>
+                  </a:txBody>
+                  <a:tcPr/>
+                </a:tc>
+                <a:tc>
+                  <a:txBody>
+                    <a:bodyPr/>
+                    <a:lstStyle/>
+                    <a:p>
+                      <a:pPr>
+                        <a:defRPr sz="1000"/>
+                      </a:pPr>
+                      <a:r>
+                        <a:t>Verified</a:t>
+                      </a:r>
+                    </a:p>
+                  </a:txBody>
+                  <a:tcPr/>
+                </a:tc>
+              </a:tr>
+              <a:tr h="347472">
+                <a:tc>
+                  <a:txBody>
+                    <a:bodyPr/>
+                    <a:lstStyle/>
+                    <a:p>
+                      <a:pPr>
+                        <a:defRPr sz="1000"/>
+                      </a:pPr>
+                      <a:r>
+                        <a:t>Market Positioning Brief Gate 1</a:t>
+                      </a:r>
+                    </a:p>
+                  </a:txBody>
+                  <a:tcPr/>
+                </a:tc>
+                <a:tc>
+                  <a:txBody>
+                    <a:bodyPr/>
+                    <a:lstStyle/>
+                    <a:p>
+                      <a:pPr>
+                        <a:defRPr sz="1000"/>
+                      </a:pPr>
+                      <a:r>
+                        <a:t>Nina Patel</a:t>
+                      </a:r>
+                    </a:p>
+                  </a:txBody>
+                  <a:tcPr/>
+                </a:tc>
+                <a:tc>
+                  <a:txBody>
+                    <a:bodyPr/>
+                    <a:lstStyle/>
+                    <a:p>
+                      <a:pPr>
+                        <a:defRPr sz="1000"/>
+                      </a:pPr>
+                      <a:r>
+                        <a:t>3 business days</a:t>
+                      </a:r>
+                    </a:p>
+                  </a:txBody>
+                  <a:tcPr/>
+                </a:tc>
+                <a:tc>
+                  <a:txBody>
+                    <a:bodyPr/>
+                    <a:lstStyle/>
+                    <a:p>
+                      <a:pPr>
+                        <a:defRPr sz="1000"/>
+                      </a:pPr>
+                      <a:r>
+                        <a:t>Active</a:t>
+                      </a:r>
+                    </a:p>
+                  </a:txBody>
+                  <a:tcPr/>
+                </a:tc>
+              </a:tr>
+              <a:tr h="347472">
+                <a:tc>
+                  <a:txBody>
+                    <a:bodyPr/>
+                    <a:lstStyle/>
+                    <a:p>
+                      <a:pPr>
+                        <a:defRPr sz="1000"/>
+                      </a:pPr>
+                      <a:r>
+                        <a:t>Market Positioning Brief Gate 2</a:t>
+                      </a:r>
+                    </a:p>
+                  </a:txBody>
+                  <a:tcPr/>
+                </a:tc>
+                <a:tc>
+                  <a:txBody>
+                    <a:bodyPr/>
+                    <a:lstStyle/>
+                    <a:p>
+                      <a:pPr>
+                        <a:defRPr sz="1000"/>
+                      </a:pPr>
+                      <a:r>
+                        <a:t>Nina Patel</a:t>
+                      </a:r>
+                    </a:p>
+                  </a:txBody>
+                  <a:tcPr/>
+                </a:tc>
+                <a:tc>
+                  <a:txBody>
+                    <a:bodyPr/>
+                    <a:lstStyle/>
+                    <a:p>
+                      <a:pPr>
+                        <a:defRPr sz="1000"/>
+                      </a:pPr>
+                      <a:r>
+                        <a:t>10 business days</a:t>
+                      </a:r>
+                    </a:p>
+                  </a:txBody>
+                  <a:tcPr/>
+                </a:tc>
+                <a:tc>
+                  <a:txBody>
+                    <a:bodyPr/>
+                    <a:lstStyle/>
+                    <a:p>
+                      <a:pPr>
+                        <a:defRPr sz="1000"/>
+                      </a:pPr>
+                      <a:r>
+                        <a:t>Monitored</a:t>
+                      </a:r>
+                    </a:p>
+                  </a:txBody>
+                  <a:tcPr/>
+                </a:tc>
+              </a:tr>
+            </a:tbl>
+          </a:graphicData>
+        </a:graphic>
+      </p:graphicFrame>
+      <p:pic>
+        <p:nvPicPr>
+          <p:cNvPr id="5" name="Picture 4" descr="image.png"/>
+          <p:cNvPicPr>
+            <a:picLocks noChangeAspect="1"/>
+          </p:cNvPicPr>
+          <p:nvPr/>
+        </p:nvPicPr>
+        <p:blipFill>
+          <a:blip r:embed="rId2"/>
+          <a:stretch>
+            <a:fillRect/>
+          </a:stretch>
+        </p:blipFill>
+        <p:spPr>
+          <a:xfrm>
+            <a:off x="6492240" y="3703320"/>
+            <a:ext cx="5120640" cy="1828800"/>
+          </a:xfrm>
+          <a:prstGeom prst="rect">
+            <a:avLst/>
+          </a:prstGeom>
+        </p:spPr>
+      </p:pic>
+    </p:spTree>
+  </p:cSld>
+  <p:clrMapOvr>
+    <a:masterClrMapping/>
+  </p:clrMapOvr>
+</p:sld>
+</file>
+
+<file path=ppt/slides/slide10.xml><?xml version="1.0" encoding="utf-8"?>
+<p:sld xmlns:a="http://schemas.openxmlformats.org/drawingml/2006/main" xmlns:p="http://schemas.openxmlformats.org/presentationml/2006/main" xmlns:r="http://schemas.openxmlformats.org/officeDocument/2006/relationships">
+  <p:cSld>
+    <p:spTree>
+      <p:nvGrpSpPr>
+        <p:cNvPr id="1" name=""/>
+        <p:cNvGrpSpPr/>
+        <p:nvPr/>
+      </p:nvGrpSpPr>
+      <p:grpSpPr/>
+      <p:sp>
+        <p:nvSpPr>
+          <p:cNvPr id="2" name="Title 1"/>
+          <p:cNvSpPr>
+            <a:spLocks noGrp="1"/>
+          </p:cNvSpPr>
+          <p:nvPr>
+            <p:ph type="title"/>
+          </p:nvPr>
+        </p:nvSpPr>
+        <p:spPr/>
+        <p:txBody>
+          <a:bodyPr/>
+          <a:lstStyle/>
+          <a:p>
+            <a:r>
+              <a:t>10. Cross-Functional Dependencies - Market Positioning Brief</a:t>
+            </a:r>
+          </a:p>
+        </p:txBody>
+      </p:sp>
+      <p:sp>
+        <p:nvSpPr>
+          <p:cNvPr id="3" name="Content Placeholder 2"/>
+          <p:cNvSpPr>
+            <a:spLocks noGrp="1"/>
+          </p:cNvSpPr>
+          <p:nvPr>
+            <p:ph idx="1"/>
+          </p:nvPr>
+        </p:nvSpPr>
+        <p:spPr/>
+        <p:txBody>
+          <a:bodyPr/>
+          <a:lstStyle/>
+          <a:p>
+            <a:r>
+              <a:t>Summarizes the competitive landscape and recommended positioning statement for the current fiscal year. Section 10 (Cross-Functional Dependencies) applies to Competitive Intelligence within Sales &amp; Marketing Knowledge Hub and is maintained by Nina Patel. Documents upstream and downstream team dependencies and service-level commitments.</a:t>
+            </a:r>
+          </a:p>
+          <a:p>
+            <a:pPr lvl="1"/>
+            <a:r>
+              <a:t>Recommended positioning emphasizes real-time data freshness and integration breadth.</a:t>
+            </a:r>
+          </a:p>
+          <a:p>
+            <a:pPr lvl="1"/>
+            <a:r>
+              <a:t>Positioning brief is reviewed with sales leadership before each fiscal year planning cycle.</a:t>
+            </a:r>
+          </a:p>
+          <a:p>
+            <a:pPr lvl="1"/>
+            <a:r>
+              <a:t>Section 10 review cadence is tracked by Nina Patel under Competitive Intelligence governance.</a:t>
+            </a:r>
+          </a:p>
+        </p:txBody>
+      </p:sp>
+      <p:graphicFrame>
+        <p:nvGraphicFramePr>
+          <p:cNvPr id="4" name="Table 3"/>
+          <p:cNvGraphicFramePr>
+            <a:graphicFrameLocks noGrp="1"/>
+          </p:cNvGraphicFramePr>
+          <p:nvPr/>
+        </p:nvGraphicFramePr>
+        <p:xfrm>
+          <a:off x="548640" y="3749039"/>
+          <a:ext cx="5669280" cy="1737360"/>
+        </p:xfrm>
+        <a:graphic>
+          <a:graphicData uri="http://schemas.openxmlformats.org/drawingml/2006/table">
+            <a:tbl>
+              <a:tblPr firstRow="1" bandRow="1">
+                <a:tableStyleId>{5C22544A-7EE6-4342-B048-85BDC9FD1C3A}</a:tableStyleId>
+              </a:tblPr>
+              <a:tblGrid>
+                <a:gridCol w="1417320"/>
+                <a:gridCol w="1417320"/>
+                <a:gridCol w="1417320"/>
+                <a:gridCol w="1417320"/>
+              </a:tblGrid>
+              <a:tr h="347472">
+                <a:tc>
+                  <a:txBody>
+                    <a:bodyPr/>
+                    <a:lstStyle/>
+                    <a:p>
+                      <a:pPr>
+                        <a:defRPr b="1" sz="1100"/>
+                      </a:pPr>
+                      <a:r>
+                        <a:t>Control Area</a:t>
+                      </a:r>
+                    </a:p>
+                  </a:txBody>
+                  <a:tcPr/>
+                </a:tc>
+                <a:tc>
+                  <a:txBody>
+                    <a:bodyPr/>
+                    <a:lstStyle/>
+                    <a:p>
+                      <a:pPr>
+                        <a:defRPr b="1" sz="1100"/>
+                      </a:pPr>
+                      <a:r>
+                        <a:t>Owner</a:t>
+                      </a:r>
+                    </a:p>
+                  </a:txBody>
+                  <a:tcPr/>
+                </a:tc>
+                <a:tc>
+                  <a:txBody>
+                    <a:bodyPr/>
+                    <a:lstStyle/>
+                    <a:p>
+                      <a:pPr>
+                        <a:defRPr b="1" sz="1100"/>
+                      </a:pPr>
+                      <a:r>
+                        <a:t>Target SLA</a:t>
+                      </a:r>
+                    </a:p>
+                  </a:txBody>
+                  <a:tcPr/>
+                </a:tc>
+                <a:tc>
+                  <a:txBody>
+                    <a:bodyPr/>
+                    <a:lstStyle/>
+                    <a:p>
+                      <a:pPr>
+                        <a:defRPr b="1" sz="1100"/>
+                      </a:pPr>
+                      <a:r>
+                        <a:t>Verification Status</a:t>
+                      </a:r>
+                    </a:p>
+                  </a:txBody>
+                  <a:tcPr/>
+                </a:tc>
+              </a:tr>
+              <a:tr h="347472">
+                <a:tc>
+                  <a:txBody>
+                    <a:bodyPr/>
+                    <a:lstStyle/>
+                    <a:p>
+                      <a:pPr>
+                        <a:defRPr sz="1000"/>
+                      </a:pPr>
+                      <a:r>
+                        <a:t>Competitive Intelligence</a:t>
+                      </a:r>
+                    </a:p>
+                  </a:txBody>
+                  <a:tcPr/>
+                </a:tc>
+                <a:tc>
+                  <a:txBody>
+                    <a:bodyPr/>
+                    <a:lstStyle/>
+                    <a:p>
+                      <a:pPr>
+                        <a:defRPr sz="1000"/>
+                      </a:pPr>
+                      <a:r>
+                        <a:t>Nina Patel</a:t>
+                      </a:r>
+                    </a:p>
+                  </a:txBody>
+                  <a:tcPr/>
+                </a:tc>
+                <a:tc>
+                  <a:txBody>
+                    <a:bodyPr/>
+                    <a:lstStyle/>
+                    <a:p>
+                      <a:pPr>
+                        <a:defRPr sz="1000"/>
+                      </a:pPr>
+                      <a:r>
+                        <a:t>5 business days</a:t>
+                      </a:r>
+                    </a:p>
+                  </a:txBody>
+                  <a:tcPr/>
+                </a:tc>
+                <a:tc>
+                  <a:txBody>
+                    <a:bodyPr/>
+                    <a:lstStyle/>
+                    <a:p>
+                      <a:pPr>
+                        <a:defRPr sz="1000"/>
+                      </a:pPr>
+                      <a:r>
+                        <a:t>Verified</a:t>
+                      </a:r>
+                    </a:p>
+                  </a:txBody>
+                  <a:tcPr/>
+                </a:tc>
+              </a:tr>
+              <a:tr h="347472">
+                <a:tc>
+                  <a:txBody>
+                    <a:bodyPr/>
+                    <a:lstStyle/>
+                    <a:p>
+                      <a:pPr>
+                        <a:defRPr sz="1000"/>
+                      </a:pPr>
+                      <a:r>
+                        <a:t>Market Positioning Brief Gate 1</a:t>
+                      </a:r>
+                    </a:p>
+                  </a:txBody>
+                  <a:tcPr/>
+                </a:tc>
+                <a:tc>
+                  <a:txBody>
+                    <a:bodyPr/>
+                    <a:lstStyle/>
+                    <a:p>
+                      <a:pPr>
+                        <a:defRPr sz="1000"/>
+                      </a:pPr>
+                      <a:r>
+                        <a:t>Nina Patel</a:t>
+                      </a:r>
+                    </a:p>
+                  </a:txBody>
+                  <a:tcPr/>
+                </a:tc>
+                <a:tc>
+                  <a:txBody>
+                    <a:bodyPr/>
+                    <a:lstStyle/>
+                    <a:p>
+                      <a:pPr>
+                        <a:defRPr sz="1000"/>
+                      </a:pPr>
+                      <a:r>
+                        <a:t>3 business days</a:t>
+                      </a:r>
+                    </a:p>
+                  </a:txBody>
+                  <a:tcPr/>
+                </a:tc>
+                <a:tc>
+                  <a:txBody>
+                    <a:bodyPr/>
+                    <a:lstStyle/>
+                    <a:p>
+                      <a:pPr>
+                        <a:defRPr sz="1000"/>
+                      </a:pPr>
+                      <a:r>
+                        <a:t>Active</a:t>
+                      </a:r>
+                    </a:p>
+                  </a:txBody>
+                  <a:tcPr/>
+                </a:tc>
+              </a:tr>
+              <a:tr h="347472">
+                <a:tc>
+                  <a:txBody>
+                    <a:bodyPr/>
+                    <a:lstStyle/>
+                    <a:p>
+                      <a:pPr>
+                        <a:defRPr sz="1000"/>
+                      </a:pPr>
+                      <a:r>
+                        <a:t>Market Positioning Brief Gate 2</a:t>
+                      </a:r>
+                    </a:p>
+                  </a:txBody>
+                  <a:tcPr/>
+                </a:tc>
+                <a:tc>
+                  <a:txBody>
+                    <a:bodyPr/>
+                    <a:lstStyle/>
+                    <a:p>
+                      <a:pPr>
+                        <a:defRPr sz="1000"/>
+                      </a:pPr>
+                      <a:r>
+                        <a:t>Nina Patel</a:t>
+                      </a:r>
+                    </a:p>
+                  </a:txBody>
+                  <a:tcPr/>
+                </a:tc>
+                <a:tc>
+                  <a:txBody>
+                    <a:bodyPr/>
+                    <a:lstStyle/>
+                    <a:p>
+                      <a:pPr>
+                        <a:defRPr sz="1000"/>
+                      </a:pPr>
+                      <a:r>
+                        <a:t>10 business days</a:t>
+                      </a:r>
+                    </a:p>
+                  </a:txBody>
+                  <a:tcPr/>
+                </a:tc>
+                <a:tc>
+                  <a:txBody>
+                    <a:bodyPr/>
+                    <a:lstStyle/>
+                    <a:p>
+                      <a:pPr>
+                        <a:defRPr sz="1000"/>
+                      </a:pPr>
+                      <a:r>
+                        <a:t>Monitored</a:t>
+                      </a:r>
+                    </a:p>
+                  </a:txBody>
+                  <a:tcPr/>
+                </a:tc>
+              </a:tr>
+              <a:tr h="347472">
+                <a:tc>
+                  <a:txBody>
+                    <a:bodyPr/>
+                    <a:lstStyle/>
+                    <a:p>
+                      <a:pPr>
+                        <a:defRPr sz="1000"/>
+                      </a:pPr>
+                      <a:r>
+                        <a:t>Sec-10</a:t>
+                      </a:r>
+                    </a:p>
+                  </a:txBody>
+                  <a:tcPr/>
+                </a:tc>
+                <a:tc>
+                  <a:txBody>
+                    <a:bodyPr/>
+                    <a:lstStyle/>
+                    <a:p>
+                      <a:pPr>
+                        <a:defRPr sz="1000"/>
+                      </a:pPr>
+                      <a:r>
+                        <a:t>Nina Patel</a:t>
+                      </a:r>
+                    </a:p>
+                  </a:txBody>
+                  <a:tcPr/>
+                </a:tc>
+                <a:tc>
+                  <a:txBody>
+                    <a:bodyPr/>
+                    <a:lstStyle/>
+                    <a:p>
+                      <a:pPr>
+                        <a:defRPr sz="1000"/>
+                      </a:pPr>
+                      <a:r>
+                        <a:t>5 business days</a:t>
+                      </a:r>
+                    </a:p>
+                  </a:txBody>
+                  <a:tcPr/>
+                </a:tc>
+                <a:tc>
+                  <a:txBody>
+                    <a:bodyPr/>
+                    <a:lstStyle/>
+                    <a:p>
+                      <a:pPr>
+                        <a:defRPr sz="1000"/>
+                      </a:pPr>
+                      <a:r>
+                        <a:t>Stage 10 Verified</a:t>
+                      </a:r>
+                    </a:p>
+                  </a:txBody>
+                  <a:tcPr/>
+                </a:tc>
+              </a:tr>
+            </a:tbl>
+          </a:graphicData>
+        </a:graphic>
+      </p:graphicFrame>
+      <p:pic>
+        <p:nvPicPr>
+          <p:cNvPr id="5" name="Picture 4" descr="image.png"/>
+          <p:cNvPicPr>
+            <a:picLocks noChangeAspect="1"/>
+          </p:cNvPicPr>
+          <p:nvPr/>
+        </p:nvPicPr>
+        <p:blipFill>
+          <a:blip r:embed="rId2"/>
+          <a:stretch>
+            <a:fillRect/>
+          </a:stretch>
+        </p:blipFill>
+        <p:spPr>
+          <a:xfrm>
+            <a:off x="6492240" y="3703320"/>
+            <a:ext cx="5120640" cy="1828800"/>
+          </a:xfrm>
+          <a:prstGeom prst="rect">
+            <a:avLst/>
+          </a:prstGeom>
+        </p:spPr>
+      </p:pic>
+    </p:spTree>
+  </p:cSld>
+  <p:clrMapOvr>
+    <a:masterClrMapping/>
+  </p:clrMapOvr>
+</p:sld>
+</file>
+
+<file path=ppt/slides/slide11.xml><?xml version="1.0" encoding="utf-8"?>
+<p:sld xmlns:a="http://schemas.openxmlformats.org/drawingml/2006/main" xmlns:p="http://schemas.openxmlformats.org/presentationml/2006/main" xmlns:r="http://schemas.openxmlformats.org/officeDocument/2006/relationships">
+  <p:cSld>
+    <p:spTree>
+      <p:nvGrpSpPr>
+        <p:cNvPr id="1" name=""/>
+        <p:cNvGrpSpPr/>
+        <p:nvPr/>
+      </p:nvGrpSpPr>
+      <p:grpSpPr/>
+      <p:sp>
+        <p:nvSpPr>
+          <p:cNvPr id="2" name="Title 1"/>
+          <p:cNvSpPr>
+            <a:spLocks noGrp="1"/>
+          </p:cNvSpPr>
+          <p:nvPr>
+            <p:ph type="title"/>
+          </p:nvPr>
+        </p:nvSpPr>
+        <p:spPr/>
+        <p:txBody>
+          <a:bodyPr/>
+          <a:lstStyle/>
+          <a:p>
+            <a:r>
+              <a:t>11. Continuous Improvement Roadmap - Market Positioning Brief</a:t>
+            </a:r>
+          </a:p>
+        </p:txBody>
+      </p:sp>
+      <p:sp>
+        <p:nvSpPr>
+          <p:cNvPr id="3" name="Content Placeholder 2"/>
+          <p:cNvSpPr>
+            <a:spLocks noGrp="1"/>
+          </p:cNvSpPr>
+          <p:nvPr>
+            <p:ph idx="1"/>
+          </p:nvPr>
+        </p:nvSpPr>
+        <p:spPr/>
+        <p:txBody>
+          <a:bodyPr/>
+          <a:lstStyle/>
+          <a:p>
+            <a:r>
+              <a:t>Summarizes the competitive landscape and recommended positioning statement for the current fiscal year. Section 11 (Continuous Improvement Roadmap) applies to Competitive Intelligence within Sales &amp; Marketing Knowledge Hub and is maintained by Nina Patel. Schedules quarterly optimization milestones, automation targets, and capability reviews.</a:t>
+            </a:r>
+          </a:p>
+          <a:p>
+            <a:pPr lvl="1"/>
+            <a:r>
+              <a:t>Positioning brief is reviewed with sales leadership before each fiscal year planning cycle.</a:t>
+            </a:r>
+          </a:p>
+          <a:p>
+            <a:pPr lvl="1"/>
+            <a:r>
+              <a:t>Messaging updates from this brief flow into the brand and messaging guidelines.</a:t>
+            </a:r>
+          </a:p>
+          <a:p>
+            <a:pPr lvl="1"/>
+            <a:r>
+              <a:t>Section 11 review cadence is tracked by Nina Patel under Competitive Intelligence governance.</a:t>
+            </a:r>
+          </a:p>
+        </p:txBody>
+      </p:sp>
+      <p:graphicFrame>
+        <p:nvGraphicFramePr>
+          <p:cNvPr id="4" name="Table 3"/>
+          <p:cNvGraphicFramePr>
+            <a:graphicFrameLocks noGrp="1"/>
+          </p:cNvGraphicFramePr>
+          <p:nvPr/>
+        </p:nvGraphicFramePr>
+        <p:xfrm>
+          <a:off x="548640" y="3749039"/>
+          <a:ext cx="5669280" cy="1737360"/>
+        </p:xfrm>
+        <a:graphic>
+          <a:graphicData uri="http://schemas.openxmlformats.org/drawingml/2006/table">
+            <a:tbl>
+              <a:tblPr firstRow="1" bandRow="1">
+                <a:tableStyleId>{5C22544A-7EE6-4342-B048-85BDC9FD1C3A}</a:tableStyleId>
+              </a:tblPr>
+              <a:tblGrid>
+                <a:gridCol w="1417320"/>
+                <a:gridCol w="1417320"/>
+                <a:gridCol w="1417320"/>
+                <a:gridCol w="1417320"/>
+              </a:tblGrid>
+              <a:tr h="347472">
+                <a:tc>
+                  <a:txBody>
+                    <a:bodyPr/>
+                    <a:lstStyle/>
+                    <a:p>
+                      <a:pPr>
+                        <a:defRPr b="1" sz="1100"/>
+                      </a:pPr>
+                      <a:r>
+                        <a:t>Control Area</a:t>
+                      </a:r>
+                    </a:p>
+                  </a:txBody>
+                  <a:tcPr/>
+                </a:tc>
+                <a:tc>
+                  <a:txBody>
+                    <a:bodyPr/>
+                    <a:lstStyle/>
+                    <a:p>
+                      <a:pPr>
+                        <a:defRPr b="1" sz="1100"/>
+                      </a:pPr>
+                      <a:r>
+                        <a:t>Owner</a:t>
+                      </a:r>
+                    </a:p>
+                  </a:txBody>
+                  <a:tcPr/>
+                </a:tc>
+                <a:tc>
+                  <a:txBody>
+                    <a:bodyPr/>
+                    <a:lstStyle/>
+                    <a:p>
+                      <a:pPr>
+                        <a:defRPr b="1" sz="1100"/>
+                      </a:pPr>
+                      <a:r>
+                        <a:t>Target SLA</a:t>
+                      </a:r>
+                    </a:p>
+                  </a:txBody>
+                  <a:tcPr/>
+                </a:tc>
+                <a:tc>
+                  <a:txBody>
+                    <a:bodyPr/>
+                    <a:lstStyle/>
+                    <a:p>
+                      <a:pPr>
+                        <a:defRPr b="1" sz="1100"/>
+                      </a:pPr>
+                      <a:r>
+                        <a:t>Verification Status</a:t>
+                      </a:r>
+                    </a:p>
+                  </a:txBody>
+                  <a:tcPr/>
+                </a:tc>
+              </a:tr>
+              <a:tr h="347472">
+                <a:tc>
+                  <a:txBody>
+                    <a:bodyPr/>
+                    <a:lstStyle/>
+                    <a:p>
+                      <a:pPr>
+                        <a:defRPr sz="1000"/>
+                      </a:pPr>
+                      <a:r>
+                        <a:t>Competitive Intelligence</a:t>
+                      </a:r>
+                    </a:p>
+                  </a:txBody>
+                  <a:tcPr/>
+                </a:tc>
+                <a:tc>
+                  <a:txBody>
+                    <a:bodyPr/>
+                    <a:lstStyle/>
+                    <a:p>
+                      <a:pPr>
+                        <a:defRPr sz="1000"/>
+                      </a:pPr>
+                      <a:r>
+                        <a:t>Nina Patel</a:t>
+                      </a:r>
+                    </a:p>
+                  </a:txBody>
+                  <a:tcPr/>
+                </a:tc>
+                <a:tc>
+                  <a:txBody>
+                    <a:bodyPr/>
+                    <a:lstStyle/>
+                    <a:p>
+                      <a:pPr>
+                        <a:defRPr sz="1000"/>
+                      </a:pPr>
+                      <a:r>
+                        <a:t>5 business days</a:t>
+                      </a:r>
+                    </a:p>
+                  </a:txBody>
+                  <a:tcPr/>
+                </a:tc>
+                <a:tc>
+                  <a:txBody>
+                    <a:bodyPr/>
+                    <a:lstStyle/>
+                    <a:p>
+                      <a:pPr>
+                        <a:defRPr sz="1000"/>
+                      </a:pPr>
+                      <a:r>
+                        <a:t>Verified</a:t>
+                      </a:r>
+                    </a:p>
+                  </a:txBody>
+                  <a:tcPr/>
+                </a:tc>
+              </a:tr>
+              <a:tr h="347472">
+                <a:tc>
+                  <a:txBody>
+                    <a:bodyPr/>
+                    <a:lstStyle/>
+                    <a:p>
+                      <a:pPr>
+                        <a:defRPr sz="1000"/>
+                      </a:pPr>
+                      <a:r>
+                        <a:t>Market Positioning Brief Gate 1</a:t>
+                      </a:r>
+                    </a:p>
+                  </a:txBody>
+                  <a:tcPr/>
+                </a:tc>
+                <a:tc>
+                  <a:txBody>
+                    <a:bodyPr/>
+                    <a:lstStyle/>
+                    <a:p>
+                      <a:pPr>
+                        <a:defRPr sz="1000"/>
+                      </a:pPr>
+                      <a:r>
+                        <a:t>Nina Patel</a:t>
+                      </a:r>
+                    </a:p>
+                  </a:txBody>
+                  <a:tcPr/>
+                </a:tc>
+                <a:tc>
+                  <a:txBody>
+                    <a:bodyPr/>
+                    <a:lstStyle/>
+                    <a:p>
+                      <a:pPr>
+                        <a:defRPr sz="1000"/>
+                      </a:pPr>
+                      <a:r>
+                        <a:t>3 business days</a:t>
+                      </a:r>
+                    </a:p>
+                  </a:txBody>
+                  <a:tcPr/>
+                </a:tc>
+                <a:tc>
+                  <a:txBody>
+                    <a:bodyPr/>
+                    <a:lstStyle/>
+                    <a:p>
+                      <a:pPr>
+                        <a:defRPr sz="1000"/>
+                      </a:pPr>
+                      <a:r>
+                        <a:t>Active</a:t>
+                      </a:r>
+                    </a:p>
+                  </a:txBody>
+                  <a:tcPr/>
+                </a:tc>
+              </a:tr>
+              <a:tr h="347472">
+                <a:tc>
+                  <a:txBody>
+                    <a:bodyPr/>
+                    <a:lstStyle/>
+                    <a:p>
+                      <a:pPr>
+                        <a:defRPr sz="1000"/>
+                      </a:pPr>
+                      <a:r>
+                        <a:t>Market Positioning Brief Gate 2</a:t>
+                      </a:r>
+                    </a:p>
+                  </a:txBody>
+                  <a:tcPr/>
+                </a:tc>
+                <a:tc>
+                  <a:txBody>
+                    <a:bodyPr/>
+                    <a:lstStyle/>
+                    <a:p>
+                      <a:pPr>
+                        <a:defRPr sz="1000"/>
+                      </a:pPr>
+                      <a:r>
+                        <a:t>Nina Patel</a:t>
+                      </a:r>
+                    </a:p>
+                  </a:txBody>
+                  <a:tcPr/>
+                </a:tc>
+                <a:tc>
+                  <a:txBody>
+                    <a:bodyPr/>
+                    <a:lstStyle/>
+                    <a:p>
+                      <a:pPr>
+                        <a:defRPr sz="1000"/>
+                      </a:pPr>
+                      <a:r>
+                        <a:t>10 business days</a:t>
+                      </a:r>
+                    </a:p>
+                  </a:txBody>
+                  <a:tcPr/>
+                </a:tc>
+                <a:tc>
+                  <a:txBody>
+                    <a:bodyPr/>
+                    <a:lstStyle/>
+                    <a:p>
+                      <a:pPr>
+                        <a:defRPr sz="1000"/>
+                      </a:pPr>
+                      <a:r>
+                        <a:t>Monitored</a:t>
+                      </a:r>
+                    </a:p>
+                  </a:txBody>
+                  <a:tcPr/>
+                </a:tc>
+              </a:tr>
+              <a:tr h="347472">
+                <a:tc>
+                  <a:txBody>
+                    <a:bodyPr/>
+                    <a:lstStyle/>
+                    <a:p>
+                      <a:pPr>
+                        <a:defRPr sz="1000"/>
+                      </a:pPr>
+                      <a:r>
+                        <a:t>Sec-11</a:t>
+                      </a:r>
+                    </a:p>
+                  </a:txBody>
+                  <a:tcPr/>
+                </a:tc>
+                <a:tc>
+                  <a:txBody>
+                    <a:bodyPr/>
+                    <a:lstStyle/>
+                    <a:p>
+                      <a:pPr>
+                        <a:defRPr sz="1000"/>
+                      </a:pPr>
+                      <a:r>
+                        <a:t>Nina Patel</a:t>
+                      </a:r>
+                    </a:p>
+                  </a:txBody>
+                  <a:tcPr/>
+                </a:tc>
+                <a:tc>
+                  <a:txBody>
+                    <a:bodyPr/>
+                    <a:lstStyle/>
+                    <a:p>
+                      <a:pPr>
+                        <a:defRPr sz="1000"/>
+                      </a:pPr>
+                      <a:r>
+                        <a:t>3 business days</a:t>
+                      </a:r>
+                    </a:p>
+                  </a:txBody>
+                  <a:tcPr/>
+                </a:tc>
+                <a:tc>
+                  <a:txBody>
+                    <a:bodyPr/>
+                    <a:lstStyle/>
+                    <a:p>
+                      <a:pPr>
+                        <a:defRPr sz="1000"/>
+                      </a:pPr>
+                      <a:r>
+                        <a:t>Stage 11 Verified</a:t>
+                      </a:r>
+                    </a:p>
+                  </a:txBody>
+                  <a:tcPr/>
+                </a:tc>
+              </a:tr>
+            </a:tbl>
+          </a:graphicData>
+        </a:graphic>
+      </p:graphicFrame>
+      <p:pic>
+        <p:nvPicPr>
+          <p:cNvPr id="5" name="Picture 4" descr="image.png"/>
+          <p:cNvPicPr>
+            <a:picLocks noChangeAspect="1"/>
+          </p:cNvPicPr>
+          <p:nvPr/>
+        </p:nvPicPr>
+        <p:blipFill>
+          <a:blip r:embed="rId2"/>
+          <a:stretch>
+            <a:fillRect/>
+          </a:stretch>
+        </p:blipFill>
+        <p:spPr>
+          <a:xfrm>
+            <a:off x="6492240" y="3703320"/>
+            <a:ext cx="5120640" cy="1828800"/>
+          </a:xfrm>
+          <a:prstGeom prst="rect">
+            <a:avLst/>
+          </a:prstGeom>
+        </p:spPr>
+      </p:pic>
+    </p:spTree>
+  </p:cSld>
+  <p:clrMapOvr>
+    <a:masterClrMapping/>
+  </p:clrMapOvr>
+</p:sld>
+</file>
+
+<file path=ppt/slides/slide12.xml><?xml version="1.0" encoding="utf-8"?>
+<p:sld xmlns:a="http://schemas.openxmlformats.org/drawingml/2006/main" xmlns:p="http://schemas.openxmlformats.org/presentationml/2006/main" xmlns:r="http://schemas.openxmlformats.org/officeDocument/2006/relationships">
+  <p:cSld>
+    <p:spTree>
+      <p:nvGrpSpPr>
+        <p:cNvPr id="1" name=""/>
+        <p:cNvGrpSpPr/>
+        <p:nvPr/>
+      </p:nvGrpSpPr>
+      <p:grpSpPr/>
+      <p:sp>
+        <p:nvSpPr>
+          <p:cNvPr id="2" name="Title 1"/>
+          <p:cNvSpPr>
+            <a:spLocks noGrp="1"/>
+          </p:cNvSpPr>
+          <p:nvPr>
+            <p:ph type="title"/>
+          </p:nvPr>
+        </p:nvSpPr>
+        <p:spPr/>
+        <p:txBody>
+          <a:bodyPr/>
+          <a:lstStyle/>
+          <a:p>
+            <a:r>
+              <a:t>12. Appendix, Lineage &amp; Sign-off - Market Positioning Brief</a:t>
+            </a:r>
+          </a:p>
+        </p:txBody>
+      </p:sp>
+      <p:sp>
+        <p:nvSpPr>
+          <p:cNvPr id="3" name="Content Placeholder 2"/>
+          <p:cNvSpPr>
+            <a:spLocks noGrp="1"/>
+          </p:cNvSpPr>
+          <p:nvPr>
+            <p:ph idx="1"/>
+          </p:nvPr>
+        </p:nvSpPr>
+        <p:spPr/>
+        <p:txBody>
+          <a:bodyPr/>
+          <a:lstStyle/>
+          <a:p>
+            <a:r>
+              <a:t>Summarizes the competitive landscape and recommended positioning statement for the current fiscal year. Section 12 (Appendix, Lineage &amp; Sign-off) applies to Competitive Intelligence within Sales &amp; Marketing Knowledge Hub and is maintained by Nina Patel. Records document lineage, governance metadata, version history, and owner sign-off.</a:t>
+            </a:r>
+          </a:p>
+          <a:p>
+            <a:pPr lvl="1"/>
+            <a:r>
+              <a:t>Messaging updates from this brief flow into the brand and messaging guidelines.</a:t>
+            </a:r>
+          </a:p>
+          <a:p>
+            <a:pPr lvl="1"/>
+            <a:r>
+              <a:t>Three primary competitors are tracked across pricing, features, and market presence.</a:t>
+            </a:r>
+          </a:p>
+          <a:p>
+            <a:pPr lvl="1"/>
+            <a:r>
+              <a:t>Section 12 review cadence is tracked by Nina Patel under Competitive Intelligence governance.</a:t>
+            </a:r>
+          </a:p>
+        </p:txBody>
+      </p:sp>
+      <p:graphicFrame>
+        <p:nvGraphicFramePr>
+          <p:cNvPr id="4" name="Table 3"/>
+          <p:cNvGraphicFramePr>
+            <a:graphicFrameLocks noGrp="1"/>
+          </p:cNvGraphicFramePr>
+          <p:nvPr/>
+        </p:nvGraphicFramePr>
+        <p:xfrm>
+          <a:off x="548640" y="3749039"/>
+          <a:ext cx="5669280" cy="1737360"/>
+        </p:xfrm>
+        <a:graphic>
+          <a:graphicData uri="http://schemas.openxmlformats.org/drawingml/2006/table">
+            <a:tbl>
+              <a:tblPr firstRow="1" bandRow="1">
+                <a:tableStyleId>{5C22544A-7EE6-4342-B048-85BDC9FD1C3A}</a:tableStyleId>
+              </a:tblPr>
+              <a:tblGrid>
+                <a:gridCol w="1417320"/>
+                <a:gridCol w="1417320"/>
+                <a:gridCol w="1417320"/>
+                <a:gridCol w="1417320"/>
+              </a:tblGrid>
+              <a:tr h="347472">
+                <a:tc>
+                  <a:txBody>
+                    <a:bodyPr/>
+                    <a:lstStyle/>
+                    <a:p>
+                      <a:pPr>
+                        <a:defRPr b="1" sz="1100"/>
+                      </a:pPr>
+                      <a:r>
+                        <a:t>Control Area</a:t>
+                      </a:r>
+                    </a:p>
+                  </a:txBody>
+                  <a:tcPr/>
+                </a:tc>
+                <a:tc>
+                  <a:txBody>
+                    <a:bodyPr/>
+                    <a:lstStyle/>
+                    <a:p>
+                      <a:pPr>
+                        <a:defRPr b="1" sz="1100"/>
+                      </a:pPr>
+                      <a:r>
+                        <a:t>Owner</a:t>
+                      </a:r>
+                    </a:p>
+                  </a:txBody>
+                  <a:tcPr/>
+                </a:tc>
+                <a:tc>
+                  <a:txBody>
+                    <a:bodyPr/>
+                    <a:lstStyle/>
+                    <a:p>
+                      <a:pPr>
+                        <a:defRPr b="1" sz="1100"/>
+                      </a:pPr>
+                      <a:r>
+                        <a:t>Target SLA</a:t>
+                      </a:r>
+                    </a:p>
+                  </a:txBody>
+                  <a:tcPr/>
+                </a:tc>
+                <a:tc>
+                  <a:txBody>
+                    <a:bodyPr/>
+                    <a:lstStyle/>
+                    <a:p>
+                      <a:pPr>
+                        <a:defRPr b="1" sz="1100"/>
+                      </a:pPr>
+                      <a:r>
+                        <a:t>Verification Status</a:t>
+                      </a:r>
+                    </a:p>
+                  </a:txBody>
+                  <a:tcPr/>
+                </a:tc>
+              </a:tr>
+              <a:tr h="347472">
+                <a:tc>
+                  <a:txBody>
+                    <a:bodyPr/>
+                    <a:lstStyle/>
+                    <a:p>
+                      <a:pPr>
+                        <a:defRPr sz="1000"/>
+                      </a:pPr>
+                      <a:r>
+                        <a:t>Competitive Intelligence</a:t>
+                      </a:r>
+                    </a:p>
+                  </a:txBody>
+                  <a:tcPr/>
+                </a:tc>
+                <a:tc>
+                  <a:txBody>
+                    <a:bodyPr/>
+                    <a:lstStyle/>
+                    <a:p>
+                      <a:pPr>
+                        <a:defRPr sz="1000"/>
+                      </a:pPr>
+                      <a:r>
+                        <a:t>Nina Patel</a:t>
+                      </a:r>
+                    </a:p>
+                  </a:txBody>
+                  <a:tcPr/>
+                </a:tc>
+                <a:tc>
+                  <a:txBody>
+                    <a:bodyPr/>
+                    <a:lstStyle/>
+                    <a:p>
+                      <a:pPr>
+                        <a:defRPr sz="1000"/>
+                      </a:pPr>
+                      <a:r>
+                        <a:t>5 business days</a:t>
+                      </a:r>
+                    </a:p>
+                  </a:txBody>
+                  <a:tcPr/>
+                </a:tc>
+                <a:tc>
+                  <a:txBody>
+                    <a:bodyPr/>
+                    <a:lstStyle/>
+                    <a:p>
+                      <a:pPr>
+                        <a:defRPr sz="1000"/>
+                      </a:pPr>
+                      <a:r>
+                        <a:t>Verified</a:t>
+                      </a:r>
+                    </a:p>
+                  </a:txBody>
+                  <a:tcPr/>
+                </a:tc>
+              </a:tr>
+              <a:tr h="347472">
+                <a:tc>
+                  <a:txBody>
+                    <a:bodyPr/>
+                    <a:lstStyle/>
+                    <a:p>
+                      <a:pPr>
+                        <a:defRPr sz="1000"/>
+                      </a:pPr>
+                      <a:r>
+                        <a:t>Market Positioning Brief Gate 1</a:t>
+                      </a:r>
+                    </a:p>
+                  </a:txBody>
+                  <a:tcPr/>
+                </a:tc>
+                <a:tc>
+                  <a:txBody>
+                    <a:bodyPr/>
+                    <a:lstStyle/>
+                    <a:p>
+                      <a:pPr>
+                        <a:defRPr sz="1000"/>
+                      </a:pPr>
+                      <a:r>
+                        <a:t>Nina Patel</a:t>
+                      </a:r>
+                    </a:p>
+                  </a:txBody>
+                  <a:tcPr/>
+                </a:tc>
+                <a:tc>
+                  <a:txBody>
+                    <a:bodyPr/>
+                    <a:lstStyle/>
+                    <a:p>
+                      <a:pPr>
+                        <a:defRPr sz="1000"/>
+                      </a:pPr>
+                      <a:r>
+                        <a:t>3 business days</a:t>
+                      </a:r>
+                    </a:p>
+                  </a:txBody>
+                  <a:tcPr/>
+                </a:tc>
+                <a:tc>
+                  <a:txBody>
+                    <a:bodyPr/>
+                    <a:lstStyle/>
+                    <a:p>
+                      <a:pPr>
+                        <a:defRPr sz="1000"/>
+                      </a:pPr>
+                      <a:r>
+                        <a:t>Active</a:t>
+                      </a:r>
+                    </a:p>
+                  </a:txBody>
+                  <a:tcPr/>
+                </a:tc>
+              </a:tr>
+              <a:tr h="347472">
+                <a:tc>
+                  <a:txBody>
+                    <a:bodyPr/>
+                    <a:lstStyle/>
+                    <a:p>
+                      <a:pPr>
+                        <a:defRPr sz="1000"/>
+                      </a:pPr>
+                      <a:r>
+                        <a:t>Market Positioning Brief Gate 2</a:t>
+                      </a:r>
+                    </a:p>
+                  </a:txBody>
+                  <a:tcPr/>
+                </a:tc>
+                <a:tc>
+                  <a:txBody>
+                    <a:bodyPr/>
+                    <a:lstStyle/>
+                    <a:p>
+                      <a:pPr>
+                        <a:defRPr sz="1000"/>
+                      </a:pPr>
+                      <a:r>
+                        <a:t>Nina Patel</a:t>
+                      </a:r>
+                    </a:p>
+                  </a:txBody>
+                  <a:tcPr/>
+                </a:tc>
+                <a:tc>
+                  <a:txBody>
+                    <a:bodyPr/>
+                    <a:lstStyle/>
+                    <a:p>
+                      <a:pPr>
+                        <a:defRPr sz="1000"/>
+                      </a:pPr>
+                      <a:r>
+                        <a:t>10 business days</a:t>
+                      </a:r>
+                    </a:p>
+                  </a:txBody>
+                  <a:tcPr/>
+                </a:tc>
+                <a:tc>
+                  <a:txBody>
+                    <a:bodyPr/>
+                    <a:lstStyle/>
+                    <a:p>
+                      <a:pPr>
+                        <a:defRPr sz="1000"/>
+                      </a:pPr>
+                      <a:r>
+                        <a:t>Monitored</a:t>
+                      </a:r>
+                    </a:p>
+                  </a:txBody>
+                  <a:tcPr/>
+                </a:tc>
+              </a:tr>
+              <a:tr h="347472">
+                <a:tc>
+                  <a:txBody>
+                    <a:bodyPr/>
+                    <a:lstStyle/>
+                    <a:p>
+                      <a:pPr>
+                        <a:defRPr sz="1000"/>
+                      </a:pPr>
+                      <a:r>
+                        <a:t>Sec-12</a:t>
+                      </a:r>
+                    </a:p>
+                  </a:txBody>
+                  <a:tcPr/>
+                </a:tc>
+                <a:tc>
+                  <a:txBody>
+                    <a:bodyPr/>
+                    <a:lstStyle/>
+                    <a:p>
+                      <a:pPr>
+                        <a:defRPr sz="1000"/>
+                      </a:pPr>
+                      <a:r>
+                        <a:t>Nina Patel</a:t>
+                      </a:r>
+                    </a:p>
+                  </a:txBody>
+                  <a:tcPr/>
+                </a:tc>
+                <a:tc>
+                  <a:txBody>
+                    <a:bodyPr/>
+                    <a:lstStyle/>
+                    <a:p>
+                      <a:pPr>
+                        <a:defRPr sz="1000"/>
+                      </a:pPr>
+                      <a:r>
+                        <a:t>10 business days</a:t>
+                      </a:r>
+                    </a:p>
+                  </a:txBody>
+                  <a:tcPr/>
+                </a:tc>
+                <a:tc>
+                  <a:txBody>
+                    <a:bodyPr/>
+                    <a:lstStyle/>
+                    <a:p>
+                      <a:pPr>
+                        <a:defRPr sz="1000"/>
+                      </a:pPr>
+                      <a:r>
+                        <a:t>Stage 12 Verified</a:t>
+                      </a:r>
+                    </a:p>
+                  </a:txBody>
+                  <a:tcPr/>
+                </a:tc>
+              </a:tr>
+            </a:tbl>
+          </a:graphicData>
+        </a:graphic>
+      </p:graphicFrame>
+      <p:pic>
+        <p:nvPicPr>
+          <p:cNvPr id="5" name="Picture 4" descr="image.png"/>
+          <p:cNvPicPr>
+            <a:picLocks noChangeAspect="1"/>
+          </p:cNvPicPr>
+          <p:nvPr/>
+        </p:nvPicPr>
+        <p:blipFill>
+          <a:blip r:embed="rId2"/>
+          <a:stretch>
+            <a:fillRect/>
+          </a:stretch>
+        </p:blipFill>
+        <p:spPr>
+          <a:xfrm>
+            <a:off x="6492240" y="3703320"/>
+            <a:ext cx="5120640" cy="1828800"/>
+          </a:xfrm>
+          <a:prstGeom prst="rect">
+            <a:avLst/>
+          </a:prstGeom>
+        </p:spPr>
+      </p:pic>
     </p:spTree>
   </p:cSld>
   <p:clrMapOvr>
@@ -3170,7 +4813,7 @@
           <a:lstStyle/>
           <a:p>
             <a:r>
-              <a:t>Overview</a:t>
+              <a:t>2. Architecture &amp; Process Flow - Market Positioning Brief</a:t>
             </a:r>
           </a:p>
         </p:txBody>
@@ -3191,35 +4834,3471 @@
           <a:lstStyle/>
           <a:p>
             <a:r>
-              <a:t>Summarizes the competitive landscape and recommended positioning statement for the current fiscal year.</a:t>
+              <a:t>Summarizes the competitive landscape and recommended positioning statement for the current fiscal year. Section 2 (Architecture &amp; Process Flow) applies to Competitive Intelligence within Sales &amp; Marketing Knowledge Hub and is maintained by Nina Patel. Maps end-to-end process stages, handoff gates, and system-of-record integrations.</a:t>
             </a:r>
           </a:p>
           <a:p>
             <a:pPr lvl="1"/>
             <a:r>
-              <a:t>Three primary competitors are tracked across pricing, features, and market presence.</a:t>
+              <a:t>Recommended positioning emphasizes real-time data freshness and integration breadth.</a:t>
             </a:r>
           </a:p>
           <a:p>
             <a:pPr lvl="1"/>
             <a:r>
-              <a:t>Recommended positioning emphasizes real-time data freshness and integration breadth.</a:t>
+              <a:t>Positioning brief is reviewed with sales leadership before each fiscal year planning cycle.</a:t>
             </a:r>
           </a:p>
           <a:p>
             <a:pPr lvl="1"/>
             <a:r>
-              <a:t>Positioning brief is reviewed with sales leadership before each fiscal year planning cycle.</a:t>
-            </a:r>
-          </a:p>
-          <a:p>
-            <a:pPr lvl="1"/>
-            <a:r>
-              <a:t>Messaging updates from this brief flow into the brand and messaging guidelines.</a:t>
+              <a:t>Section 2 review cadence is tracked by Nina Patel under Competitive Intelligence governance.</a:t>
             </a:r>
           </a:p>
         </p:txBody>
       </p:sp>
+      <p:graphicFrame>
+        <p:nvGraphicFramePr>
+          <p:cNvPr id="4" name="Table 3"/>
+          <p:cNvGraphicFramePr>
+            <a:graphicFrameLocks noGrp="1"/>
+          </p:cNvGraphicFramePr>
+          <p:nvPr/>
+        </p:nvGraphicFramePr>
+        <p:xfrm>
+          <a:off x="548640" y="3749039"/>
+          <a:ext cx="5669280" cy="1737360"/>
+        </p:xfrm>
+        <a:graphic>
+          <a:graphicData uri="http://schemas.openxmlformats.org/drawingml/2006/table">
+            <a:tbl>
+              <a:tblPr firstRow="1" bandRow="1">
+                <a:tableStyleId>{5C22544A-7EE6-4342-B048-85BDC9FD1C3A}</a:tableStyleId>
+              </a:tblPr>
+              <a:tblGrid>
+                <a:gridCol w="1417320"/>
+                <a:gridCol w="1417320"/>
+                <a:gridCol w="1417320"/>
+                <a:gridCol w="1417320"/>
+              </a:tblGrid>
+              <a:tr h="347472">
+                <a:tc>
+                  <a:txBody>
+                    <a:bodyPr/>
+                    <a:lstStyle/>
+                    <a:p>
+                      <a:pPr>
+                        <a:defRPr b="1" sz="1100"/>
+                      </a:pPr>
+                      <a:r>
+                        <a:t>Control Area</a:t>
+                      </a:r>
+                    </a:p>
+                  </a:txBody>
+                  <a:tcPr/>
+                </a:tc>
+                <a:tc>
+                  <a:txBody>
+                    <a:bodyPr/>
+                    <a:lstStyle/>
+                    <a:p>
+                      <a:pPr>
+                        <a:defRPr b="1" sz="1100"/>
+                      </a:pPr>
+                      <a:r>
+                        <a:t>Owner</a:t>
+                      </a:r>
+                    </a:p>
+                  </a:txBody>
+                  <a:tcPr/>
+                </a:tc>
+                <a:tc>
+                  <a:txBody>
+                    <a:bodyPr/>
+                    <a:lstStyle/>
+                    <a:p>
+                      <a:pPr>
+                        <a:defRPr b="1" sz="1100"/>
+                      </a:pPr>
+                      <a:r>
+                        <a:t>Target SLA</a:t>
+                      </a:r>
+                    </a:p>
+                  </a:txBody>
+                  <a:tcPr/>
+                </a:tc>
+                <a:tc>
+                  <a:txBody>
+                    <a:bodyPr/>
+                    <a:lstStyle/>
+                    <a:p>
+                      <a:pPr>
+                        <a:defRPr b="1" sz="1100"/>
+                      </a:pPr>
+                      <a:r>
+                        <a:t>Verification Status</a:t>
+                      </a:r>
+                    </a:p>
+                  </a:txBody>
+                  <a:tcPr/>
+                </a:tc>
+              </a:tr>
+              <a:tr h="347472">
+                <a:tc>
+                  <a:txBody>
+                    <a:bodyPr/>
+                    <a:lstStyle/>
+                    <a:p>
+                      <a:pPr>
+                        <a:defRPr sz="1000"/>
+                      </a:pPr>
+                      <a:r>
+                        <a:t>Competitive Intelligence</a:t>
+                      </a:r>
+                    </a:p>
+                  </a:txBody>
+                  <a:tcPr/>
+                </a:tc>
+                <a:tc>
+                  <a:txBody>
+                    <a:bodyPr/>
+                    <a:lstStyle/>
+                    <a:p>
+                      <a:pPr>
+                        <a:defRPr sz="1000"/>
+                      </a:pPr>
+                      <a:r>
+                        <a:t>Nina Patel</a:t>
+                      </a:r>
+                    </a:p>
+                  </a:txBody>
+                  <a:tcPr/>
+                </a:tc>
+                <a:tc>
+                  <a:txBody>
+                    <a:bodyPr/>
+                    <a:lstStyle/>
+                    <a:p>
+                      <a:pPr>
+                        <a:defRPr sz="1000"/>
+                      </a:pPr>
+                      <a:r>
+                        <a:t>5 business days</a:t>
+                      </a:r>
+                    </a:p>
+                  </a:txBody>
+                  <a:tcPr/>
+                </a:tc>
+                <a:tc>
+                  <a:txBody>
+                    <a:bodyPr/>
+                    <a:lstStyle/>
+                    <a:p>
+                      <a:pPr>
+                        <a:defRPr sz="1000"/>
+                      </a:pPr>
+                      <a:r>
+                        <a:t>Verified</a:t>
+                      </a:r>
+                    </a:p>
+                  </a:txBody>
+                  <a:tcPr/>
+                </a:tc>
+              </a:tr>
+              <a:tr h="347472">
+                <a:tc>
+                  <a:txBody>
+                    <a:bodyPr/>
+                    <a:lstStyle/>
+                    <a:p>
+                      <a:pPr>
+                        <a:defRPr sz="1000"/>
+                      </a:pPr>
+                      <a:r>
+                        <a:t>Market Positioning Brief Gate 1</a:t>
+                      </a:r>
+                    </a:p>
+                  </a:txBody>
+                  <a:tcPr/>
+                </a:tc>
+                <a:tc>
+                  <a:txBody>
+                    <a:bodyPr/>
+                    <a:lstStyle/>
+                    <a:p>
+                      <a:pPr>
+                        <a:defRPr sz="1000"/>
+                      </a:pPr>
+                      <a:r>
+                        <a:t>Nina Patel</a:t>
+                      </a:r>
+                    </a:p>
+                  </a:txBody>
+                  <a:tcPr/>
+                </a:tc>
+                <a:tc>
+                  <a:txBody>
+                    <a:bodyPr/>
+                    <a:lstStyle/>
+                    <a:p>
+                      <a:pPr>
+                        <a:defRPr sz="1000"/>
+                      </a:pPr>
+                      <a:r>
+                        <a:t>3 business days</a:t>
+                      </a:r>
+                    </a:p>
+                  </a:txBody>
+                  <a:tcPr/>
+                </a:tc>
+                <a:tc>
+                  <a:txBody>
+                    <a:bodyPr/>
+                    <a:lstStyle/>
+                    <a:p>
+                      <a:pPr>
+                        <a:defRPr sz="1000"/>
+                      </a:pPr>
+                      <a:r>
+                        <a:t>Active</a:t>
+                      </a:r>
+                    </a:p>
+                  </a:txBody>
+                  <a:tcPr/>
+                </a:tc>
+              </a:tr>
+              <a:tr h="347472">
+                <a:tc>
+                  <a:txBody>
+                    <a:bodyPr/>
+                    <a:lstStyle/>
+                    <a:p>
+                      <a:pPr>
+                        <a:defRPr sz="1000"/>
+                      </a:pPr>
+                      <a:r>
+                        <a:t>Market Positioning Brief Gate 2</a:t>
+                      </a:r>
+                    </a:p>
+                  </a:txBody>
+                  <a:tcPr/>
+                </a:tc>
+                <a:tc>
+                  <a:txBody>
+                    <a:bodyPr/>
+                    <a:lstStyle/>
+                    <a:p>
+                      <a:pPr>
+                        <a:defRPr sz="1000"/>
+                      </a:pPr>
+                      <a:r>
+                        <a:t>Nina Patel</a:t>
+                      </a:r>
+                    </a:p>
+                  </a:txBody>
+                  <a:tcPr/>
+                </a:tc>
+                <a:tc>
+                  <a:txBody>
+                    <a:bodyPr/>
+                    <a:lstStyle/>
+                    <a:p>
+                      <a:pPr>
+                        <a:defRPr sz="1000"/>
+                      </a:pPr>
+                      <a:r>
+                        <a:t>10 business days</a:t>
+                      </a:r>
+                    </a:p>
+                  </a:txBody>
+                  <a:tcPr/>
+                </a:tc>
+                <a:tc>
+                  <a:txBody>
+                    <a:bodyPr/>
+                    <a:lstStyle/>
+                    <a:p>
+                      <a:pPr>
+                        <a:defRPr sz="1000"/>
+                      </a:pPr>
+                      <a:r>
+                        <a:t>Monitored</a:t>
+                      </a:r>
+                    </a:p>
+                  </a:txBody>
+                  <a:tcPr/>
+                </a:tc>
+              </a:tr>
+              <a:tr h="347472">
+                <a:tc>
+                  <a:txBody>
+                    <a:bodyPr/>
+                    <a:lstStyle/>
+                    <a:p>
+                      <a:pPr>
+                        <a:defRPr sz="1000"/>
+                      </a:pPr>
+                      <a:r>
+                        <a:t>Sec-2</a:t>
+                      </a:r>
+                    </a:p>
+                  </a:txBody>
+                  <a:tcPr/>
+                </a:tc>
+                <a:tc>
+                  <a:txBody>
+                    <a:bodyPr/>
+                    <a:lstStyle/>
+                    <a:p>
+                      <a:pPr>
+                        <a:defRPr sz="1000"/>
+                      </a:pPr>
+                      <a:r>
+                        <a:t>Nina Patel</a:t>
+                      </a:r>
+                    </a:p>
+                  </a:txBody>
+                  <a:tcPr/>
+                </a:tc>
+                <a:tc>
+                  <a:txBody>
+                    <a:bodyPr/>
+                    <a:lstStyle/>
+                    <a:p>
+                      <a:pPr>
+                        <a:defRPr sz="1000"/>
+                      </a:pPr>
+                      <a:r>
+                        <a:t>3 business days</a:t>
+                      </a:r>
+                    </a:p>
+                  </a:txBody>
+                  <a:tcPr/>
+                </a:tc>
+                <a:tc>
+                  <a:txBody>
+                    <a:bodyPr/>
+                    <a:lstStyle/>
+                    <a:p>
+                      <a:pPr>
+                        <a:defRPr sz="1000"/>
+                      </a:pPr>
+                      <a:r>
+                        <a:t>Stage 2 Verified</a:t>
+                      </a:r>
+                    </a:p>
+                  </a:txBody>
+                  <a:tcPr/>
+                </a:tc>
+              </a:tr>
+            </a:tbl>
+          </a:graphicData>
+        </a:graphic>
+      </p:graphicFrame>
+      <p:pic>
+        <p:nvPicPr>
+          <p:cNvPr id="5" name="Picture 4" descr="image.png"/>
+          <p:cNvPicPr>
+            <a:picLocks noChangeAspect="1"/>
+          </p:cNvPicPr>
+          <p:nvPr/>
+        </p:nvPicPr>
+        <p:blipFill>
+          <a:blip r:embed="rId2"/>
+          <a:stretch>
+            <a:fillRect/>
+          </a:stretch>
+        </p:blipFill>
+        <p:spPr>
+          <a:xfrm>
+            <a:off x="6492240" y="3703320"/>
+            <a:ext cx="5120640" cy="1828800"/>
+          </a:xfrm>
+          <a:prstGeom prst="rect">
+            <a:avLst/>
+          </a:prstGeom>
+        </p:spPr>
+      </p:pic>
+    </p:spTree>
+  </p:cSld>
+  <p:clrMapOvr>
+    <a:masterClrMapping/>
+  </p:clrMapOvr>
+</p:sld>
+</file>
+
+<file path=ppt/slides/slide3.xml><?xml version="1.0" encoding="utf-8"?>
+<p:sld xmlns:a="http://schemas.openxmlformats.org/drawingml/2006/main" xmlns:p="http://schemas.openxmlformats.org/presentationml/2006/main" xmlns:r="http://schemas.openxmlformats.org/officeDocument/2006/relationships">
+  <p:cSld>
+    <p:spTree>
+      <p:nvGrpSpPr>
+        <p:cNvPr id="1" name=""/>
+        <p:cNvGrpSpPr/>
+        <p:nvPr/>
+      </p:nvGrpSpPr>
+      <p:grpSpPr/>
+      <p:sp>
+        <p:nvSpPr>
+          <p:cNvPr id="2" name="Title 1"/>
+          <p:cNvSpPr>
+            <a:spLocks noGrp="1"/>
+          </p:cNvSpPr>
+          <p:nvPr>
+            <p:ph type="title"/>
+          </p:nvPr>
+        </p:nvSpPr>
+        <p:spPr/>
+        <p:txBody>
+          <a:bodyPr/>
+          <a:lstStyle/>
+          <a:p>
+            <a:r>
+              <a:t>3. Governance Standards &amp; Controls - Market Positioning Brief</a:t>
+            </a:r>
+          </a:p>
+        </p:txBody>
+      </p:sp>
+      <p:sp>
+        <p:nvSpPr>
+          <p:cNvPr id="3" name="Content Placeholder 2"/>
+          <p:cNvSpPr>
+            <a:spLocks noGrp="1"/>
+          </p:cNvSpPr>
+          <p:nvPr>
+            <p:ph idx="1"/>
+          </p:nvPr>
+        </p:nvSpPr>
+        <p:spPr/>
+        <p:txBody>
+          <a:bodyPr/>
+          <a:lstStyle/>
+          <a:p>
+            <a:r>
+              <a:t>Summarizes the competitive landscape and recommended positioning statement for the current fiscal year. Section 3 (Governance Standards &amp; Controls) applies to Competitive Intelligence within Sales &amp; Marketing Knowledge Hub and is maintained by Nina Patel. Establishes mandatory compliance controls, approval thresholds, and audit evidence.</a:t>
+            </a:r>
+          </a:p>
+          <a:p>
+            <a:pPr lvl="1"/>
+            <a:r>
+              <a:t>Positioning brief is reviewed with sales leadership before each fiscal year planning cycle.</a:t>
+            </a:r>
+          </a:p>
+          <a:p>
+            <a:pPr lvl="1"/>
+            <a:r>
+              <a:t>Messaging updates from this brief flow into the brand and messaging guidelines.</a:t>
+            </a:r>
+          </a:p>
+          <a:p>
+            <a:pPr lvl="1"/>
+            <a:r>
+              <a:t>Section 3 review cadence is tracked by Nina Patel under Competitive Intelligence governance.</a:t>
+            </a:r>
+          </a:p>
+        </p:txBody>
+      </p:sp>
+      <p:graphicFrame>
+        <p:nvGraphicFramePr>
+          <p:cNvPr id="4" name="Table 3"/>
+          <p:cNvGraphicFramePr>
+            <a:graphicFrameLocks noGrp="1"/>
+          </p:cNvGraphicFramePr>
+          <p:nvPr/>
+        </p:nvGraphicFramePr>
+        <p:xfrm>
+          <a:off x="548640" y="3749039"/>
+          <a:ext cx="5669280" cy="1737360"/>
+        </p:xfrm>
+        <a:graphic>
+          <a:graphicData uri="http://schemas.openxmlformats.org/drawingml/2006/table">
+            <a:tbl>
+              <a:tblPr firstRow="1" bandRow="1">
+                <a:tableStyleId>{5C22544A-7EE6-4342-B048-85BDC9FD1C3A}</a:tableStyleId>
+              </a:tblPr>
+              <a:tblGrid>
+                <a:gridCol w="1417320"/>
+                <a:gridCol w="1417320"/>
+                <a:gridCol w="1417320"/>
+                <a:gridCol w="1417320"/>
+              </a:tblGrid>
+              <a:tr h="347472">
+                <a:tc>
+                  <a:txBody>
+                    <a:bodyPr/>
+                    <a:lstStyle/>
+                    <a:p>
+                      <a:pPr>
+                        <a:defRPr b="1" sz="1100"/>
+                      </a:pPr>
+                      <a:r>
+                        <a:t>Control Area</a:t>
+                      </a:r>
+                    </a:p>
+                  </a:txBody>
+                  <a:tcPr/>
+                </a:tc>
+                <a:tc>
+                  <a:txBody>
+                    <a:bodyPr/>
+                    <a:lstStyle/>
+                    <a:p>
+                      <a:pPr>
+                        <a:defRPr b="1" sz="1100"/>
+                      </a:pPr>
+                      <a:r>
+                        <a:t>Owner</a:t>
+                      </a:r>
+                    </a:p>
+                  </a:txBody>
+                  <a:tcPr/>
+                </a:tc>
+                <a:tc>
+                  <a:txBody>
+                    <a:bodyPr/>
+                    <a:lstStyle/>
+                    <a:p>
+                      <a:pPr>
+                        <a:defRPr b="1" sz="1100"/>
+                      </a:pPr>
+                      <a:r>
+                        <a:t>Target SLA</a:t>
+                      </a:r>
+                    </a:p>
+                  </a:txBody>
+                  <a:tcPr/>
+                </a:tc>
+                <a:tc>
+                  <a:txBody>
+                    <a:bodyPr/>
+                    <a:lstStyle/>
+                    <a:p>
+                      <a:pPr>
+                        <a:defRPr b="1" sz="1100"/>
+                      </a:pPr>
+                      <a:r>
+                        <a:t>Verification Status</a:t>
+                      </a:r>
+                    </a:p>
+                  </a:txBody>
+                  <a:tcPr/>
+                </a:tc>
+              </a:tr>
+              <a:tr h="347472">
+                <a:tc>
+                  <a:txBody>
+                    <a:bodyPr/>
+                    <a:lstStyle/>
+                    <a:p>
+                      <a:pPr>
+                        <a:defRPr sz="1000"/>
+                      </a:pPr>
+                      <a:r>
+                        <a:t>Competitive Intelligence</a:t>
+                      </a:r>
+                    </a:p>
+                  </a:txBody>
+                  <a:tcPr/>
+                </a:tc>
+                <a:tc>
+                  <a:txBody>
+                    <a:bodyPr/>
+                    <a:lstStyle/>
+                    <a:p>
+                      <a:pPr>
+                        <a:defRPr sz="1000"/>
+                      </a:pPr>
+                      <a:r>
+                        <a:t>Nina Patel</a:t>
+                      </a:r>
+                    </a:p>
+                  </a:txBody>
+                  <a:tcPr/>
+                </a:tc>
+                <a:tc>
+                  <a:txBody>
+                    <a:bodyPr/>
+                    <a:lstStyle/>
+                    <a:p>
+                      <a:pPr>
+                        <a:defRPr sz="1000"/>
+                      </a:pPr>
+                      <a:r>
+                        <a:t>5 business days</a:t>
+                      </a:r>
+                    </a:p>
+                  </a:txBody>
+                  <a:tcPr/>
+                </a:tc>
+                <a:tc>
+                  <a:txBody>
+                    <a:bodyPr/>
+                    <a:lstStyle/>
+                    <a:p>
+                      <a:pPr>
+                        <a:defRPr sz="1000"/>
+                      </a:pPr>
+                      <a:r>
+                        <a:t>Verified</a:t>
+                      </a:r>
+                    </a:p>
+                  </a:txBody>
+                  <a:tcPr/>
+                </a:tc>
+              </a:tr>
+              <a:tr h="347472">
+                <a:tc>
+                  <a:txBody>
+                    <a:bodyPr/>
+                    <a:lstStyle/>
+                    <a:p>
+                      <a:pPr>
+                        <a:defRPr sz="1000"/>
+                      </a:pPr>
+                      <a:r>
+                        <a:t>Market Positioning Brief Gate 1</a:t>
+                      </a:r>
+                    </a:p>
+                  </a:txBody>
+                  <a:tcPr/>
+                </a:tc>
+                <a:tc>
+                  <a:txBody>
+                    <a:bodyPr/>
+                    <a:lstStyle/>
+                    <a:p>
+                      <a:pPr>
+                        <a:defRPr sz="1000"/>
+                      </a:pPr>
+                      <a:r>
+                        <a:t>Nina Patel</a:t>
+                      </a:r>
+                    </a:p>
+                  </a:txBody>
+                  <a:tcPr/>
+                </a:tc>
+                <a:tc>
+                  <a:txBody>
+                    <a:bodyPr/>
+                    <a:lstStyle/>
+                    <a:p>
+                      <a:pPr>
+                        <a:defRPr sz="1000"/>
+                      </a:pPr>
+                      <a:r>
+                        <a:t>3 business days</a:t>
+                      </a:r>
+                    </a:p>
+                  </a:txBody>
+                  <a:tcPr/>
+                </a:tc>
+                <a:tc>
+                  <a:txBody>
+                    <a:bodyPr/>
+                    <a:lstStyle/>
+                    <a:p>
+                      <a:pPr>
+                        <a:defRPr sz="1000"/>
+                      </a:pPr>
+                      <a:r>
+                        <a:t>Active</a:t>
+                      </a:r>
+                    </a:p>
+                  </a:txBody>
+                  <a:tcPr/>
+                </a:tc>
+              </a:tr>
+              <a:tr h="347472">
+                <a:tc>
+                  <a:txBody>
+                    <a:bodyPr/>
+                    <a:lstStyle/>
+                    <a:p>
+                      <a:pPr>
+                        <a:defRPr sz="1000"/>
+                      </a:pPr>
+                      <a:r>
+                        <a:t>Market Positioning Brief Gate 2</a:t>
+                      </a:r>
+                    </a:p>
+                  </a:txBody>
+                  <a:tcPr/>
+                </a:tc>
+                <a:tc>
+                  <a:txBody>
+                    <a:bodyPr/>
+                    <a:lstStyle/>
+                    <a:p>
+                      <a:pPr>
+                        <a:defRPr sz="1000"/>
+                      </a:pPr>
+                      <a:r>
+                        <a:t>Nina Patel</a:t>
+                      </a:r>
+                    </a:p>
+                  </a:txBody>
+                  <a:tcPr/>
+                </a:tc>
+                <a:tc>
+                  <a:txBody>
+                    <a:bodyPr/>
+                    <a:lstStyle/>
+                    <a:p>
+                      <a:pPr>
+                        <a:defRPr sz="1000"/>
+                      </a:pPr>
+                      <a:r>
+                        <a:t>10 business days</a:t>
+                      </a:r>
+                    </a:p>
+                  </a:txBody>
+                  <a:tcPr/>
+                </a:tc>
+                <a:tc>
+                  <a:txBody>
+                    <a:bodyPr/>
+                    <a:lstStyle/>
+                    <a:p>
+                      <a:pPr>
+                        <a:defRPr sz="1000"/>
+                      </a:pPr>
+                      <a:r>
+                        <a:t>Monitored</a:t>
+                      </a:r>
+                    </a:p>
+                  </a:txBody>
+                  <a:tcPr/>
+                </a:tc>
+              </a:tr>
+              <a:tr h="347472">
+                <a:tc>
+                  <a:txBody>
+                    <a:bodyPr/>
+                    <a:lstStyle/>
+                    <a:p>
+                      <a:pPr>
+                        <a:defRPr sz="1000"/>
+                      </a:pPr>
+                      <a:r>
+                        <a:t>Sec-3</a:t>
+                      </a:r>
+                    </a:p>
+                  </a:txBody>
+                  <a:tcPr/>
+                </a:tc>
+                <a:tc>
+                  <a:txBody>
+                    <a:bodyPr/>
+                    <a:lstStyle/>
+                    <a:p>
+                      <a:pPr>
+                        <a:defRPr sz="1000"/>
+                      </a:pPr>
+                      <a:r>
+                        <a:t>Nina Patel</a:t>
+                      </a:r>
+                    </a:p>
+                  </a:txBody>
+                  <a:tcPr/>
+                </a:tc>
+                <a:tc>
+                  <a:txBody>
+                    <a:bodyPr/>
+                    <a:lstStyle/>
+                    <a:p>
+                      <a:pPr>
+                        <a:defRPr sz="1000"/>
+                      </a:pPr>
+                      <a:r>
+                        <a:t>10 business days</a:t>
+                      </a:r>
+                    </a:p>
+                  </a:txBody>
+                  <a:tcPr/>
+                </a:tc>
+                <a:tc>
+                  <a:txBody>
+                    <a:bodyPr/>
+                    <a:lstStyle/>
+                    <a:p>
+                      <a:pPr>
+                        <a:defRPr sz="1000"/>
+                      </a:pPr>
+                      <a:r>
+                        <a:t>Stage 3 Verified</a:t>
+                      </a:r>
+                    </a:p>
+                  </a:txBody>
+                  <a:tcPr/>
+                </a:tc>
+              </a:tr>
+            </a:tbl>
+          </a:graphicData>
+        </a:graphic>
+      </p:graphicFrame>
+      <p:pic>
+        <p:nvPicPr>
+          <p:cNvPr id="5" name="Picture 4" descr="image.png"/>
+          <p:cNvPicPr>
+            <a:picLocks noChangeAspect="1"/>
+          </p:cNvPicPr>
+          <p:nvPr/>
+        </p:nvPicPr>
+        <p:blipFill>
+          <a:blip r:embed="rId2"/>
+          <a:stretch>
+            <a:fillRect/>
+          </a:stretch>
+        </p:blipFill>
+        <p:spPr>
+          <a:xfrm>
+            <a:off x="6492240" y="3703320"/>
+            <a:ext cx="5120640" cy="1828800"/>
+          </a:xfrm>
+          <a:prstGeom prst="rect">
+            <a:avLst/>
+          </a:prstGeom>
+        </p:spPr>
+      </p:pic>
+    </p:spTree>
+  </p:cSld>
+  <p:clrMapOvr>
+    <a:masterClrMapping/>
+  </p:clrMapOvr>
+</p:sld>
+</file>
+
+<file path=ppt/slides/slide4.xml><?xml version="1.0" encoding="utf-8"?>
+<p:sld xmlns:a="http://schemas.openxmlformats.org/drawingml/2006/main" xmlns:p="http://schemas.openxmlformats.org/presentationml/2006/main" xmlns:r="http://schemas.openxmlformats.org/officeDocument/2006/relationships">
+  <p:cSld>
+    <p:spTree>
+      <p:nvGrpSpPr>
+        <p:cNvPr id="1" name=""/>
+        <p:cNvGrpSpPr/>
+        <p:nvPr/>
+      </p:nvGrpSpPr>
+      <p:grpSpPr/>
+      <p:sp>
+        <p:nvSpPr>
+          <p:cNvPr id="2" name="Title 1"/>
+          <p:cNvSpPr>
+            <a:spLocks noGrp="1"/>
+          </p:cNvSpPr>
+          <p:nvPr>
+            <p:ph type="title"/>
+          </p:nvPr>
+        </p:nvSpPr>
+        <p:spPr/>
+        <p:txBody>
+          <a:bodyPr/>
+          <a:lstStyle/>
+          <a:p>
+            <a:r>
+              <a:t>4. Operational KPIs &amp; Benchmarks - Market Positioning Brief</a:t>
+            </a:r>
+          </a:p>
+        </p:txBody>
+      </p:sp>
+      <p:sp>
+        <p:nvSpPr>
+          <p:cNvPr id="3" name="Content Placeholder 2"/>
+          <p:cNvSpPr>
+            <a:spLocks noGrp="1"/>
+          </p:cNvSpPr>
+          <p:nvPr>
+            <p:ph idx="1"/>
+          </p:nvPr>
+        </p:nvSpPr>
+        <p:spPr/>
+        <p:txBody>
+          <a:bodyPr/>
+          <a:lstStyle/>
+          <a:p>
+            <a:r>
+              <a:t>Summarizes the competitive landscape and recommended positioning statement for the current fiscal year. Section 4 (Operational KPIs &amp; Benchmarks) applies to Competitive Intelligence within Sales &amp; Marketing Knowledge Hub and is maintained by Nina Patel. Tracks baseline performance, target SLAs, and quarterly benchmark progression.</a:t>
+            </a:r>
+          </a:p>
+          <a:p>
+            <a:pPr lvl="1"/>
+            <a:r>
+              <a:t>Messaging updates from this brief flow into the brand and messaging guidelines.</a:t>
+            </a:r>
+          </a:p>
+          <a:p>
+            <a:pPr lvl="1"/>
+            <a:r>
+              <a:t>Three primary competitors are tracked across pricing, features, and market presence.</a:t>
+            </a:r>
+          </a:p>
+          <a:p>
+            <a:pPr lvl="1"/>
+            <a:r>
+              <a:t>Section 4 review cadence is tracked by Nina Patel under Competitive Intelligence governance.</a:t>
+            </a:r>
+          </a:p>
+        </p:txBody>
+      </p:sp>
+      <p:graphicFrame>
+        <p:nvGraphicFramePr>
+          <p:cNvPr id="4" name="Table 3"/>
+          <p:cNvGraphicFramePr>
+            <a:graphicFrameLocks noGrp="1"/>
+          </p:cNvGraphicFramePr>
+          <p:nvPr/>
+        </p:nvGraphicFramePr>
+        <p:xfrm>
+          <a:off x="548640" y="3749039"/>
+          <a:ext cx="5669280" cy="1737360"/>
+        </p:xfrm>
+        <a:graphic>
+          <a:graphicData uri="http://schemas.openxmlformats.org/drawingml/2006/table">
+            <a:tbl>
+              <a:tblPr firstRow="1" bandRow="1">
+                <a:tableStyleId>{5C22544A-7EE6-4342-B048-85BDC9FD1C3A}</a:tableStyleId>
+              </a:tblPr>
+              <a:tblGrid>
+                <a:gridCol w="1417320"/>
+                <a:gridCol w="1417320"/>
+                <a:gridCol w="1417320"/>
+                <a:gridCol w="1417320"/>
+              </a:tblGrid>
+              <a:tr h="347472">
+                <a:tc>
+                  <a:txBody>
+                    <a:bodyPr/>
+                    <a:lstStyle/>
+                    <a:p>
+                      <a:pPr>
+                        <a:defRPr b="1" sz="1100"/>
+                      </a:pPr>
+                      <a:r>
+                        <a:t>Control Area</a:t>
+                      </a:r>
+                    </a:p>
+                  </a:txBody>
+                  <a:tcPr/>
+                </a:tc>
+                <a:tc>
+                  <a:txBody>
+                    <a:bodyPr/>
+                    <a:lstStyle/>
+                    <a:p>
+                      <a:pPr>
+                        <a:defRPr b="1" sz="1100"/>
+                      </a:pPr>
+                      <a:r>
+                        <a:t>Owner</a:t>
+                      </a:r>
+                    </a:p>
+                  </a:txBody>
+                  <a:tcPr/>
+                </a:tc>
+                <a:tc>
+                  <a:txBody>
+                    <a:bodyPr/>
+                    <a:lstStyle/>
+                    <a:p>
+                      <a:pPr>
+                        <a:defRPr b="1" sz="1100"/>
+                      </a:pPr>
+                      <a:r>
+                        <a:t>Target SLA</a:t>
+                      </a:r>
+                    </a:p>
+                  </a:txBody>
+                  <a:tcPr/>
+                </a:tc>
+                <a:tc>
+                  <a:txBody>
+                    <a:bodyPr/>
+                    <a:lstStyle/>
+                    <a:p>
+                      <a:pPr>
+                        <a:defRPr b="1" sz="1100"/>
+                      </a:pPr>
+                      <a:r>
+                        <a:t>Verification Status</a:t>
+                      </a:r>
+                    </a:p>
+                  </a:txBody>
+                  <a:tcPr/>
+                </a:tc>
+              </a:tr>
+              <a:tr h="347472">
+                <a:tc>
+                  <a:txBody>
+                    <a:bodyPr/>
+                    <a:lstStyle/>
+                    <a:p>
+                      <a:pPr>
+                        <a:defRPr sz="1000"/>
+                      </a:pPr>
+                      <a:r>
+                        <a:t>Competitive Intelligence</a:t>
+                      </a:r>
+                    </a:p>
+                  </a:txBody>
+                  <a:tcPr/>
+                </a:tc>
+                <a:tc>
+                  <a:txBody>
+                    <a:bodyPr/>
+                    <a:lstStyle/>
+                    <a:p>
+                      <a:pPr>
+                        <a:defRPr sz="1000"/>
+                      </a:pPr>
+                      <a:r>
+                        <a:t>Nina Patel</a:t>
+                      </a:r>
+                    </a:p>
+                  </a:txBody>
+                  <a:tcPr/>
+                </a:tc>
+                <a:tc>
+                  <a:txBody>
+                    <a:bodyPr/>
+                    <a:lstStyle/>
+                    <a:p>
+                      <a:pPr>
+                        <a:defRPr sz="1000"/>
+                      </a:pPr>
+                      <a:r>
+                        <a:t>5 business days</a:t>
+                      </a:r>
+                    </a:p>
+                  </a:txBody>
+                  <a:tcPr/>
+                </a:tc>
+                <a:tc>
+                  <a:txBody>
+                    <a:bodyPr/>
+                    <a:lstStyle/>
+                    <a:p>
+                      <a:pPr>
+                        <a:defRPr sz="1000"/>
+                      </a:pPr>
+                      <a:r>
+                        <a:t>Verified</a:t>
+                      </a:r>
+                    </a:p>
+                  </a:txBody>
+                  <a:tcPr/>
+                </a:tc>
+              </a:tr>
+              <a:tr h="347472">
+                <a:tc>
+                  <a:txBody>
+                    <a:bodyPr/>
+                    <a:lstStyle/>
+                    <a:p>
+                      <a:pPr>
+                        <a:defRPr sz="1000"/>
+                      </a:pPr>
+                      <a:r>
+                        <a:t>Market Positioning Brief Gate 1</a:t>
+                      </a:r>
+                    </a:p>
+                  </a:txBody>
+                  <a:tcPr/>
+                </a:tc>
+                <a:tc>
+                  <a:txBody>
+                    <a:bodyPr/>
+                    <a:lstStyle/>
+                    <a:p>
+                      <a:pPr>
+                        <a:defRPr sz="1000"/>
+                      </a:pPr>
+                      <a:r>
+                        <a:t>Nina Patel</a:t>
+                      </a:r>
+                    </a:p>
+                  </a:txBody>
+                  <a:tcPr/>
+                </a:tc>
+                <a:tc>
+                  <a:txBody>
+                    <a:bodyPr/>
+                    <a:lstStyle/>
+                    <a:p>
+                      <a:pPr>
+                        <a:defRPr sz="1000"/>
+                      </a:pPr>
+                      <a:r>
+                        <a:t>3 business days</a:t>
+                      </a:r>
+                    </a:p>
+                  </a:txBody>
+                  <a:tcPr/>
+                </a:tc>
+                <a:tc>
+                  <a:txBody>
+                    <a:bodyPr/>
+                    <a:lstStyle/>
+                    <a:p>
+                      <a:pPr>
+                        <a:defRPr sz="1000"/>
+                      </a:pPr>
+                      <a:r>
+                        <a:t>Active</a:t>
+                      </a:r>
+                    </a:p>
+                  </a:txBody>
+                  <a:tcPr/>
+                </a:tc>
+              </a:tr>
+              <a:tr h="347472">
+                <a:tc>
+                  <a:txBody>
+                    <a:bodyPr/>
+                    <a:lstStyle/>
+                    <a:p>
+                      <a:pPr>
+                        <a:defRPr sz="1000"/>
+                      </a:pPr>
+                      <a:r>
+                        <a:t>Market Positioning Brief Gate 2</a:t>
+                      </a:r>
+                    </a:p>
+                  </a:txBody>
+                  <a:tcPr/>
+                </a:tc>
+                <a:tc>
+                  <a:txBody>
+                    <a:bodyPr/>
+                    <a:lstStyle/>
+                    <a:p>
+                      <a:pPr>
+                        <a:defRPr sz="1000"/>
+                      </a:pPr>
+                      <a:r>
+                        <a:t>Nina Patel</a:t>
+                      </a:r>
+                    </a:p>
+                  </a:txBody>
+                  <a:tcPr/>
+                </a:tc>
+                <a:tc>
+                  <a:txBody>
+                    <a:bodyPr/>
+                    <a:lstStyle/>
+                    <a:p>
+                      <a:pPr>
+                        <a:defRPr sz="1000"/>
+                      </a:pPr>
+                      <a:r>
+                        <a:t>10 business days</a:t>
+                      </a:r>
+                    </a:p>
+                  </a:txBody>
+                  <a:tcPr/>
+                </a:tc>
+                <a:tc>
+                  <a:txBody>
+                    <a:bodyPr/>
+                    <a:lstStyle/>
+                    <a:p>
+                      <a:pPr>
+                        <a:defRPr sz="1000"/>
+                      </a:pPr>
+                      <a:r>
+                        <a:t>Monitored</a:t>
+                      </a:r>
+                    </a:p>
+                  </a:txBody>
+                  <a:tcPr/>
+                </a:tc>
+              </a:tr>
+              <a:tr h="347472">
+                <a:tc>
+                  <a:txBody>
+                    <a:bodyPr/>
+                    <a:lstStyle/>
+                    <a:p>
+                      <a:pPr>
+                        <a:defRPr sz="1000"/>
+                      </a:pPr>
+                      <a:r>
+                        <a:t>Sec-4</a:t>
+                      </a:r>
+                    </a:p>
+                  </a:txBody>
+                  <a:tcPr/>
+                </a:tc>
+                <a:tc>
+                  <a:txBody>
+                    <a:bodyPr/>
+                    <a:lstStyle/>
+                    <a:p>
+                      <a:pPr>
+                        <a:defRPr sz="1000"/>
+                      </a:pPr>
+                      <a:r>
+                        <a:t>Nina Patel</a:t>
+                      </a:r>
+                    </a:p>
+                  </a:txBody>
+                  <a:tcPr/>
+                </a:tc>
+                <a:tc>
+                  <a:txBody>
+                    <a:bodyPr/>
+                    <a:lstStyle/>
+                    <a:p>
+                      <a:pPr>
+                        <a:defRPr sz="1000"/>
+                      </a:pPr>
+                      <a:r>
+                        <a:t>5 business days</a:t>
+                      </a:r>
+                    </a:p>
+                  </a:txBody>
+                  <a:tcPr/>
+                </a:tc>
+                <a:tc>
+                  <a:txBody>
+                    <a:bodyPr/>
+                    <a:lstStyle/>
+                    <a:p>
+                      <a:pPr>
+                        <a:defRPr sz="1000"/>
+                      </a:pPr>
+                      <a:r>
+                        <a:t>Stage 4 Verified</a:t>
+                      </a:r>
+                    </a:p>
+                  </a:txBody>
+                  <a:tcPr/>
+                </a:tc>
+              </a:tr>
+            </a:tbl>
+          </a:graphicData>
+        </a:graphic>
+      </p:graphicFrame>
+      <p:pic>
+        <p:nvPicPr>
+          <p:cNvPr id="5" name="Picture 4" descr="image.png"/>
+          <p:cNvPicPr>
+            <a:picLocks noChangeAspect="1"/>
+          </p:cNvPicPr>
+          <p:nvPr/>
+        </p:nvPicPr>
+        <p:blipFill>
+          <a:blip r:embed="rId2"/>
+          <a:stretch>
+            <a:fillRect/>
+          </a:stretch>
+        </p:blipFill>
+        <p:spPr>
+          <a:xfrm>
+            <a:off x="6492240" y="3703320"/>
+            <a:ext cx="5120640" cy="1828800"/>
+          </a:xfrm>
+          <a:prstGeom prst="rect">
+            <a:avLst/>
+          </a:prstGeom>
+        </p:spPr>
+      </p:pic>
+    </p:spTree>
+  </p:cSld>
+  <p:clrMapOvr>
+    <a:masterClrMapping/>
+  </p:clrMapOvr>
+</p:sld>
+</file>
+
+<file path=ppt/slides/slide5.xml><?xml version="1.0" encoding="utf-8"?>
+<p:sld xmlns:a="http://schemas.openxmlformats.org/drawingml/2006/main" xmlns:p="http://schemas.openxmlformats.org/presentationml/2006/main" xmlns:r="http://schemas.openxmlformats.org/officeDocument/2006/relationships">
+  <p:cSld>
+    <p:spTree>
+      <p:nvGrpSpPr>
+        <p:cNvPr id="1" name=""/>
+        <p:cNvGrpSpPr/>
+        <p:nvPr/>
+      </p:nvGrpSpPr>
+      <p:grpSpPr/>
+      <p:sp>
+        <p:nvSpPr>
+          <p:cNvPr id="2" name="Title 1"/>
+          <p:cNvSpPr>
+            <a:spLocks noGrp="1"/>
+          </p:cNvSpPr>
+          <p:nvPr>
+            <p:ph type="title"/>
+          </p:nvPr>
+        </p:nvSpPr>
+        <p:spPr/>
+        <p:txBody>
+          <a:bodyPr/>
+          <a:lstStyle/>
+          <a:p>
+            <a:r>
+              <a:t>5. Roles, Responsibilities &amp; RACI - Market Positioning Brief</a:t>
+            </a:r>
+          </a:p>
+        </p:txBody>
+      </p:sp>
+      <p:sp>
+        <p:nvSpPr>
+          <p:cNvPr id="3" name="Content Placeholder 2"/>
+          <p:cNvSpPr>
+            <a:spLocks noGrp="1"/>
+          </p:cNvSpPr>
+          <p:nvPr>
+            <p:ph idx="1"/>
+          </p:nvPr>
+        </p:nvSpPr>
+        <p:spPr/>
+        <p:txBody>
+          <a:bodyPr/>
+          <a:lstStyle/>
+          <a:p>
+            <a:r>
+              <a:t>Summarizes the competitive landscape and recommended positioning statement for the current fiscal year. Section 5 (Roles, Responsibilities &amp; RACI) applies to Competitive Intelligence within Sales &amp; Marketing Knowledge Hub and is maintained by Nina Patel. Clarifies ownership across accountable executives, operational leads, and reviewers.</a:t>
+            </a:r>
+          </a:p>
+          <a:p>
+            <a:pPr lvl="1"/>
+            <a:r>
+              <a:t>Three primary competitors are tracked across pricing, features, and market presence.</a:t>
+            </a:r>
+          </a:p>
+          <a:p>
+            <a:pPr lvl="1"/>
+            <a:r>
+              <a:t>Recommended positioning emphasizes real-time data freshness and integration breadth.</a:t>
+            </a:r>
+          </a:p>
+          <a:p>
+            <a:pPr lvl="1"/>
+            <a:r>
+              <a:t>Section 5 review cadence is tracked by Nina Patel under Competitive Intelligence governance.</a:t>
+            </a:r>
+          </a:p>
+        </p:txBody>
+      </p:sp>
+      <p:graphicFrame>
+        <p:nvGraphicFramePr>
+          <p:cNvPr id="4" name="Table 3"/>
+          <p:cNvGraphicFramePr>
+            <a:graphicFrameLocks noGrp="1"/>
+          </p:cNvGraphicFramePr>
+          <p:nvPr/>
+        </p:nvGraphicFramePr>
+        <p:xfrm>
+          <a:off x="548640" y="3749039"/>
+          <a:ext cx="5669280" cy="1737360"/>
+        </p:xfrm>
+        <a:graphic>
+          <a:graphicData uri="http://schemas.openxmlformats.org/drawingml/2006/table">
+            <a:tbl>
+              <a:tblPr firstRow="1" bandRow="1">
+                <a:tableStyleId>{5C22544A-7EE6-4342-B048-85BDC9FD1C3A}</a:tableStyleId>
+              </a:tblPr>
+              <a:tblGrid>
+                <a:gridCol w="1417320"/>
+                <a:gridCol w="1417320"/>
+                <a:gridCol w="1417320"/>
+                <a:gridCol w="1417320"/>
+              </a:tblGrid>
+              <a:tr h="347472">
+                <a:tc>
+                  <a:txBody>
+                    <a:bodyPr/>
+                    <a:lstStyle/>
+                    <a:p>
+                      <a:pPr>
+                        <a:defRPr b="1" sz="1100"/>
+                      </a:pPr>
+                      <a:r>
+                        <a:t>Control Area</a:t>
+                      </a:r>
+                    </a:p>
+                  </a:txBody>
+                  <a:tcPr/>
+                </a:tc>
+                <a:tc>
+                  <a:txBody>
+                    <a:bodyPr/>
+                    <a:lstStyle/>
+                    <a:p>
+                      <a:pPr>
+                        <a:defRPr b="1" sz="1100"/>
+                      </a:pPr>
+                      <a:r>
+                        <a:t>Owner</a:t>
+                      </a:r>
+                    </a:p>
+                  </a:txBody>
+                  <a:tcPr/>
+                </a:tc>
+                <a:tc>
+                  <a:txBody>
+                    <a:bodyPr/>
+                    <a:lstStyle/>
+                    <a:p>
+                      <a:pPr>
+                        <a:defRPr b="1" sz="1100"/>
+                      </a:pPr>
+                      <a:r>
+                        <a:t>Target SLA</a:t>
+                      </a:r>
+                    </a:p>
+                  </a:txBody>
+                  <a:tcPr/>
+                </a:tc>
+                <a:tc>
+                  <a:txBody>
+                    <a:bodyPr/>
+                    <a:lstStyle/>
+                    <a:p>
+                      <a:pPr>
+                        <a:defRPr b="1" sz="1100"/>
+                      </a:pPr>
+                      <a:r>
+                        <a:t>Verification Status</a:t>
+                      </a:r>
+                    </a:p>
+                  </a:txBody>
+                  <a:tcPr/>
+                </a:tc>
+              </a:tr>
+              <a:tr h="347472">
+                <a:tc>
+                  <a:txBody>
+                    <a:bodyPr/>
+                    <a:lstStyle/>
+                    <a:p>
+                      <a:pPr>
+                        <a:defRPr sz="1000"/>
+                      </a:pPr>
+                      <a:r>
+                        <a:t>Competitive Intelligence</a:t>
+                      </a:r>
+                    </a:p>
+                  </a:txBody>
+                  <a:tcPr/>
+                </a:tc>
+                <a:tc>
+                  <a:txBody>
+                    <a:bodyPr/>
+                    <a:lstStyle/>
+                    <a:p>
+                      <a:pPr>
+                        <a:defRPr sz="1000"/>
+                      </a:pPr>
+                      <a:r>
+                        <a:t>Nina Patel</a:t>
+                      </a:r>
+                    </a:p>
+                  </a:txBody>
+                  <a:tcPr/>
+                </a:tc>
+                <a:tc>
+                  <a:txBody>
+                    <a:bodyPr/>
+                    <a:lstStyle/>
+                    <a:p>
+                      <a:pPr>
+                        <a:defRPr sz="1000"/>
+                      </a:pPr>
+                      <a:r>
+                        <a:t>5 business days</a:t>
+                      </a:r>
+                    </a:p>
+                  </a:txBody>
+                  <a:tcPr/>
+                </a:tc>
+                <a:tc>
+                  <a:txBody>
+                    <a:bodyPr/>
+                    <a:lstStyle/>
+                    <a:p>
+                      <a:pPr>
+                        <a:defRPr sz="1000"/>
+                      </a:pPr>
+                      <a:r>
+                        <a:t>Verified</a:t>
+                      </a:r>
+                    </a:p>
+                  </a:txBody>
+                  <a:tcPr/>
+                </a:tc>
+              </a:tr>
+              <a:tr h="347472">
+                <a:tc>
+                  <a:txBody>
+                    <a:bodyPr/>
+                    <a:lstStyle/>
+                    <a:p>
+                      <a:pPr>
+                        <a:defRPr sz="1000"/>
+                      </a:pPr>
+                      <a:r>
+                        <a:t>Market Positioning Brief Gate 1</a:t>
+                      </a:r>
+                    </a:p>
+                  </a:txBody>
+                  <a:tcPr/>
+                </a:tc>
+                <a:tc>
+                  <a:txBody>
+                    <a:bodyPr/>
+                    <a:lstStyle/>
+                    <a:p>
+                      <a:pPr>
+                        <a:defRPr sz="1000"/>
+                      </a:pPr>
+                      <a:r>
+                        <a:t>Nina Patel</a:t>
+                      </a:r>
+                    </a:p>
+                  </a:txBody>
+                  <a:tcPr/>
+                </a:tc>
+                <a:tc>
+                  <a:txBody>
+                    <a:bodyPr/>
+                    <a:lstStyle/>
+                    <a:p>
+                      <a:pPr>
+                        <a:defRPr sz="1000"/>
+                      </a:pPr>
+                      <a:r>
+                        <a:t>3 business days</a:t>
+                      </a:r>
+                    </a:p>
+                  </a:txBody>
+                  <a:tcPr/>
+                </a:tc>
+                <a:tc>
+                  <a:txBody>
+                    <a:bodyPr/>
+                    <a:lstStyle/>
+                    <a:p>
+                      <a:pPr>
+                        <a:defRPr sz="1000"/>
+                      </a:pPr>
+                      <a:r>
+                        <a:t>Active</a:t>
+                      </a:r>
+                    </a:p>
+                  </a:txBody>
+                  <a:tcPr/>
+                </a:tc>
+              </a:tr>
+              <a:tr h="347472">
+                <a:tc>
+                  <a:txBody>
+                    <a:bodyPr/>
+                    <a:lstStyle/>
+                    <a:p>
+                      <a:pPr>
+                        <a:defRPr sz="1000"/>
+                      </a:pPr>
+                      <a:r>
+                        <a:t>Market Positioning Brief Gate 2</a:t>
+                      </a:r>
+                    </a:p>
+                  </a:txBody>
+                  <a:tcPr/>
+                </a:tc>
+                <a:tc>
+                  <a:txBody>
+                    <a:bodyPr/>
+                    <a:lstStyle/>
+                    <a:p>
+                      <a:pPr>
+                        <a:defRPr sz="1000"/>
+                      </a:pPr>
+                      <a:r>
+                        <a:t>Nina Patel</a:t>
+                      </a:r>
+                    </a:p>
+                  </a:txBody>
+                  <a:tcPr/>
+                </a:tc>
+                <a:tc>
+                  <a:txBody>
+                    <a:bodyPr/>
+                    <a:lstStyle/>
+                    <a:p>
+                      <a:pPr>
+                        <a:defRPr sz="1000"/>
+                      </a:pPr>
+                      <a:r>
+                        <a:t>10 business days</a:t>
+                      </a:r>
+                    </a:p>
+                  </a:txBody>
+                  <a:tcPr/>
+                </a:tc>
+                <a:tc>
+                  <a:txBody>
+                    <a:bodyPr/>
+                    <a:lstStyle/>
+                    <a:p>
+                      <a:pPr>
+                        <a:defRPr sz="1000"/>
+                      </a:pPr>
+                      <a:r>
+                        <a:t>Monitored</a:t>
+                      </a:r>
+                    </a:p>
+                  </a:txBody>
+                  <a:tcPr/>
+                </a:tc>
+              </a:tr>
+              <a:tr h="347472">
+                <a:tc>
+                  <a:txBody>
+                    <a:bodyPr/>
+                    <a:lstStyle/>
+                    <a:p>
+                      <a:pPr>
+                        <a:defRPr sz="1000"/>
+                      </a:pPr>
+                      <a:r>
+                        <a:t>Sec-5</a:t>
+                      </a:r>
+                    </a:p>
+                  </a:txBody>
+                  <a:tcPr/>
+                </a:tc>
+                <a:tc>
+                  <a:txBody>
+                    <a:bodyPr/>
+                    <a:lstStyle/>
+                    <a:p>
+                      <a:pPr>
+                        <a:defRPr sz="1000"/>
+                      </a:pPr>
+                      <a:r>
+                        <a:t>Nina Patel</a:t>
+                      </a:r>
+                    </a:p>
+                  </a:txBody>
+                  <a:tcPr/>
+                </a:tc>
+                <a:tc>
+                  <a:txBody>
+                    <a:bodyPr/>
+                    <a:lstStyle/>
+                    <a:p>
+                      <a:pPr>
+                        <a:defRPr sz="1000"/>
+                      </a:pPr>
+                      <a:r>
+                        <a:t>3 business days</a:t>
+                      </a:r>
+                    </a:p>
+                  </a:txBody>
+                  <a:tcPr/>
+                </a:tc>
+                <a:tc>
+                  <a:txBody>
+                    <a:bodyPr/>
+                    <a:lstStyle/>
+                    <a:p>
+                      <a:pPr>
+                        <a:defRPr sz="1000"/>
+                      </a:pPr>
+                      <a:r>
+                        <a:t>Stage 5 Verified</a:t>
+                      </a:r>
+                    </a:p>
+                  </a:txBody>
+                  <a:tcPr/>
+                </a:tc>
+              </a:tr>
+            </a:tbl>
+          </a:graphicData>
+        </a:graphic>
+      </p:graphicFrame>
+      <p:pic>
+        <p:nvPicPr>
+          <p:cNvPr id="5" name="Picture 4" descr="image.png"/>
+          <p:cNvPicPr>
+            <a:picLocks noChangeAspect="1"/>
+          </p:cNvPicPr>
+          <p:nvPr/>
+        </p:nvPicPr>
+        <p:blipFill>
+          <a:blip r:embed="rId2"/>
+          <a:stretch>
+            <a:fillRect/>
+          </a:stretch>
+        </p:blipFill>
+        <p:spPr>
+          <a:xfrm>
+            <a:off x="6492240" y="3703320"/>
+            <a:ext cx="5120640" cy="1828800"/>
+          </a:xfrm>
+          <a:prstGeom prst="rect">
+            <a:avLst/>
+          </a:prstGeom>
+        </p:spPr>
+      </p:pic>
+    </p:spTree>
+  </p:cSld>
+  <p:clrMapOvr>
+    <a:masterClrMapping/>
+  </p:clrMapOvr>
+</p:sld>
+</file>
+
+<file path=ppt/slides/slide6.xml><?xml version="1.0" encoding="utf-8"?>
+<p:sld xmlns:a="http://schemas.openxmlformats.org/drawingml/2006/main" xmlns:p="http://schemas.openxmlformats.org/presentationml/2006/main" xmlns:r="http://schemas.openxmlformats.org/officeDocument/2006/relationships">
+  <p:cSld>
+    <p:spTree>
+      <p:nvGrpSpPr>
+        <p:cNvPr id="1" name=""/>
+        <p:cNvGrpSpPr/>
+        <p:nvPr/>
+      </p:nvGrpSpPr>
+      <p:grpSpPr/>
+      <p:sp>
+        <p:nvSpPr>
+          <p:cNvPr id="2" name="Title 1"/>
+          <p:cNvSpPr>
+            <a:spLocks noGrp="1"/>
+          </p:cNvSpPr>
+          <p:nvPr>
+            <p:ph type="title"/>
+          </p:nvPr>
+        </p:nvSpPr>
+        <p:spPr/>
+        <p:txBody>
+          <a:bodyPr/>
+          <a:lstStyle/>
+          <a:p>
+            <a:r>
+              <a:t>6. Standard Operating Procedures - Market Positioning Brief</a:t>
+            </a:r>
+          </a:p>
+        </p:txBody>
+      </p:sp>
+      <p:sp>
+        <p:nvSpPr>
+          <p:cNvPr id="3" name="Content Placeholder 2"/>
+          <p:cNvSpPr>
+            <a:spLocks noGrp="1"/>
+          </p:cNvSpPr>
+          <p:nvPr>
+            <p:ph idx="1"/>
+          </p:nvPr>
+        </p:nvSpPr>
+        <p:spPr/>
+        <p:txBody>
+          <a:bodyPr/>
+          <a:lstStyle/>
+          <a:p>
+            <a:r>
+              <a:t>Summarizes the competitive landscape and recommended positioning statement for the current fiscal year. Section 6 (Standard Operating Procedures) applies to Competitive Intelligence within Sales &amp; Marketing Knowledge Hub and is maintained by Nina Patel. Provides step-by-step execution checklists, intake criteria, and verification gates.</a:t>
+            </a:r>
+          </a:p>
+          <a:p>
+            <a:pPr lvl="1"/>
+            <a:r>
+              <a:t>Recommended positioning emphasizes real-time data freshness and integration breadth.</a:t>
+            </a:r>
+          </a:p>
+          <a:p>
+            <a:pPr lvl="1"/>
+            <a:r>
+              <a:t>Positioning brief is reviewed with sales leadership before each fiscal year planning cycle.</a:t>
+            </a:r>
+          </a:p>
+          <a:p>
+            <a:pPr lvl="1"/>
+            <a:r>
+              <a:t>Section 6 review cadence is tracked by Nina Patel under Competitive Intelligence governance.</a:t>
+            </a:r>
+          </a:p>
+        </p:txBody>
+      </p:sp>
+      <p:graphicFrame>
+        <p:nvGraphicFramePr>
+          <p:cNvPr id="4" name="Table 3"/>
+          <p:cNvGraphicFramePr>
+            <a:graphicFrameLocks noGrp="1"/>
+          </p:cNvGraphicFramePr>
+          <p:nvPr/>
+        </p:nvGraphicFramePr>
+        <p:xfrm>
+          <a:off x="548640" y="3749039"/>
+          <a:ext cx="5669280" cy="1737360"/>
+        </p:xfrm>
+        <a:graphic>
+          <a:graphicData uri="http://schemas.openxmlformats.org/drawingml/2006/table">
+            <a:tbl>
+              <a:tblPr firstRow="1" bandRow="1">
+                <a:tableStyleId>{5C22544A-7EE6-4342-B048-85BDC9FD1C3A}</a:tableStyleId>
+              </a:tblPr>
+              <a:tblGrid>
+                <a:gridCol w="1417320"/>
+                <a:gridCol w="1417320"/>
+                <a:gridCol w="1417320"/>
+                <a:gridCol w="1417320"/>
+              </a:tblGrid>
+              <a:tr h="347472">
+                <a:tc>
+                  <a:txBody>
+                    <a:bodyPr/>
+                    <a:lstStyle/>
+                    <a:p>
+                      <a:pPr>
+                        <a:defRPr b="1" sz="1100"/>
+                      </a:pPr>
+                      <a:r>
+                        <a:t>Control Area</a:t>
+                      </a:r>
+                    </a:p>
+                  </a:txBody>
+                  <a:tcPr/>
+                </a:tc>
+                <a:tc>
+                  <a:txBody>
+                    <a:bodyPr/>
+                    <a:lstStyle/>
+                    <a:p>
+                      <a:pPr>
+                        <a:defRPr b="1" sz="1100"/>
+                      </a:pPr>
+                      <a:r>
+                        <a:t>Owner</a:t>
+                      </a:r>
+                    </a:p>
+                  </a:txBody>
+                  <a:tcPr/>
+                </a:tc>
+                <a:tc>
+                  <a:txBody>
+                    <a:bodyPr/>
+                    <a:lstStyle/>
+                    <a:p>
+                      <a:pPr>
+                        <a:defRPr b="1" sz="1100"/>
+                      </a:pPr>
+                      <a:r>
+                        <a:t>Target SLA</a:t>
+                      </a:r>
+                    </a:p>
+                  </a:txBody>
+                  <a:tcPr/>
+                </a:tc>
+                <a:tc>
+                  <a:txBody>
+                    <a:bodyPr/>
+                    <a:lstStyle/>
+                    <a:p>
+                      <a:pPr>
+                        <a:defRPr b="1" sz="1100"/>
+                      </a:pPr>
+                      <a:r>
+                        <a:t>Verification Status</a:t>
+                      </a:r>
+                    </a:p>
+                  </a:txBody>
+                  <a:tcPr/>
+                </a:tc>
+              </a:tr>
+              <a:tr h="347472">
+                <a:tc>
+                  <a:txBody>
+                    <a:bodyPr/>
+                    <a:lstStyle/>
+                    <a:p>
+                      <a:pPr>
+                        <a:defRPr sz="1000"/>
+                      </a:pPr>
+                      <a:r>
+                        <a:t>Competitive Intelligence</a:t>
+                      </a:r>
+                    </a:p>
+                  </a:txBody>
+                  <a:tcPr/>
+                </a:tc>
+                <a:tc>
+                  <a:txBody>
+                    <a:bodyPr/>
+                    <a:lstStyle/>
+                    <a:p>
+                      <a:pPr>
+                        <a:defRPr sz="1000"/>
+                      </a:pPr>
+                      <a:r>
+                        <a:t>Nina Patel</a:t>
+                      </a:r>
+                    </a:p>
+                  </a:txBody>
+                  <a:tcPr/>
+                </a:tc>
+                <a:tc>
+                  <a:txBody>
+                    <a:bodyPr/>
+                    <a:lstStyle/>
+                    <a:p>
+                      <a:pPr>
+                        <a:defRPr sz="1000"/>
+                      </a:pPr>
+                      <a:r>
+                        <a:t>5 business days</a:t>
+                      </a:r>
+                    </a:p>
+                  </a:txBody>
+                  <a:tcPr/>
+                </a:tc>
+                <a:tc>
+                  <a:txBody>
+                    <a:bodyPr/>
+                    <a:lstStyle/>
+                    <a:p>
+                      <a:pPr>
+                        <a:defRPr sz="1000"/>
+                      </a:pPr>
+                      <a:r>
+                        <a:t>Verified</a:t>
+                      </a:r>
+                    </a:p>
+                  </a:txBody>
+                  <a:tcPr/>
+                </a:tc>
+              </a:tr>
+              <a:tr h="347472">
+                <a:tc>
+                  <a:txBody>
+                    <a:bodyPr/>
+                    <a:lstStyle/>
+                    <a:p>
+                      <a:pPr>
+                        <a:defRPr sz="1000"/>
+                      </a:pPr>
+                      <a:r>
+                        <a:t>Market Positioning Brief Gate 1</a:t>
+                      </a:r>
+                    </a:p>
+                  </a:txBody>
+                  <a:tcPr/>
+                </a:tc>
+                <a:tc>
+                  <a:txBody>
+                    <a:bodyPr/>
+                    <a:lstStyle/>
+                    <a:p>
+                      <a:pPr>
+                        <a:defRPr sz="1000"/>
+                      </a:pPr>
+                      <a:r>
+                        <a:t>Nina Patel</a:t>
+                      </a:r>
+                    </a:p>
+                  </a:txBody>
+                  <a:tcPr/>
+                </a:tc>
+                <a:tc>
+                  <a:txBody>
+                    <a:bodyPr/>
+                    <a:lstStyle/>
+                    <a:p>
+                      <a:pPr>
+                        <a:defRPr sz="1000"/>
+                      </a:pPr>
+                      <a:r>
+                        <a:t>3 business days</a:t>
+                      </a:r>
+                    </a:p>
+                  </a:txBody>
+                  <a:tcPr/>
+                </a:tc>
+                <a:tc>
+                  <a:txBody>
+                    <a:bodyPr/>
+                    <a:lstStyle/>
+                    <a:p>
+                      <a:pPr>
+                        <a:defRPr sz="1000"/>
+                      </a:pPr>
+                      <a:r>
+                        <a:t>Active</a:t>
+                      </a:r>
+                    </a:p>
+                  </a:txBody>
+                  <a:tcPr/>
+                </a:tc>
+              </a:tr>
+              <a:tr h="347472">
+                <a:tc>
+                  <a:txBody>
+                    <a:bodyPr/>
+                    <a:lstStyle/>
+                    <a:p>
+                      <a:pPr>
+                        <a:defRPr sz="1000"/>
+                      </a:pPr>
+                      <a:r>
+                        <a:t>Market Positioning Brief Gate 2</a:t>
+                      </a:r>
+                    </a:p>
+                  </a:txBody>
+                  <a:tcPr/>
+                </a:tc>
+                <a:tc>
+                  <a:txBody>
+                    <a:bodyPr/>
+                    <a:lstStyle/>
+                    <a:p>
+                      <a:pPr>
+                        <a:defRPr sz="1000"/>
+                      </a:pPr>
+                      <a:r>
+                        <a:t>Nina Patel</a:t>
+                      </a:r>
+                    </a:p>
+                  </a:txBody>
+                  <a:tcPr/>
+                </a:tc>
+                <a:tc>
+                  <a:txBody>
+                    <a:bodyPr/>
+                    <a:lstStyle/>
+                    <a:p>
+                      <a:pPr>
+                        <a:defRPr sz="1000"/>
+                      </a:pPr>
+                      <a:r>
+                        <a:t>10 business days</a:t>
+                      </a:r>
+                    </a:p>
+                  </a:txBody>
+                  <a:tcPr/>
+                </a:tc>
+                <a:tc>
+                  <a:txBody>
+                    <a:bodyPr/>
+                    <a:lstStyle/>
+                    <a:p>
+                      <a:pPr>
+                        <a:defRPr sz="1000"/>
+                      </a:pPr>
+                      <a:r>
+                        <a:t>Monitored</a:t>
+                      </a:r>
+                    </a:p>
+                  </a:txBody>
+                  <a:tcPr/>
+                </a:tc>
+              </a:tr>
+              <a:tr h="347472">
+                <a:tc>
+                  <a:txBody>
+                    <a:bodyPr/>
+                    <a:lstStyle/>
+                    <a:p>
+                      <a:pPr>
+                        <a:defRPr sz="1000"/>
+                      </a:pPr>
+                      <a:r>
+                        <a:t>Sec-6</a:t>
+                      </a:r>
+                    </a:p>
+                  </a:txBody>
+                  <a:tcPr/>
+                </a:tc>
+                <a:tc>
+                  <a:txBody>
+                    <a:bodyPr/>
+                    <a:lstStyle/>
+                    <a:p>
+                      <a:pPr>
+                        <a:defRPr sz="1000"/>
+                      </a:pPr>
+                      <a:r>
+                        <a:t>Nina Patel</a:t>
+                      </a:r>
+                    </a:p>
+                  </a:txBody>
+                  <a:tcPr/>
+                </a:tc>
+                <a:tc>
+                  <a:txBody>
+                    <a:bodyPr/>
+                    <a:lstStyle/>
+                    <a:p>
+                      <a:pPr>
+                        <a:defRPr sz="1000"/>
+                      </a:pPr>
+                      <a:r>
+                        <a:t>10 business days</a:t>
+                      </a:r>
+                    </a:p>
+                  </a:txBody>
+                  <a:tcPr/>
+                </a:tc>
+                <a:tc>
+                  <a:txBody>
+                    <a:bodyPr/>
+                    <a:lstStyle/>
+                    <a:p>
+                      <a:pPr>
+                        <a:defRPr sz="1000"/>
+                      </a:pPr>
+                      <a:r>
+                        <a:t>Stage 6 Verified</a:t>
+                      </a:r>
+                    </a:p>
+                  </a:txBody>
+                  <a:tcPr/>
+                </a:tc>
+              </a:tr>
+            </a:tbl>
+          </a:graphicData>
+        </a:graphic>
+      </p:graphicFrame>
+      <p:pic>
+        <p:nvPicPr>
+          <p:cNvPr id="5" name="Picture 4" descr="image.png"/>
+          <p:cNvPicPr>
+            <a:picLocks noChangeAspect="1"/>
+          </p:cNvPicPr>
+          <p:nvPr/>
+        </p:nvPicPr>
+        <p:blipFill>
+          <a:blip r:embed="rId2"/>
+          <a:stretch>
+            <a:fillRect/>
+          </a:stretch>
+        </p:blipFill>
+        <p:spPr>
+          <a:xfrm>
+            <a:off x="6492240" y="3703320"/>
+            <a:ext cx="5120640" cy="1828800"/>
+          </a:xfrm>
+          <a:prstGeom prst="rect">
+            <a:avLst/>
+          </a:prstGeom>
+        </p:spPr>
+      </p:pic>
+    </p:spTree>
+  </p:cSld>
+  <p:clrMapOvr>
+    <a:masterClrMapping/>
+  </p:clrMapOvr>
+</p:sld>
+</file>
+
+<file path=ppt/slides/slide7.xml><?xml version="1.0" encoding="utf-8"?>
+<p:sld xmlns:a="http://schemas.openxmlformats.org/drawingml/2006/main" xmlns:p="http://schemas.openxmlformats.org/presentationml/2006/main" xmlns:r="http://schemas.openxmlformats.org/officeDocument/2006/relationships">
+  <p:cSld>
+    <p:spTree>
+      <p:nvGrpSpPr>
+        <p:cNvPr id="1" name=""/>
+        <p:cNvGrpSpPr/>
+        <p:nvPr/>
+      </p:nvGrpSpPr>
+      <p:grpSpPr/>
+      <p:sp>
+        <p:nvSpPr>
+          <p:cNvPr id="2" name="Title 1"/>
+          <p:cNvSpPr>
+            <a:spLocks noGrp="1"/>
+          </p:cNvSpPr>
+          <p:nvPr>
+            <p:ph type="title"/>
+          </p:nvPr>
+        </p:nvSpPr>
+        <p:spPr/>
+        <p:txBody>
+          <a:bodyPr/>
+          <a:lstStyle/>
+          <a:p>
+            <a:r>
+              <a:t>7. Risk Register &amp; Mitigations - Market Positioning Brief</a:t>
+            </a:r>
+          </a:p>
+        </p:txBody>
+      </p:sp>
+      <p:sp>
+        <p:nvSpPr>
+          <p:cNvPr id="3" name="Content Placeholder 2"/>
+          <p:cNvSpPr>
+            <a:spLocks noGrp="1"/>
+          </p:cNvSpPr>
+          <p:nvPr>
+            <p:ph idx="1"/>
+          </p:nvPr>
+        </p:nvSpPr>
+        <p:spPr/>
+        <p:txBody>
+          <a:bodyPr/>
+          <a:lstStyle/>
+          <a:p>
+            <a:r>
+              <a:t>Summarizes the competitive landscape and recommended positioning statement for the current fiscal year. Section 7 (Risk Register &amp; Mitigations) applies to Competitive Intelligence within Sales &amp; Marketing Knowledge Hub and is maintained by Nina Patel. Catalogs operational, compliance, and delivery risks alongside preventive mitigations.</a:t>
+            </a:r>
+          </a:p>
+          <a:p>
+            <a:pPr lvl="1"/>
+            <a:r>
+              <a:t>Positioning brief is reviewed with sales leadership before each fiscal year planning cycle.</a:t>
+            </a:r>
+          </a:p>
+          <a:p>
+            <a:pPr lvl="1"/>
+            <a:r>
+              <a:t>Messaging updates from this brief flow into the brand and messaging guidelines.</a:t>
+            </a:r>
+          </a:p>
+          <a:p>
+            <a:pPr lvl="1"/>
+            <a:r>
+              <a:t>Section 7 review cadence is tracked by Nina Patel under Competitive Intelligence governance.</a:t>
+            </a:r>
+          </a:p>
+        </p:txBody>
+      </p:sp>
+      <p:graphicFrame>
+        <p:nvGraphicFramePr>
+          <p:cNvPr id="4" name="Table 3"/>
+          <p:cNvGraphicFramePr>
+            <a:graphicFrameLocks noGrp="1"/>
+          </p:cNvGraphicFramePr>
+          <p:nvPr/>
+        </p:nvGraphicFramePr>
+        <p:xfrm>
+          <a:off x="548640" y="3749039"/>
+          <a:ext cx="5669280" cy="1737360"/>
+        </p:xfrm>
+        <a:graphic>
+          <a:graphicData uri="http://schemas.openxmlformats.org/drawingml/2006/table">
+            <a:tbl>
+              <a:tblPr firstRow="1" bandRow="1">
+                <a:tableStyleId>{5C22544A-7EE6-4342-B048-85BDC9FD1C3A}</a:tableStyleId>
+              </a:tblPr>
+              <a:tblGrid>
+                <a:gridCol w="1417320"/>
+                <a:gridCol w="1417320"/>
+                <a:gridCol w="1417320"/>
+                <a:gridCol w="1417320"/>
+              </a:tblGrid>
+              <a:tr h="347472">
+                <a:tc>
+                  <a:txBody>
+                    <a:bodyPr/>
+                    <a:lstStyle/>
+                    <a:p>
+                      <a:pPr>
+                        <a:defRPr b="1" sz="1100"/>
+                      </a:pPr>
+                      <a:r>
+                        <a:t>Control Area</a:t>
+                      </a:r>
+                    </a:p>
+                  </a:txBody>
+                  <a:tcPr/>
+                </a:tc>
+                <a:tc>
+                  <a:txBody>
+                    <a:bodyPr/>
+                    <a:lstStyle/>
+                    <a:p>
+                      <a:pPr>
+                        <a:defRPr b="1" sz="1100"/>
+                      </a:pPr>
+                      <a:r>
+                        <a:t>Owner</a:t>
+                      </a:r>
+                    </a:p>
+                  </a:txBody>
+                  <a:tcPr/>
+                </a:tc>
+                <a:tc>
+                  <a:txBody>
+                    <a:bodyPr/>
+                    <a:lstStyle/>
+                    <a:p>
+                      <a:pPr>
+                        <a:defRPr b="1" sz="1100"/>
+                      </a:pPr>
+                      <a:r>
+                        <a:t>Target SLA</a:t>
+                      </a:r>
+                    </a:p>
+                  </a:txBody>
+                  <a:tcPr/>
+                </a:tc>
+                <a:tc>
+                  <a:txBody>
+                    <a:bodyPr/>
+                    <a:lstStyle/>
+                    <a:p>
+                      <a:pPr>
+                        <a:defRPr b="1" sz="1100"/>
+                      </a:pPr>
+                      <a:r>
+                        <a:t>Verification Status</a:t>
+                      </a:r>
+                    </a:p>
+                  </a:txBody>
+                  <a:tcPr/>
+                </a:tc>
+              </a:tr>
+              <a:tr h="347472">
+                <a:tc>
+                  <a:txBody>
+                    <a:bodyPr/>
+                    <a:lstStyle/>
+                    <a:p>
+                      <a:pPr>
+                        <a:defRPr sz="1000"/>
+                      </a:pPr>
+                      <a:r>
+                        <a:t>Competitive Intelligence</a:t>
+                      </a:r>
+                    </a:p>
+                  </a:txBody>
+                  <a:tcPr/>
+                </a:tc>
+                <a:tc>
+                  <a:txBody>
+                    <a:bodyPr/>
+                    <a:lstStyle/>
+                    <a:p>
+                      <a:pPr>
+                        <a:defRPr sz="1000"/>
+                      </a:pPr>
+                      <a:r>
+                        <a:t>Nina Patel</a:t>
+                      </a:r>
+                    </a:p>
+                  </a:txBody>
+                  <a:tcPr/>
+                </a:tc>
+                <a:tc>
+                  <a:txBody>
+                    <a:bodyPr/>
+                    <a:lstStyle/>
+                    <a:p>
+                      <a:pPr>
+                        <a:defRPr sz="1000"/>
+                      </a:pPr>
+                      <a:r>
+                        <a:t>5 business days</a:t>
+                      </a:r>
+                    </a:p>
+                  </a:txBody>
+                  <a:tcPr/>
+                </a:tc>
+                <a:tc>
+                  <a:txBody>
+                    <a:bodyPr/>
+                    <a:lstStyle/>
+                    <a:p>
+                      <a:pPr>
+                        <a:defRPr sz="1000"/>
+                      </a:pPr>
+                      <a:r>
+                        <a:t>Verified</a:t>
+                      </a:r>
+                    </a:p>
+                  </a:txBody>
+                  <a:tcPr/>
+                </a:tc>
+              </a:tr>
+              <a:tr h="347472">
+                <a:tc>
+                  <a:txBody>
+                    <a:bodyPr/>
+                    <a:lstStyle/>
+                    <a:p>
+                      <a:pPr>
+                        <a:defRPr sz="1000"/>
+                      </a:pPr>
+                      <a:r>
+                        <a:t>Market Positioning Brief Gate 1</a:t>
+                      </a:r>
+                    </a:p>
+                  </a:txBody>
+                  <a:tcPr/>
+                </a:tc>
+                <a:tc>
+                  <a:txBody>
+                    <a:bodyPr/>
+                    <a:lstStyle/>
+                    <a:p>
+                      <a:pPr>
+                        <a:defRPr sz="1000"/>
+                      </a:pPr>
+                      <a:r>
+                        <a:t>Nina Patel</a:t>
+                      </a:r>
+                    </a:p>
+                  </a:txBody>
+                  <a:tcPr/>
+                </a:tc>
+                <a:tc>
+                  <a:txBody>
+                    <a:bodyPr/>
+                    <a:lstStyle/>
+                    <a:p>
+                      <a:pPr>
+                        <a:defRPr sz="1000"/>
+                      </a:pPr>
+                      <a:r>
+                        <a:t>3 business days</a:t>
+                      </a:r>
+                    </a:p>
+                  </a:txBody>
+                  <a:tcPr/>
+                </a:tc>
+                <a:tc>
+                  <a:txBody>
+                    <a:bodyPr/>
+                    <a:lstStyle/>
+                    <a:p>
+                      <a:pPr>
+                        <a:defRPr sz="1000"/>
+                      </a:pPr>
+                      <a:r>
+                        <a:t>Active</a:t>
+                      </a:r>
+                    </a:p>
+                  </a:txBody>
+                  <a:tcPr/>
+                </a:tc>
+              </a:tr>
+              <a:tr h="347472">
+                <a:tc>
+                  <a:txBody>
+                    <a:bodyPr/>
+                    <a:lstStyle/>
+                    <a:p>
+                      <a:pPr>
+                        <a:defRPr sz="1000"/>
+                      </a:pPr>
+                      <a:r>
+                        <a:t>Market Positioning Brief Gate 2</a:t>
+                      </a:r>
+                    </a:p>
+                  </a:txBody>
+                  <a:tcPr/>
+                </a:tc>
+                <a:tc>
+                  <a:txBody>
+                    <a:bodyPr/>
+                    <a:lstStyle/>
+                    <a:p>
+                      <a:pPr>
+                        <a:defRPr sz="1000"/>
+                      </a:pPr>
+                      <a:r>
+                        <a:t>Nina Patel</a:t>
+                      </a:r>
+                    </a:p>
+                  </a:txBody>
+                  <a:tcPr/>
+                </a:tc>
+                <a:tc>
+                  <a:txBody>
+                    <a:bodyPr/>
+                    <a:lstStyle/>
+                    <a:p>
+                      <a:pPr>
+                        <a:defRPr sz="1000"/>
+                      </a:pPr>
+                      <a:r>
+                        <a:t>10 business days</a:t>
+                      </a:r>
+                    </a:p>
+                  </a:txBody>
+                  <a:tcPr/>
+                </a:tc>
+                <a:tc>
+                  <a:txBody>
+                    <a:bodyPr/>
+                    <a:lstStyle/>
+                    <a:p>
+                      <a:pPr>
+                        <a:defRPr sz="1000"/>
+                      </a:pPr>
+                      <a:r>
+                        <a:t>Monitored</a:t>
+                      </a:r>
+                    </a:p>
+                  </a:txBody>
+                  <a:tcPr/>
+                </a:tc>
+              </a:tr>
+              <a:tr h="347472">
+                <a:tc>
+                  <a:txBody>
+                    <a:bodyPr/>
+                    <a:lstStyle/>
+                    <a:p>
+                      <a:pPr>
+                        <a:defRPr sz="1000"/>
+                      </a:pPr>
+                      <a:r>
+                        <a:t>Sec-7</a:t>
+                      </a:r>
+                    </a:p>
+                  </a:txBody>
+                  <a:tcPr/>
+                </a:tc>
+                <a:tc>
+                  <a:txBody>
+                    <a:bodyPr/>
+                    <a:lstStyle/>
+                    <a:p>
+                      <a:pPr>
+                        <a:defRPr sz="1000"/>
+                      </a:pPr>
+                      <a:r>
+                        <a:t>Nina Patel</a:t>
+                      </a:r>
+                    </a:p>
+                  </a:txBody>
+                  <a:tcPr/>
+                </a:tc>
+                <a:tc>
+                  <a:txBody>
+                    <a:bodyPr/>
+                    <a:lstStyle/>
+                    <a:p>
+                      <a:pPr>
+                        <a:defRPr sz="1000"/>
+                      </a:pPr>
+                      <a:r>
+                        <a:t>5 business days</a:t>
+                      </a:r>
+                    </a:p>
+                  </a:txBody>
+                  <a:tcPr/>
+                </a:tc>
+                <a:tc>
+                  <a:txBody>
+                    <a:bodyPr/>
+                    <a:lstStyle/>
+                    <a:p>
+                      <a:pPr>
+                        <a:defRPr sz="1000"/>
+                      </a:pPr>
+                      <a:r>
+                        <a:t>Stage 7 Verified</a:t>
+                      </a:r>
+                    </a:p>
+                  </a:txBody>
+                  <a:tcPr/>
+                </a:tc>
+              </a:tr>
+            </a:tbl>
+          </a:graphicData>
+        </a:graphic>
+      </p:graphicFrame>
+      <p:pic>
+        <p:nvPicPr>
+          <p:cNvPr id="5" name="Picture 4" descr="image.png"/>
+          <p:cNvPicPr>
+            <a:picLocks noChangeAspect="1"/>
+          </p:cNvPicPr>
+          <p:nvPr/>
+        </p:nvPicPr>
+        <p:blipFill>
+          <a:blip r:embed="rId2"/>
+          <a:stretch>
+            <a:fillRect/>
+          </a:stretch>
+        </p:blipFill>
+        <p:spPr>
+          <a:xfrm>
+            <a:off x="6492240" y="3703320"/>
+            <a:ext cx="5120640" cy="1828800"/>
+          </a:xfrm>
+          <a:prstGeom prst="rect">
+            <a:avLst/>
+          </a:prstGeom>
+        </p:spPr>
+      </p:pic>
+    </p:spTree>
+  </p:cSld>
+  <p:clrMapOvr>
+    <a:masterClrMapping/>
+  </p:clrMapOvr>
+</p:sld>
+</file>
+
+<file path=ppt/slides/slide8.xml><?xml version="1.0" encoding="utf-8"?>
+<p:sld xmlns:a="http://schemas.openxmlformats.org/drawingml/2006/main" xmlns:p="http://schemas.openxmlformats.org/presentationml/2006/main" xmlns:r="http://schemas.openxmlformats.org/officeDocument/2006/relationships">
+  <p:cSld>
+    <p:spTree>
+      <p:nvGrpSpPr>
+        <p:cNvPr id="1" name=""/>
+        <p:cNvGrpSpPr/>
+        <p:nvPr/>
+      </p:nvGrpSpPr>
+      <p:grpSpPr/>
+      <p:sp>
+        <p:nvSpPr>
+          <p:cNvPr id="2" name="Title 1"/>
+          <p:cNvSpPr>
+            <a:spLocks noGrp="1"/>
+          </p:cNvSpPr>
+          <p:nvPr>
+            <p:ph type="title"/>
+          </p:nvPr>
+        </p:nvSpPr>
+        <p:spPr/>
+        <p:txBody>
+          <a:bodyPr/>
+          <a:lstStyle/>
+          <a:p>
+            <a:r>
+              <a:t>8. Quality Assurance &amp; Audits - Market Positioning Brief</a:t>
+            </a:r>
+          </a:p>
+        </p:txBody>
+      </p:sp>
+      <p:sp>
+        <p:nvSpPr>
+          <p:cNvPr id="3" name="Content Placeholder 2"/>
+          <p:cNvSpPr>
+            <a:spLocks noGrp="1"/>
+          </p:cNvSpPr>
+          <p:nvPr>
+            <p:ph idx="1"/>
+          </p:nvPr>
+        </p:nvSpPr>
+        <p:spPr/>
+        <p:txBody>
+          <a:bodyPr/>
+          <a:lstStyle/>
+          <a:p>
+            <a:r>
+              <a:t>Summarizes the competitive landscape and recommended positioning statement for the current fiscal year. Section 8 (Quality Assurance &amp; Audits) applies to Competitive Intelligence within Sales &amp; Marketing Knowledge Hub and is maintained by Nina Patel. Specifies sampling frequencies, inspection tolerances, and nonconformance workflows.</a:t>
+            </a:r>
+          </a:p>
+          <a:p>
+            <a:pPr lvl="1"/>
+            <a:r>
+              <a:t>Messaging updates from this brief flow into the brand and messaging guidelines.</a:t>
+            </a:r>
+          </a:p>
+          <a:p>
+            <a:pPr lvl="1"/>
+            <a:r>
+              <a:t>Three primary competitors are tracked across pricing, features, and market presence.</a:t>
+            </a:r>
+          </a:p>
+          <a:p>
+            <a:pPr lvl="1"/>
+            <a:r>
+              <a:t>Section 8 review cadence is tracked by Nina Patel under Competitive Intelligence governance.</a:t>
+            </a:r>
+          </a:p>
+        </p:txBody>
+      </p:sp>
+      <p:graphicFrame>
+        <p:nvGraphicFramePr>
+          <p:cNvPr id="4" name="Table 3"/>
+          <p:cNvGraphicFramePr>
+            <a:graphicFrameLocks noGrp="1"/>
+          </p:cNvGraphicFramePr>
+          <p:nvPr/>
+        </p:nvGraphicFramePr>
+        <p:xfrm>
+          <a:off x="548640" y="3749039"/>
+          <a:ext cx="5669280" cy="1737360"/>
+        </p:xfrm>
+        <a:graphic>
+          <a:graphicData uri="http://schemas.openxmlformats.org/drawingml/2006/table">
+            <a:tbl>
+              <a:tblPr firstRow="1" bandRow="1">
+                <a:tableStyleId>{5C22544A-7EE6-4342-B048-85BDC9FD1C3A}</a:tableStyleId>
+              </a:tblPr>
+              <a:tblGrid>
+                <a:gridCol w="1417320"/>
+                <a:gridCol w="1417320"/>
+                <a:gridCol w="1417320"/>
+                <a:gridCol w="1417320"/>
+              </a:tblGrid>
+              <a:tr h="347472">
+                <a:tc>
+                  <a:txBody>
+                    <a:bodyPr/>
+                    <a:lstStyle/>
+                    <a:p>
+                      <a:pPr>
+                        <a:defRPr b="1" sz="1100"/>
+                      </a:pPr>
+                      <a:r>
+                        <a:t>Control Area</a:t>
+                      </a:r>
+                    </a:p>
+                  </a:txBody>
+                  <a:tcPr/>
+                </a:tc>
+                <a:tc>
+                  <a:txBody>
+                    <a:bodyPr/>
+                    <a:lstStyle/>
+                    <a:p>
+                      <a:pPr>
+                        <a:defRPr b="1" sz="1100"/>
+                      </a:pPr>
+                      <a:r>
+                        <a:t>Owner</a:t>
+                      </a:r>
+                    </a:p>
+                  </a:txBody>
+                  <a:tcPr/>
+                </a:tc>
+                <a:tc>
+                  <a:txBody>
+                    <a:bodyPr/>
+                    <a:lstStyle/>
+                    <a:p>
+                      <a:pPr>
+                        <a:defRPr b="1" sz="1100"/>
+                      </a:pPr>
+                      <a:r>
+                        <a:t>Target SLA</a:t>
+                      </a:r>
+                    </a:p>
+                  </a:txBody>
+                  <a:tcPr/>
+                </a:tc>
+                <a:tc>
+                  <a:txBody>
+                    <a:bodyPr/>
+                    <a:lstStyle/>
+                    <a:p>
+                      <a:pPr>
+                        <a:defRPr b="1" sz="1100"/>
+                      </a:pPr>
+                      <a:r>
+                        <a:t>Verification Status</a:t>
+                      </a:r>
+                    </a:p>
+                  </a:txBody>
+                  <a:tcPr/>
+                </a:tc>
+              </a:tr>
+              <a:tr h="347472">
+                <a:tc>
+                  <a:txBody>
+                    <a:bodyPr/>
+                    <a:lstStyle/>
+                    <a:p>
+                      <a:pPr>
+                        <a:defRPr sz="1000"/>
+                      </a:pPr>
+                      <a:r>
+                        <a:t>Competitive Intelligence</a:t>
+                      </a:r>
+                    </a:p>
+                  </a:txBody>
+                  <a:tcPr/>
+                </a:tc>
+                <a:tc>
+                  <a:txBody>
+                    <a:bodyPr/>
+                    <a:lstStyle/>
+                    <a:p>
+                      <a:pPr>
+                        <a:defRPr sz="1000"/>
+                      </a:pPr>
+                      <a:r>
+                        <a:t>Nina Patel</a:t>
+                      </a:r>
+                    </a:p>
+                  </a:txBody>
+                  <a:tcPr/>
+                </a:tc>
+                <a:tc>
+                  <a:txBody>
+                    <a:bodyPr/>
+                    <a:lstStyle/>
+                    <a:p>
+                      <a:pPr>
+                        <a:defRPr sz="1000"/>
+                      </a:pPr>
+                      <a:r>
+                        <a:t>5 business days</a:t>
+                      </a:r>
+                    </a:p>
+                  </a:txBody>
+                  <a:tcPr/>
+                </a:tc>
+                <a:tc>
+                  <a:txBody>
+                    <a:bodyPr/>
+                    <a:lstStyle/>
+                    <a:p>
+                      <a:pPr>
+                        <a:defRPr sz="1000"/>
+                      </a:pPr>
+                      <a:r>
+                        <a:t>Verified</a:t>
+                      </a:r>
+                    </a:p>
+                  </a:txBody>
+                  <a:tcPr/>
+                </a:tc>
+              </a:tr>
+              <a:tr h="347472">
+                <a:tc>
+                  <a:txBody>
+                    <a:bodyPr/>
+                    <a:lstStyle/>
+                    <a:p>
+                      <a:pPr>
+                        <a:defRPr sz="1000"/>
+                      </a:pPr>
+                      <a:r>
+                        <a:t>Market Positioning Brief Gate 1</a:t>
+                      </a:r>
+                    </a:p>
+                  </a:txBody>
+                  <a:tcPr/>
+                </a:tc>
+                <a:tc>
+                  <a:txBody>
+                    <a:bodyPr/>
+                    <a:lstStyle/>
+                    <a:p>
+                      <a:pPr>
+                        <a:defRPr sz="1000"/>
+                      </a:pPr>
+                      <a:r>
+                        <a:t>Nina Patel</a:t>
+                      </a:r>
+                    </a:p>
+                  </a:txBody>
+                  <a:tcPr/>
+                </a:tc>
+                <a:tc>
+                  <a:txBody>
+                    <a:bodyPr/>
+                    <a:lstStyle/>
+                    <a:p>
+                      <a:pPr>
+                        <a:defRPr sz="1000"/>
+                      </a:pPr>
+                      <a:r>
+                        <a:t>3 business days</a:t>
+                      </a:r>
+                    </a:p>
+                  </a:txBody>
+                  <a:tcPr/>
+                </a:tc>
+                <a:tc>
+                  <a:txBody>
+                    <a:bodyPr/>
+                    <a:lstStyle/>
+                    <a:p>
+                      <a:pPr>
+                        <a:defRPr sz="1000"/>
+                      </a:pPr>
+                      <a:r>
+                        <a:t>Active</a:t>
+                      </a:r>
+                    </a:p>
+                  </a:txBody>
+                  <a:tcPr/>
+                </a:tc>
+              </a:tr>
+              <a:tr h="347472">
+                <a:tc>
+                  <a:txBody>
+                    <a:bodyPr/>
+                    <a:lstStyle/>
+                    <a:p>
+                      <a:pPr>
+                        <a:defRPr sz="1000"/>
+                      </a:pPr>
+                      <a:r>
+                        <a:t>Market Positioning Brief Gate 2</a:t>
+                      </a:r>
+                    </a:p>
+                  </a:txBody>
+                  <a:tcPr/>
+                </a:tc>
+                <a:tc>
+                  <a:txBody>
+                    <a:bodyPr/>
+                    <a:lstStyle/>
+                    <a:p>
+                      <a:pPr>
+                        <a:defRPr sz="1000"/>
+                      </a:pPr>
+                      <a:r>
+                        <a:t>Nina Patel</a:t>
+                      </a:r>
+                    </a:p>
+                  </a:txBody>
+                  <a:tcPr/>
+                </a:tc>
+                <a:tc>
+                  <a:txBody>
+                    <a:bodyPr/>
+                    <a:lstStyle/>
+                    <a:p>
+                      <a:pPr>
+                        <a:defRPr sz="1000"/>
+                      </a:pPr>
+                      <a:r>
+                        <a:t>10 business days</a:t>
+                      </a:r>
+                    </a:p>
+                  </a:txBody>
+                  <a:tcPr/>
+                </a:tc>
+                <a:tc>
+                  <a:txBody>
+                    <a:bodyPr/>
+                    <a:lstStyle/>
+                    <a:p>
+                      <a:pPr>
+                        <a:defRPr sz="1000"/>
+                      </a:pPr>
+                      <a:r>
+                        <a:t>Monitored</a:t>
+                      </a:r>
+                    </a:p>
+                  </a:txBody>
+                  <a:tcPr/>
+                </a:tc>
+              </a:tr>
+              <a:tr h="347472">
+                <a:tc>
+                  <a:txBody>
+                    <a:bodyPr/>
+                    <a:lstStyle/>
+                    <a:p>
+                      <a:pPr>
+                        <a:defRPr sz="1000"/>
+                      </a:pPr>
+                      <a:r>
+                        <a:t>Sec-8</a:t>
+                      </a:r>
+                    </a:p>
+                  </a:txBody>
+                  <a:tcPr/>
+                </a:tc>
+                <a:tc>
+                  <a:txBody>
+                    <a:bodyPr/>
+                    <a:lstStyle/>
+                    <a:p>
+                      <a:pPr>
+                        <a:defRPr sz="1000"/>
+                      </a:pPr>
+                      <a:r>
+                        <a:t>Nina Patel</a:t>
+                      </a:r>
+                    </a:p>
+                  </a:txBody>
+                  <a:tcPr/>
+                </a:tc>
+                <a:tc>
+                  <a:txBody>
+                    <a:bodyPr/>
+                    <a:lstStyle/>
+                    <a:p>
+                      <a:pPr>
+                        <a:defRPr sz="1000"/>
+                      </a:pPr>
+                      <a:r>
+                        <a:t>3 business days</a:t>
+                      </a:r>
+                    </a:p>
+                  </a:txBody>
+                  <a:tcPr/>
+                </a:tc>
+                <a:tc>
+                  <a:txBody>
+                    <a:bodyPr/>
+                    <a:lstStyle/>
+                    <a:p>
+                      <a:pPr>
+                        <a:defRPr sz="1000"/>
+                      </a:pPr>
+                      <a:r>
+                        <a:t>Stage 8 Verified</a:t>
+                      </a:r>
+                    </a:p>
+                  </a:txBody>
+                  <a:tcPr/>
+                </a:tc>
+              </a:tr>
+            </a:tbl>
+          </a:graphicData>
+        </a:graphic>
+      </p:graphicFrame>
+      <p:pic>
+        <p:nvPicPr>
+          <p:cNvPr id="5" name="Picture 4" descr="image.png"/>
+          <p:cNvPicPr>
+            <a:picLocks noChangeAspect="1"/>
+          </p:cNvPicPr>
+          <p:nvPr/>
+        </p:nvPicPr>
+        <p:blipFill>
+          <a:blip r:embed="rId2"/>
+          <a:stretch>
+            <a:fillRect/>
+          </a:stretch>
+        </p:blipFill>
+        <p:spPr>
+          <a:xfrm>
+            <a:off x="6492240" y="3703320"/>
+            <a:ext cx="5120640" cy="1828800"/>
+          </a:xfrm>
+          <a:prstGeom prst="rect">
+            <a:avLst/>
+          </a:prstGeom>
+        </p:spPr>
+      </p:pic>
+    </p:spTree>
+  </p:cSld>
+  <p:clrMapOvr>
+    <a:masterClrMapping/>
+  </p:clrMapOvr>
+</p:sld>
+</file>
+
+<file path=ppt/slides/slide9.xml><?xml version="1.0" encoding="utf-8"?>
+<p:sld xmlns:a="http://schemas.openxmlformats.org/drawingml/2006/main" xmlns:p="http://schemas.openxmlformats.org/presentationml/2006/main" xmlns:r="http://schemas.openxmlformats.org/officeDocument/2006/relationships">
+  <p:cSld>
+    <p:spTree>
+      <p:nvGrpSpPr>
+        <p:cNvPr id="1" name=""/>
+        <p:cNvGrpSpPr/>
+        <p:nvPr/>
+      </p:nvGrpSpPr>
+      <p:grpSpPr/>
+      <p:sp>
+        <p:nvSpPr>
+          <p:cNvPr id="2" name="Title 1"/>
+          <p:cNvSpPr>
+            <a:spLocks noGrp="1"/>
+          </p:cNvSpPr>
+          <p:nvPr>
+            <p:ph type="title"/>
+          </p:nvPr>
+        </p:nvSpPr>
+        <p:spPr/>
+        <p:txBody>
+          <a:bodyPr/>
+          <a:lstStyle/>
+          <a:p>
+            <a:r>
+              <a:t>9. Exception Handling &amp; Escalations - Market Positioning Brief</a:t>
+            </a:r>
+          </a:p>
+        </p:txBody>
+      </p:sp>
+      <p:sp>
+        <p:nvSpPr>
+          <p:cNvPr id="3" name="Content Placeholder 2"/>
+          <p:cNvSpPr>
+            <a:spLocks noGrp="1"/>
+          </p:cNvSpPr>
+          <p:nvPr>
+            <p:ph idx="1"/>
+          </p:nvPr>
+        </p:nvSpPr>
+        <p:spPr/>
+        <p:txBody>
+          <a:bodyPr/>
+          <a:lstStyle/>
+          <a:p>
+            <a:r>
+              <a:t>Summarizes the competitive landscape and recommended positioning statement for the current fiscal year. Section 9 (Exception Handling &amp; Escalations) applies to Competitive Intelligence within Sales &amp; Marketing Knowledge Hub and is maintained by Nina Patel. Outlines severity tiers, response SLAs, and cross-functional escalation paths.</a:t>
+            </a:r>
+          </a:p>
+          <a:p>
+            <a:pPr lvl="1"/>
+            <a:r>
+              <a:t>Three primary competitors are tracked across pricing, features, and market presence.</a:t>
+            </a:r>
+          </a:p>
+          <a:p>
+            <a:pPr lvl="1"/>
+            <a:r>
+              <a:t>Recommended positioning emphasizes real-time data freshness and integration breadth.</a:t>
+            </a:r>
+          </a:p>
+          <a:p>
+            <a:pPr lvl="1"/>
+            <a:r>
+              <a:t>Section 9 review cadence is tracked by Nina Patel under Competitive Intelligence governance.</a:t>
+            </a:r>
+          </a:p>
+        </p:txBody>
+      </p:sp>
+      <p:graphicFrame>
+        <p:nvGraphicFramePr>
+          <p:cNvPr id="4" name="Table 3"/>
+          <p:cNvGraphicFramePr>
+            <a:graphicFrameLocks noGrp="1"/>
+          </p:cNvGraphicFramePr>
+          <p:nvPr/>
+        </p:nvGraphicFramePr>
+        <p:xfrm>
+          <a:off x="548640" y="3749039"/>
+          <a:ext cx="5669280" cy="1737360"/>
+        </p:xfrm>
+        <a:graphic>
+          <a:graphicData uri="http://schemas.openxmlformats.org/drawingml/2006/table">
+            <a:tbl>
+              <a:tblPr firstRow="1" bandRow="1">
+                <a:tableStyleId>{5C22544A-7EE6-4342-B048-85BDC9FD1C3A}</a:tableStyleId>
+              </a:tblPr>
+              <a:tblGrid>
+                <a:gridCol w="1417320"/>
+                <a:gridCol w="1417320"/>
+                <a:gridCol w="1417320"/>
+                <a:gridCol w="1417320"/>
+              </a:tblGrid>
+              <a:tr h="347472">
+                <a:tc>
+                  <a:txBody>
+                    <a:bodyPr/>
+                    <a:lstStyle/>
+                    <a:p>
+                      <a:pPr>
+                        <a:defRPr b="1" sz="1100"/>
+                      </a:pPr>
+                      <a:r>
+                        <a:t>Control Area</a:t>
+                      </a:r>
+                    </a:p>
+                  </a:txBody>
+                  <a:tcPr/>
+                </a:tc>
+                <a:tc>
+                  <a:txBody>
+                    <a:bodyPr/>
+                    <a:lstStyle/>
+                    <a:p>
+                      <a:pPr>
+                        <a:defRPr b="1" sz="1100"/>
+                      </a:pPr>
+                      <a:r>
+                        <a:t>Owner</a:t>
+                      </a:r>
+                    </a:p>
+                  </a:txBody>
+                  <a:tcPr/>
+                </a:tc>
+                <a:tc>
+                  <a:txBody>
+                    <a:bodyPr/>
+                    <a:lstStyle/>
+                    <a:p>
+                      <a:pPr>
+                        <a:defRPr b="1" sz="1100"/>
+                      </a:pPr>
+                      <a:r>
+                        <a:t>Target SLA</a:t>
+                      </a:r>
+                    </a:p>
+                  </a:txBody>
+                  <a:tcPr/>
+                </a:tc>
+                <a:tc>
+                  <a:txBody>
+                    <a:bodyPr/>
+                    <a:lstStyle/>
+                    <a:p>
+                      <a:pPr>
+                        <a:defRPr b="1" sz="1100"/>
+                      </a:pPr>
+                      <a:r>
+                        <a:t>Verification Status</a:t>
+                      </a:r>
+                    </a:p>
+                  </a:txBody>
+                  <a:tcPr/>
+                </a:tc>
+              </a:tr>
+              <a:tr h="347472">
+                <a:tc>
+                  <a:txBody>
+                    <a:bodyPr/>
+                    <a:lstStyle/>
+                    <a:p>
+                      <a:pPr>
+                        <a:defRPr sz="1000"/>
+                      </a:pPr>
+                      <a:r>
+                        <a:t>Competitive Intelligence</a:t>
+                      </a:r>
+                    </a:p>
+                  </a:txBody>
+                  <a:tcPr/>
+                </a:tc>
+                <a:tc>
+                  <a:txBody>
+                    <a:bodyPr/>
+                    <a:lstStyle/>
+                    <a:p>
+                      <a:pPr>
+                        <a:defRPr sz="1000"/>
+                      </a:pPr>
+                      <a:r>
+                        <a:t>Nina Patel</a:t>
+                      </a:r>
+                    </a:p>
+                  </a:txBody>
+                  <a:tcPr/>
+                </a:tc>
+                <a:tc>
+                  <a:txBody>
+                    <a:bodyPr/>
+                    <a:lstStyle/>
+                    <a:p>
+                      <a:pPr>
+                        <a:defRPr sz="1000"/>
+                      </a:pPr>
+                      <a:r>
+                        <a:t>5 business days</a:t>
+                      </a:r>
+                    </a:p>
+                  </a:txBody>
+                  <a:tcPr/>
+                </a:tc>
+                <a:tc>
+                  <a:txBody>
+                    <a:bodyPr/>
+                    <a:lstStyle/>
+                    <a:p>
+                      <a:pPr>
+                        <a:defRPr sz="1000"/>
+                      </a:pPr>
+                      <a:r>
+                        <a:t>Verified</a:t>
+                      </a:r>
+                    </a:p>
+                  </a:txBody>
+                  <a:tcPr/>
+                </a:tc>
+              </a:tr>
+              <a:tr h="347472">
+                <a:tc>
+                  <a:txBody>
+                    <a:bodyPr/>
+                    <a:lstStyle/>
+                    <a:p>
+                      <a:pPr>
+                        <a:defRPr sz="1000"/>
+                      </a:pPr>
+                      <a:r>
+                        <a:t>Market Positioning Brief Gate 1</a:t>
+                      </a:r>
+                    </a:p>
+                  </a:txBody>
+                  <a:tcPr/>
+                </a:tc>
+                <a:tc>
+                  <a:txBody>
+                    <a:bodyPr/>
+                    <a:lstStyle/>
+                    <a:p>
+                      <a:pPr>
+                        <a:defRPr sz="1000"/>
+                      </a:pPr>
+                      <a:r>
+                        <a:t>Nina Patel</a:t>
+                      </a:r>
+                    </a:p>
+                  </a:txBody>
+                  <a:tcPr/>
+                </a:tc>
+                <a:tc>
+                  <a:txBody>
+                    <a:bodyPr/>
+                    <a:lstStyle/>
+                    <a:p>
+                      <a:pPr>
+                        <a:defRPr sz="1000"/>
+                      </a:pPr>
+                      <a:r>
+                        <a:t>3 business days</a:t>
+                      </a:r>
+                    </a:p>
+                  </a:txBody>
+                  <a:tcPr/>
+                </a:tc>
+                <a:tc>
+                  <a:txBody>
+                    <a:bodyPr/>
+                    <a:lstStyle/>
+                    <a:p>
+                      <a:pPr>
+                        <a:defRPr sz="1000"/>
+                      </a:pPr>
+                      <a:r>
+                        <a:t>Active</a:t>
+                      </a:r>
+                    </a:p>
+                  </a:txBody>
+                  <a:tcPr/>
+                </a:tc>
+              </a:tr>
+              <a:tr h="347472">
+                <a:tc>
+                  <a:txBody>
+                    <a:bodyPr/>
+                    <a:lstStyle/>
+                    <a:p>
+                      <a:pPr>
+                        <a:defRPr sz="1000"/>
+                      </a:pPr>
+                      <a:r>
+                        <a:t>Market Positioning Brief Gate 2</a:t>
+                      </a:r>
+                    </a:p>
+                  </a:txBody>
+                  <a:tcPr/>
+                </a:tc>
+                <a:tc>
+                  <a:txBody>
+                    <a:bodyPr/>
+                    <a:lstStyle/>
+                    <a:p>
+                      <a:pPr>
+                        <a:defRPr sz="1000"/>
+                      </a:pPr>
+                      <a:r>
+                        <a:t>Nina Patel</a:t>
+                      </a:r>
+                    </a:p>
+                  </a:txBody>
+                  <a:tcPr/>
+                </a:tc>
+                <a:tc>
+                  <a:txBody>
+                    <a:bodyPr/>
+                    <a:lstStyle/>
+                    <a:p>
+                      <a:pPr>
+                        <a:defRPr sz="1000"/>
+                      </a:pPr>
+                      <a:r>
+                        <a:t>10 business days</a:t>
+                      </a:r>
+                    </a:p>
+                  </a:txBody>
+                  <a:tcPr/>
+                </a:tc>
+                <a:tc>
+                  <a:txBody>
+                    <a:bodyPr/>
+                    <a:lstStyle/>
+                    <a:p>
+                      <a:pPr>
+                        <a:defRPr sz="1000"/>
+                      </a:pPr>
+                      <a:r>
+                        <a:t>Monitored</a:t>
+                      </a:r>
+                    </a:p>
+                  </a:txBody>
+                  <a:tcPr/>
+                </a:tc>
+              </a:tr>
+              <a:tr h="347472">
+                <a:tc>
+                  <a:txBody>
+                    <a:bodyPr/>
+                    <a:lstStyle/>
+                    <a:p>
+                      <a:pPr>
+                        <a:defRPr sz="1000"/>
+                      </a:pPr>
+                      <a:r>
+                        <a:t>Sec-9</a:t>
+                      </a:r>
+                    </a:p>
+                  </a:txBody>
+                  <a:tcPr/>
+                </a:tc>
+                <a:tc>
+                  <a:txBody>
+                    <a:bodyPr/>
+                    <a:lstStyle/>
+                    <a:p>
+                      <a:pPr>
+                        <a:defRPr sz="1000"/>
+                      </a:pPr>
+                      <a:r>
+                        <a:t>Nina Patel</a:t>
+                      </a:r>
+                    </a:p>
+                  </a:txBody>
+                  <a:tcPr/>
+                </a:tc>
+                <a:tc>
+                  <a:txBody>
+                    <a:bodyPr/>
+                    <a:lstStyle/>
+                    <a:p>
+                      <a:pPr>
+                        <a:defRPr sz="1000"/>
+                      </a:pPr>
+                      <a:r>
+                        <a:t>10 business days</a:t>
+                      </a:r>
+                    </a:p>
+                  </a:txBody>
+                  <a:tcPr/>
+                </a:tc>
+                <a:tc>
+                  <a:txBody>
+                    <a:bodyPr/>
+                    <a:lstStyle/>
+                    <a:p>
+                      <a:pPr>
+                        <a:defRPr sz="1000"/>
+                      </a:pPr>
+                      <a:r>
+                        <a:t>Stage 9 Verified</a:t>
+                      </a:r>
+                    </a:p>
+                  </a:txBody>
+                  <a:tcPr/>
+                </a:tc>
+              </a:tr>
+            </a:tbl>
+          </a:graphicData>
+        </a:graphic>
+      </p:graphicFrame>
+      <p:pic>
+        <p:nvPicPr>
+          <p:cNvPr id="5" name="Picture 4" descr="image.png"/>
+          <p:cNvPicPr>
+            <a:picLocks noChangeAspect="1"/>
+          </p:cNvPicPr>
+          <p:nvPr/>
+        </p:nvPicPr>
+        <p:blipFill>
+          <a:blip r:embed="rId2"/>
+          <a:stretch>
+            <a:fillRect/>
+          </a:stretch>
+        </p:blipFill>
+        <p:spPr>
+          <a:xfrm>
+            <a:off x="6492240" y="3703320"/>
+            <a:ext cx="5120640" cy="1828800"/>
+          </a:xfrm>
+          <a:prstGeom prst="rect">
+            <a:avLst/>
+          </a:prstGeom>
+        </p:spPr>
+      </p:pic>
     </p:spTree>
   </p:cSld>
   <p:clrMapOvr>

--- a/data/sites/sales/Competitive Intelligence/market-positioning-brief.pptx
+++ b/data/sites/sales/Competitive Intelligence/market-positioning-brief.pptx
@@ -11,12 +11,6 @@
     <p:sldId id="259" r:id="rId10"/>
     <p:sldId id="260" r:id="rId11"/>
     <p:sldId id="261" r:id="rId12"/>
-    <p:sldId id="262" r:id="rId13"/>
-    <p:sldId id="263" r:id="rId14"/>
-    <p:sldId id="264" r:id="rId15"/>
-    <p:sldId id="265" r:id="rId16"/>
-    <p:sldId id="266" r:id="rId17"/>
-    <p:sldId id="267" r:id="rId18"/>
   </p:sldIdLst>
   <p:sldSz cx="12191695" cy="6858000" type="screen4x3"/>
   <p:notesSz cx="6858000" cy="9144000"/>
@@ -3467,1326 +3461,6 @@
 </p:sld>
 </file>
 
-<file path=ppt/slides/slide10.xml><?xml version="1.0" encoding="utf-8"?>
-<p:sld xmlns:a="http://schemas.openxmlformats.org/drawingml/2006/main" xmlns:p="http://schemas.openxmlformats.org/presentationml/2006/main" xmlns:r="http://schemas.openxmlformats.org/officeDocument/2006/relationships">
-  <p:cSld>
-    <p:spTree>
-      <p:nvGrpSpPr>
-        <p:cNvPr id="1" name=""/>
-        <p:cNvGrpSpPr/>
-        <p:nvPr/>
-      </p:nvGrpSpPr>
-      <p:grpSpPr/>
-      <p:sp>
-        <p:nvSpPr>
-          <p:cNvPr id="2" name="Title 1"/>
-          <p:cNvSpPr>
-            <a:spLocks noGrp="1"/>
-          </p:cNvSpPr>
-          <p:nvPr>
-            <p:ph type="title"/>
-          </p:nvPr>
-        </p:nvSpPr>
-        <p:spPr/>
-        <p:txBody>
-          <a:bodyPr/>
-          <a:lstStyle/>
-          <a:p>
-            <a:r>
-              <a:t>10. Cross-Functional Dependencies - Market Positioning Brief</a:t>
-            </a:r>
-          </a:p>
-        </p:txBody>
-      </p:sp>
-      <p:sp>
-        <p:nvSpPr>
-          <p:cNvPr id="3" name="Content Placeholder 2"/>
-          <p:cNvSpPr>
-            <a:spLocks noGrp="1"/>
-          </p:cNvSpPr>
-          <p:nvPr>
-            <p:ph idx="1"/>
-          </p:nvPr>
-        </p:nvSpPr>
-        <p:spPr/>
-        <p:txBody>
-          <a:bodyPr/>
-          <a:lstStyle/>
-          <a:p>
-            <a:r>
-              <a:t>Summarizes the competitive landscape and recommended positioning statement for the current fiscal year. Section 10 (Cross-Functional Dependencies) applies to Competitive Intelligence within Sales &amp; Marketing Knowledge Hub and is maintained by Nina Patel. Documents upstream and downstream team dependencies and service-level commitments.</a:t>
-            </a:r>
-          </a:p>
-          <a:p>
-            <a:pPr lvl="1"/>
-            <a:r>
-              <a:t>Recommended positioning emphasizes real-time data freshness and integration breadth.</a:t>
-            </a:r>
-          </a:p>
-          <a:p>
-            <a:pPr lvl="1"/>
-            <a:r>
-              <a:t>Positioning brief is reviewed with sales leadership before each fiscal year planning cycle.</a:t>
-            </a:r>
-          </a:p>
-          <a:p>
-            <a:pPr lvl="1"/>
-            <a:r>
-              <a:t>Section 10 review cadence is tracked by Nina Patel under Competitive Intelligence governance.</a:t>
-            </a:r>
-          </a:p>
-        </p:txBody>
-      </p:sp>
-      <p:graphicFrame>
-        <p:nvGraphicFramePr>
-          <p:cNvPr id="4" name="Table 3"/>
-          <p:cNvGraphicFramePr>
-            <a:graphicFrameLocks noGrp="1"/>
-          </p:cNvGraphicFramePr>
-          <p:nvPr/>
-        </p:nvGraphicFramePr>
-        <p:xfrm>
-          <a:off x="548640" y="3749039"/>
-          <a:ext cx="5669280" cy="1737360"/>
-        </p:xfrm>
-        <a:graphic>
-          <a:graphicData uri="http://schemas.openxmlformats.org/drawingml/2006/table">
-            <a:tbl>
-              <a:tblPr firstRow="1" bandRow="1">
-                <a:tableStyleId>{5C22544A-7EE6-4342-B048-85BDC9FD1C3A}</a:tableStyleId>
-              </a:tblPr>
-              <a:tblGrid>
-                <a:gridCol w="1417320"/>
-                <a:gridCol w="1417320"/>
-                <a:gridCol w="1417320"/>
-                <a:gridCol w="1417320"/>
-              </a:tblGrid>
-              <a:tr h="347472">
-                <a:tc>
-                  <a:txBody>
-                    <a:bodyPr/>
-                    <a:lstStyle/>
-                    <a:p>
-                      <a:pPr>
-                        <a:defRPr b="1" sz="1100"/>
-                      </a:pPr>
-                      <a:r>
-                        <a:t>Control Area</a:t>
-                      </a:r>
-                    </a:p>
-                  </a:txBody>
-                  <a:tcPr/>
-                </a:tc>
-                <a:tc>
-                  <a:txBody>
-                    <a:bodyPr/>
-                    <a:lstStyle/>
-                    <a:p>
-                      <a:pPr>
-                        <a:defRPr b="1" sz="1100"/>
-                      </a:pPr>
-                      <a:r>
-                        <a:t>Owner</a:t>
-                      </a:r>
-                    </a:p>
-                  </a:txBody>
-                  <a:tcPr/>
-                </a:tc>
-                <a:tc>
-                  <a:txBody>
-                    <a:bodyPr/>
-                    <a:lstStyle/>
-                    <a:p>
-                      <a:pPr>
-                        <a:defRPr b="1" sz="1100"/>
-                      </a:pPr>
-                      <a:r>
-                        <a:t>Target SLA</a:t>
-                      </a:r>
-                    </a:p>
-                  </a:txBody>
-                  <a:tcPr/>
-                </a:tc>
-                <a:tc>
-                  <a:txBody>
-                    <a:bodyPr/>
-                    <a:lstStyle/>
-                    <a:p>
-                      <a:pPr>
-                        <a:defRPr b="1" sz="1100"/>
-                      </a:pPr>
-                      <a:r>
-                        <a:t>Verification Status</a:t>
-                      </a:r>
-                    </a:p>
-                  </a:txBody>
-                  <a:tcPr/>
-                </a:tc>
-              </a:tr>
-              <a:tr h="347472">
-                <a:tc>
-                  <a:txBody>
-                    <a:bodyPr/>
-                    <a:lstStyle/>
-                    <a:p>
-                      <a:pPr>
-                        <a:defRPr sz="1000"/>
-                      </a:pPr>
-                      <a:r>
-                        <a:t>Competitive Intelligence</a:t>
-                      </a:r>
-                    </a:p>
-                  </a:txBody>
-                  <a:tcPr/>
-                </a:tc>
-                <a:tc>
-                  <a:txBody>
-                    <a:bodyPr/>
-                    <a:lstStyle/>
-                    <a:p>
-                      <a:pPr>
-                        <a:defRPr sz="1000"/>
-                      </a:pPr>
-                      <a:r>
-                        <a:t>Nina Patel</a:t>
-                      </a:r>
-                    </a:p>
-                  </a:txBody>
-                  <a:tcPr/>
-                </a:tc>
-                <a:tc>
-                  <a:txBody>
-                    <a:bodyPr/>
-                    <a:lstStyle/>
-                    <a:p>
-                      <a:pPr>
-                        <a:defRPr sz="1000"/>
-                      </a:pPr>
-                      <a:r>
-                        <a:t>5 business days</a:t>
-                      </a:r>
-                    </a:p>
-                  </a:txBody>
-                  <a:tcPr/>
-                </a:tc>
-                <a:tc>
-                  <a:txBody>
-                    <a:bodyPr/>
-                    <a:lstStyle/>
-                    <a:p>
-                      <a:pPr>
-                        <a:defRPr sz="1000"/>
-                      </a:pPr>
-                      <a:r>
-                        <a:t>Verified</a:t>
-                      </a:r>
-                    </a:p>
-                  </a:txBody>
-                  <a:tcPr/>
-                </a:tc>
-              </a:tr>
-              <a:tr h="347472">
-                <a:tc>
-                  <a:txBody>
-                    <a:bodyPr/>
-                    <a:lstStyle/>
-                    <a:p>
-                      <a:pPr>
-                        <a:defRPr sz="1000"/>
-                      </a:pPr>
-                      <a:r>
-                        <a:t>Market Positioning Brief Gate 1</a:t>
-                      </a:r>
-                    </a:p>
-                  </a:txBody>
-                  <a:tcPr/>
-                </a:tc>
-                <a:tc>
-                  <a:txBody>
-                    <a:bodyPr/>
-                    <a:lstStyle/>
-                    <a:p>
-                      <a:pPr>
-                        <a:defRPr sz="1000"/>
-                      </a:pPr>
-                      <a:r>
-                        <a:t>Nina Patel</a:t>
-                      </a:r>
-                    </a:p>
-                  </a:txBody>
-                  <a:tcPr/>
-                </a:tc>
-                <a:tc>
-                  <a:txBody>
-                    <a:bodyPr/>
-                    <a:lstStyle/>
-                    <a:p>
-                      <a:pPr>
-                        <a:defRPr sz="1000"/>
-                      </a:pPr>
-                      <a:r>
-                        <a:t>3 business days</a:t>
-                      </a:r>
-                    </a:p>
-                  </a:txBody>
-                  <a:tcPr/>
-                </a:tc>
-                <a:tc>
-                  <a:txBody>
-                    <a:bodyPr/>
-                    <a:lstStyle/>
-                    <a:p>
-                      <a:pPr>
-                        <a:defRPr sz="1000"/>
-                      </a:pPr>
-                      <a:r>
-                        <a:t>Active</a:t>
-                      </a:r>
-                    </a:p>
-                  </a:txBody>
-                  <a:tcPr/>
-                </a:tc>
-              </a:tr>
-              <a:tr h="347472">
-                <a:tc>
-                  <a:txBody>
-                    <a:bodyPr/>
-                    <a:lstStyle/>
-                    <a:p>
-                      <a:pPr>
-                        <a:defRPr sz="1000"/>
-                      </a:pPr>
-                      <a:r>
-                        <a:t>Market Positioning Brief Gate 2</a:t>
-                      </a:r>
-                    </a:p>
-                  </a:txBody>
-                  <a:tcPr/>
-                </a:tc>
-                <a:tc>
-                  <a:txBody>
-                    <a:bodyPr/>
-                    <a:lstStyle/>
-                    <a:p>
-                      <a:pPr>
-                        <a:defRPr sz="1000"/>
-                      </a:pPr>
-                      <a:r>
-                        <a:t>Nina Patel</a:t>
-                      </a:r>
-                    </a:p>
-                  </a:txBody>
-                  <a:tcPr/>
-                </a:tc>
-                <a:tc>
-                  <a:txBody>
-                    <a:bodyPr/>
-                    <a:lstStyle/>
-                    <a:p>
-                      <a:pPr>
-                        <a:defRPr sz="1000"/>
-                      </a:pPr>
-                      <a:r>
-                        <a:t>10 business days</a:t>
-                      </a:r>
-                    </a:p>
-                  </a:txBody>
-                  <a:tcPr/>
-                </a:tc>
-                <a:tc>
-                  <a:txBody>
-                    <a:bodyPr/>
-                    <a:lstStyle/>
-                    <a:p>
-                      <a:pPr>
-                        <a:defRPr sz="1000"/>
-                      </a:pPr>
-                      <a:r>
-                        <a:t>Monitored</a:t>
-                      </a:r>
-                    </a:p>
-                  </a:txBody>
-                  <a:tcPr/>
-                </a:tc>
-              </a:tr>
-              <a:tr h="347472">
-                <a:tc>
-                  <a:txBody>
-                    <a:bodyPr/>
-                    <a:lstStyle/>
-                    <a:p>
-                      <a:pPr>
-                        <a:defRPr sz="1000"/>
-                      </a:pPr>
-                      <a:r>
-                        <a:t>Sec-10</a:t>
-                      </a:r>
-                    </a:p>
-                  </a:txBody>
-                  <a:tcPr/>
-                </a:tc>
-                <a:tc>
-                  <a:txBody>
-                    <a:bodyPr/>
-                    <a:lstStyle/>
-                    <a:p>
-                      <a:pPr>
-                        <a:defRPr sz="1000"/>
-                      </a:pPr>
-                      <a:r>
-                        <a:t>Nina Patel</a:t>
-                      </a:r>
-                    </a:p>
-                  </a:txBody>
-                  <a:tcPr/>
-                </a:tc>
-                <a:tc>
-                  <a:txBody>
-                    <a:bodyPr/>
-                    <a:lstStyle/>
-                    <a:p>
-                      <a:pPr>
-                        <a:defRPr sz="1000"/>
-                      </a:pPr>
-                      <a:r>
-                        <a:t>5 business days</a:t>
-                      </a:r>
-                    </a:p>
-                  </a:txBody>
-                  <a:tcPr/>
-                </a:tc>
-                <a:tc>
-                  <a:txBody>
-                    <a:bodyPr/>
-                    <a:lstStyle/>
-                    <a:p>
-                      <a:pPr>
-                        <a:defRPr sz="1000"/>
-                      </a:pPr>
-                      <a:r>
-                        <a:t>Stage 10 Verified</a:t>
-                      </a:r>
-                    </a:p>
-                  </a:txBody>
-                  <a:tcPr/>
-                </a:tc>
-              </a:tr>
-            </a:tbl>
-          </a:graphicData>
-        </a:graphic>
-      </p:graphicFrame>
-      <p:pic>
-        <p:nvPicPr>
-          <p:cNvPr id="5" name="Picture 4" descr="image.png"/>
-          <p:cNvPicPr>
-            <a:picLocks noChangeAspect="1"/>
-          </p:cNvPicPr>
-          <p:nvPr/>
-        </p:nvPicPr>
-        <p:blipFill>
-          <a:blip r:embed="rId2"/>
-          <a:stretch>
-            <a:fillRect/>
-          </a:stretch>
-        </p:blipFill>
-        <p:spPr>
-          <a:xfrm>
-            <a:off x="6492240" y="3703320"/>
-            <a:ext cx="5120640" cy="1828800"/>
-          </a:xfrm>
-          <a:prstGeom prst="rect">
-            <a:avLst/>
-          </a:prstGeom>
-        </p:spPr>
-      </p:pic>
-    </p:spTree>
-  </p:cSld>
-  <p:clrMapOvr>
-    <a:masterClrMapping/>
-  </p:clrMapOvr>
-</p:sld>
-</file>
-
-<file path=ppt/slides/slide11.xml><?xml version="1.0" encoding="utf-8"?>
-<p:sld xmlns:a="http://schemas.openxmlformats.org/drawingml/2006/main" xmlns:p="http://schemas.openxmlformats.org/presentationml/2006/main" xmlns:r="http://schemas.openxmlformats.org/officeDocument/2006/relationships">
-  <p:cSld>
-    <p:spTree>
-      <p:nvGrpSpPr>
-        <p:cNvPr id="1" name=""/>
-        <p:cNvGrpSpPr/>
-        <p:nvPr/>
-      </p:nvGrpSpPr>
-      <p:grpSpPr/>
-      <p:sp>
-        <p:nvSpPr>
-          <p:cNvPr id="2" name="Title 1"/>
-          <p:cNvSpPr>
-            <a:spLocks noGrp="1"/>
-          </p:cNvSpPr>
-          <p:nvPr>
-            <p:ph type="title"/>
-          </p:nvPr>
-        </p:nvSpPr>
-        <p:spPr/>
-        <p:txBody>
-          <a:bodyPr/>
-          <a:lstStyle/>
-          <a:p>
-            <a:r>
-              <a:t>11. Continuous Improvement Roadmap - Market Positioning Brief</a:t>
-            </a:r>
-          </a:p>
-        </p:txBody>
-      </p:sp>
-      <p:sp>
-        <p:nvSpPr>
-          <p:cNvPr id="3" name="Content Placeholder 2"/>
-          <p:cNvSpPr>
-            <a:spLocks noGrp="1"/>
-          </p:cNvSpPr>
-          <p:nvPr>
-            <p:ph idx="1"/>
-          </p:nvPr>
-        </p:nvSpPr>
-        <p:spPr/>
-        <p:txBody>
-          <a:bodyPr/>
-          <a:lstStyle/>
-          <a:p>
-            <a:r>
-              <a:t>Summarizes the competitive landscape and recommended positioning statement for the current fiscal year. Section 11 (Continuous Improvement Roadmap) applies to Competitive Intelligence within Sales &amp; Marketing Knowledge Hub and is maintained by Nina Patel. Schedules quarterly optimization milestones, automation targets, and capability reviews.</a:t>
-            </a:r>
-          </a:p>
-          <a:p>
-            <a:pPr lvl="1"/>
-            <a:r>
-              <a:t>Positioning brief is reviewed with sales leadership before each fiscal year planning cycle.</a:t>
-            </a:r>
-          </a:p>
-          <a:p>
-            <a:pPr lvl="1"/>
-            <a:r>
-              <a:t>Messaging updates from this brief flow into the brand and messaging guidelines.</a:t>
-            </a:r>
-          </a:p>
-          <a:p>
-            <a:pPr lvl="1"/>
-            <a:r>
-              <a:t>Section 11 review cadence is tracked by Nina Patel under Competitive Intelligence governance.</a:t>
-            </a:r>
-          </a:p>
-        </p:txBody>
-      </p:sp>
-      <p:graphicFrame>
-        <p:nvGraphicFramePr>
-          <p:cNvPr id="4" name="Table 3"/>
-          <p:cNvGraphicFramePr>
-            <a:graphicFrameLocks noGrp="1"/>
-          </p:cNvGraphicFramePr>
-          <p:nvPr/>
-        </p:nvGraphicFramePr>
-        <p:xfrm>
-          <a:off x="548640" y="3749039"/>
-          <a:ext cx="5669280" cy="1737360"/>
-        </p:xfrm>
-        <a:graphic>
-          <a:graphicData uri="http://schemas.openxmlformats.org/drawingml/2006/table">
-            <a:tbl>
-              <a:tblPr firstRow="1" bandRow="1">
-                <a:tableStyleId>{5C22544A-7EE6-4342-B048-85BDC9FD1C3A}</a:tableStyleId>
-              </a:tblPr>
-              <a:tblGrid>
-                <a:gridCol w="1417320"/>
-                <a:gridCol w="1417320"/>
-                <a:gridCol w="1417320"/>
-                <a:gridCol w="1417320"/>
-              </a:tblGrid>
-              <a:tr h="347472">
-                <a:tc>
-                  <a:txBody>
-                    <a:bodyPr/>
-                    <a:lstStyle/>
-                    <a:p>
-                      <a:pPr>
-                        <a:defRPr b="1" sz="1100"/>
-                      </a:pPr>
-                      <a:r>
-                        <a:t>Control Area</a:t>
-                      </a:r>
-                    </a:p>
-                  </a:txBody>
-                  <a:tcPr/>
-                </a:tc>
-                <a:tc>
-                  <a:txBody>
-                    <a:bodyPr/>
-                    <a:lstStyle/>
-                    <a:p>
-                      <a:pPr>
-                        <a:defRPr b="1" sz="1100"/>
-                      </a:pPr>
-                      <a:r>
-                        <a:t>Owner</a:t>
-                      </a:r>
-                    </a:p>
-                  </a:txBody>
-                  <a:tcPr/>
-                </a:tc>
-                <a:tc>
-                  <a:txBody>
-                    <a:bodyPr/>
-                    <a:lstStyle/>
-                    <a:p>
-                      <a:pPr>
-                        <a:defRPr b="1" sz="1100"/>
-                      </a:pPr>
-                      <a:r>
-                        <a:t>Target SLA</a:t>
-                      </a:r>
-                    </a:p>
-                  </a:txBody>
-                  <a:tcPr/>
-                </a:tc>
-                <a:tc>
-                  <a:txBody>
-                    <a:bodyPr/>
-                    <a:lstStyle/>
-                    <a:p>
-                      <a:pPr>
-                        <a:defRPr b="1" sz="1100"/>
-                      </a:pPr>
-                      <a:r>
-                        <a:t>Verification Status</a:t>
-                      </a:r>
-                    </a:p>
-                  </a:txBody>
-                  <a:tcPr/>
-                </a:tc>
-              </a:tr>
-              <a:tr h="347472">
-                <a:tc>
-                  <a:txBody>
-                    <a:bodyPr/>
-                    <a:lstStyle/>
-                    <a:p>
-                      <a:pPr>
-                        <a:defRPr sz="1000"/>
-                      </a:pPr>
-                      <a:r>
-                        <a:t>Competitive Intelligence</a:t>
-                      </a:r>
-                    </a:p>
-                  </a:txBody>
-                  <a:tcPr/>
-                </a:tc>
-                <a:tc>
-                  <a:txBody>
-                    <a:bodyPr/>
-                    <a:lstStyle/>
-                    <a:p>
-                      <a:pPr>
-                        <a:defRPr sz="1000"/>
-                      </a:pPr>
-                      <a:r>
-                        <a:t>Nina Patel</a:t>
-                      </a:r>
-                    </a:p>
-                  </a:txBody>
-                  <a:tcPr/>
-                </a:tc>
-                <a:tc>
-                  <a:txBody>
-                    <a:bodyPr/>
-                    <a:lstStyle/>
-                    <a:p>
-                      <a:pPr>
-                        <a:defRPr sz="1000"/>
-                      </a:pPr>
-                      <a:r>
-                        <a:t>5 business days</a:t>
-                      </a:r>
-                    </a:p>
-                  </a:txBody>
-                  <a:tcPr/>
-                </a:tc>
-                <a:tc>
-                  <a:txBody>
-                    <a:bodyPr/>
-                    <a:lstStyle/>
-                    <a:p>
-                      <a:pPr>
-                        <a:defRPr sz="1000"/>
-                      </a:pPr>
-                      <a:r>
-                        <a:t>Verified</a:t>
-                      </a:r>
-                    </a:p>
-                  </a:txBody>
-                  <a:tcPr/>
-                </a:tc>
-              </a:tr>
-              <a:tr h="347472">
-                <a:tc>
-                  <a:txBody>
-                    <a:bodyPr/>
-                    <a:lstStyle/>
-                    <a:p>
-                      <a:pPr>
-                        <a:defRPr sz="1000"/>
-                      </a:pPr>
-                      <a:r>
-                        <a:t>Market Positioning Brief Gate 1</a:t>
-                      </a:r>
-                    </a:p>
-                  </a:txBody>
-                  <a:tcPr/>
-                </a:tc>
-                <a:tc>
-                  <a:txBody>
-                    <a:bodyPr/>
-                    <a:lstStyle/>
-                    <a:p>
-                      <a:pPr>
-                        <a:defRPr sz="1000"/>
-                      </a:pPr>
-                      <a:r>
-                        <a:t>Nina Patel</a:t>
-                      </a:r>
-                    </a:p>
-                  </a:txBody>
-                  <a:tcPr/>
-                </a:tc>
-                <a:tc>
-                  <a:txBody>
-                    <a:bodyPr/>
-                    <a:lstStyle/>
-                    <a:p>
-                      <a:pPr>
-                        <a:defRPr sz="1000"/>
-                      </a:pPr>
-                      <a:r>
-                        <a:t>3 business days</a:t>
-                      </a:r>
-                    </a:p>
-                  </a:txBody>
-                  <a:tcPr/>
-                </a:tc>
-                <a:tc>
-                  <a:txBody>
-                    <a:bodyPr/>
-                    <a:lstStyle/>
-                    <a:p>
-                      <a:pPr>
-                        <a:defRPr sz="1000"/>
-                      </a:pPr>
-                      <a:r>
-                        <a:t>Active</a:t>
-                      </a:r>
-                    </a:p>
-                  </a:txBody>
-                  <a:tcPr/>
-                </a:tc>
-              </a:tr>
-              <a:tr h="347472">
-                <a:tc>
-                  <a:txBody>
-                    <a:bodyPr/>
-                    <a:lstStyle/>
-                    <a:p>
-                      <a:pPr>
-                        <a:defRPr sz="1000"/>
-                      </a:pPr>
-                      <a:r>
-                        <a:t>Market Positioning Brief Gate 2</a:t>
-                      </a:r>
-                    </a:p>
-                  </a:txBody>
-                  <a:tcPr/>
-                </a:tc>
-                <a:tc>
-                  <a:txBody>
-                    <a:bodyPr/>
-                    <a:lstStyle/>
-                    <a:p>
-                      <a:pPr>
-                        <a:defRPr sz="1000"/>
-                      </a:pPr>
-                      <a:r>
-                        <a:t>Nina Patel</a:t>
-                      </a:r>
-                    </a:p>
-                  </a:txBody>
-                  <a:tcPr/>
-                </a:tc>
-                <a:tc>
-                  <a:txBody>
-                    <a:bodyPr/>
-                    <a:lstStyle/>
-                    <a:p>
-                      <a:pPr>
-                        <a:defRPr sz="1000"/>
-                      </a:pPr>
-                      <a:r>
-                        <a:t>10 business days</a:t>
-                      </a:r>
-                    </a:p>
-                  </a:txBody>
-                  <a:tcPr/>
-                </a:tc>
-                <a:tc>
-                  <a:txBody>
-                    <a:bodyPr/>
-                    <a:lstStyle/>
-                    <a:p>
-                      <a:pPr>
-                        <a:defRPr sz="1000"/>
-                      </a:pPr>
-                      <a:r>
-                        <a:t>Monitored</a:t>
-                      </a:r>
-                    </a:p>
-                  </a:txBody>
-                  <a:tcPr/>
-                </a:tc>
-              </a:tr>
-              <a:tr h="347472">
-                <a:tc>
-                  <a:txBody>
-                    <a:bodyPr/>
-                    <a:lstStyle/>
-                    <a:p>
-                      <a:pPr>
-                        <a:defRPr sz="1000"/>
-                      </a:pPr>
-                      <a:r>
-                        <a:t>Sec-11</a:t>
-                      </a:r>
-                    </a:p>
-                  </a:txBody>
-                  <a:tcPr/>
-                </a:tc>
-                <a:tc>
-                  <a:txBody>
-                    <a:bodyPr/>
-                    <a:lstStyle/>
-                    <a:p>
-                      <a:pPr>
-                        <a:defRPr sz="1000"/>
-                      </a:pPr>
-                      <a:r>
-                        <a:t>Nina Patel</a:t>
-                      </a:r>
-                    </a:p>
-                  </a:txBody>
-                  <a:tcPr/>
-                </a:tc>
-                <a:tc>
-                  <a:txBody>
-                    <a:bodyPr/>
-                    <a:lstStyle/>
-                    <a:p>
-                      <a:pPr>
-                        <a:defRPr sz="1000"/>
-                      </a:pPr>
-                      <a:r>
-                        <a:t>3 business days</a:t>
-                      </a:r>
-                    </a:p>
-                  </a:txBody>
-                  <a:tcPr/>
-                </a:tc>
-                <a:tc>
-                  <a:txBody>
-                    <a:bodyPr/>
-                    <a:lstStyle/>
-                    <a:p>
-                      <a:pPr>
-                        <a:defRPr sz="1000"/>
-                      </a:pPr>
-                      <a:r>
-                        <a:t>Stage 11 Verified</a:t>
-                      </a:r>
-                    </a:p>
-                  </a:txBody>
-                  <a:tcPr/>
-                </a:tc>
-              </a:tr>
-            </a:tbl>
-          </a:graphicData>
-        </a:graphic>
-      </p:graphicFrame>
-      <p:pic>
-        <p:nvPicPr>
-          <p:cNvPr id="5" name="Picture 4" descr="image.png"/>
-          <p:cNvPicPr>
-            <a:picLocks noChangeAspect="1"/>
-          </p:cNvPicPr>
-          <p:nvPr/>
-        </p:nvPicPr>
-        <p:blipFill>
-          <a:blip r:embed="rId2"/>
-          <a:stretch>
-            <a:fillRect/>
-          </a:stretch>
-        </p:blipFill>
-        <p:spPr>
-          <a:xfrm>
-            <a:off x="6492240" y="3703320"/>
-            <a:ext cx="5120640" cy="1828800"/>
-          </a:xfrm>
-          <a:prstGeom prst="rect">
-            <a:avLst/>
-          </a:prstGeom>
-        </p:spPr>
-      </p:pic>
-    </p:spTree>
-  </p:cSld>
-  <p:clrMapOvr>
-    <a:masterClrMapping/>
-  </p:clrMapOvr>
-</p:sld>
-</file>
-
-<file path=ppt/slides/slide12.xml><?xml version="1.0" encoding="utf-8"?>
-<p:sld xmlns:a="http://schemas.openxmlformats.org/drawingml/2006/main" xmlns:p="http://schemas.openxmlformats.org/presentationml/2006/main" xmlns:r="http://schemas.openxmlformats.org/officeDocument/2006/relationships">
-  <p:cSld>
-    <p:spTree>
-      <p:nvGrpSpPr>
-        <p:cNvPr id="1" name=""/>
-        <p:cNvGrpSpPr/>
-        <p:nvPr/>
-      </p:nvGrpSpPr>
-      <p:grpSpPr/>
-      <p:sp>
-        <p:nvSpPr>
-          <p:cNvPr id="2" name="Title 1"/>
-          <p:cNvSpPr>
-            <a:spLocks noGrp="1"/>
-          </p:cNvSpPr>
-          <p:nvPr>
-            <p:ph type="title"/>
-          </p:nvPr>
-        </p:nvSpPr>
-        <p:spPr/>
-        <p:txBody>
-          <a:bodyPr/>
-          <a:lstStyle/>
-          <a:p>
-            <a:r>
-              <a:t>12. Appendix, Lineage &amp; Sign-off - Market Positioning Brief</a:t>
-            </a:r>
-          </a:p>
-        </p:txBody>
-      </p:sp>
-      <p:sp>
-        <p:nvSpPr>
-          <p:cNvPr id="3" name="Content Placeholder 2"/>
-          <p:cNvSpPr>
-            <a:spLocks noGrp="1"/>
-          </p:cNvSpPr>
-          <p:nvPr>
-            <p:ph idx="1"/>
-          </p:nvPr>
-        </p:nvSpPr>
-        <p:spPr/>
-        <p:txBody>
-          <a:bodyPr/>
-          <a:lstStyle/>
-          <a:p>
-            <a:r>
-              <a:t>Summarizes the competitive landscape and recommended positioning statement for the current fiscal year. Section 12 (Appendix, Lineage &amp; Sign-off) applies to Competitive Intelligence within Sales &amp; Marketing Knowledge Hub and is maintained by Nina Patel. Records document lineage, governance metadata, version history, and owner sign-off.</a:t>
-            </a:r>
-          </a:p>
-          <a:p>
-            <a:pPr lvl="1"/>
-            <a:r>
-              <a:t>Messaging updates from this brief flow into the brand and messaging guidelines.</a:t>
-            </a:r>
-          </a:p>
-          <a:p>
-            <a:pPr lvl="1"/>
-            <a:r>
-              <a:t>Three primary competitors are tracked across pricing, features, and market presence.</a:t>
-            </a:r>
-          </a:p>
-          <a:p>
-            <a:pPr lvl="1"/>
-            <a:r>
-              <a:t>Section 12 review cadence is tracked by Nina Patel under Competitive Intelligence governance.</a:t>
-            </a:r>
-          </a:p>
-        </p:txBody>
-      </p:sp>
-      <p:graphicFrame>
-        <p:nvGraphicFramePr>
-          <p:cNvPr id="4" name="Table 3"/>
-          <p:cNvGraphicFramePr>
-            <a:graphicFrameLocks noGrp="1"/>
-          </p:cNvGraphicFramePr>
-          <p:nvPr/>
-        </p:nvGraphicFramePr>
-        <p:xfrm>
-          <a:off x="548640" y="3749039"/>
-          <a:ext cx="5669280" cy="1737360"/>
-        </p:xfrm>
-        <a:graphic>
-          <a:graphicData uri="http://schemas.openxmlformats.org/drawingml/2006/table">
-            <a:tbl>
-              <a:tblPr firstRow="1" bandRow="1">
-                <a:tableStyleId>{5C22544A-7EE6-4342-B048-85BDC9FD1C3A}</a:tableStyleId>
-              </a:tblPr>
-              <a:tblGrid>
-                <a:gridCol w="1417320"/>
-                <a:gridCol w="1417320"/>
-                <a:gridCol w="1417320"/>
-                <a:gridCol w="1417320"/>
-              </a:tblGrid>
-              <a:tr h="347472">
-                <a:tc>
-                  <a:txBody>
-                    <a:bodyPr/>
-                    <a:lstStyle/>
-                    <a:p>
-                      <a:pPr>
-                        <a:defRPr b="1" sz="1100"/>
-                      </a:pPr>
-                      <a:r>
-                        <a:t>Control Area</a:t>
-                      </a:r>
-                    </a:p>
-                  </a:txBody>
-                  <a:tcPr/>
-                </a:tc>
-                <a:tc>
-                  <a:txBody>
-                    <a:bodyPr/>
-                    <a:lstStyle/>
-                    <a:p>
-                      <a:pPr>
-                        <a:defRPr b="1" sz="1100"/>
-                      </a:pPr>
-                      <a:r>
-                        <a:t>Owner</a:t>
-                      </a:r>
-                    </a:p>
-                  </a:txBody>
-                  <a:tcPr/>
-                </a:tc>
-                <a:tc>
-                  <a:txBody>
-                    <a:bodyPr/>
-                    <a:lstStyle/>
-                    <a:p>
-                      <a:pPr>
-                        <a:defRPr b="1" sz="1100"/>
-                      </a:pPr>
-                      <a:r>
-                        <a:t>Target SLA</a:t>
-                      </a:r>
-                    </a:p>
-                  </a:txBody>
-                  <a:tcPr/>
-                </a:tc>
-                <a:tc>
-                  <a:txBody>
-                    <a:bodyPr/>
-                    <a:lstStyle/>
-                    <a:p>
-                      <a:pPr>
-                        <a:defRPr b="1" sz="1100"/>
-                      </a:pPr>
-                      <a:r>
-                        <a:t>Verification Status</a:t>
-                      </a:r>
-                    </a:p>
-                  </a:txBody>
-                  <a:tcPr/>
-                </a:tc>
-              </a:tr>
-              <a:tr h="347472">
-                <a:tc>
-                  <a:txBody>
-                    <a:bodyPr/>
-                    <a:lstStyle/>
-                    <a:p>
-                      <a:pPr>
-                        <a:defRPr sz="1000"/>
-                      </a:pPr>
-                      <a:r>
-                        <a:t>Competitive Intelligence</a:t>
-                      </a:r>
-                    </a:p>
-                  </a:txBody>
-                  <a:tcPr/>
-                </a:tc>
-                <a:tc>
-                  <a:txBody>
-                    <a:bodyPr/>
-                    <a:lstStyle/>
-                    <a:p>
-                      <a:pPr>
-                        <a:defRPr sz="1000"/>
-                      </a:pPr>
-                      <a:r>
-                        <a:t>Nina Patel</a:t>
-                      </a:r>
-                    </a:p>
-                  </a:txBody>
-                  <a:tcPr/>
-                </a:tc>
-                <a:tc>
-                  <a:txBody>
-                    <a:bodyPr/>
-                    <a:lstStyle/>
-                    <a:p>
-                      <a:pPr>
-                        <a:defRPr sz="1000"/>
-                      </a:pPr>
-                      <a:r>
-                        <a:t>5 business days</a:t>
-                      </a:r>
-                    </a:p>
-                  </a:txBody>
-                  <a:tcPr/>
-                </a:tc>
-                <a:tc>
-                  <a:txBody>
-                    <a:bodyPr/>
-                    <a:lstStyle/>
-                    <a:p>
-                      <a:pPr>
-                        <a:defRPr sz="1000"/>
-                      </a:pPr>
-                      <a:r>
-                        <a:t>Verified</a:t>
-                      </a:r>
-                    </a:p>
-                  </a:txBody>
-                  <a:tcPr/>
-                </a:tc>
-              </a:tr>
-              <a:tr h="347472">
-                <a:tc>
-                  <a:txBody>
-                    <a:bodyPr/>
-                    <a:lstStyle/>
-                    <a:p>
-                      <a:pPr>
-                        <a:defRPr sz="1000"/>
-                      </a:pPr>
-                      <a:r>
-                        <a:t>Market Positioning Brief Gate 1</a:t>
-                      </a:r>
-                    </a:p>
-                  </a:txBody>
-                  <a:tcPr/>
-                </a:tc>
-                <a:tc>
-                  <a:txBody>
-                    <a:bodyPr/>
-                    <a:lstStyle/>
-                    <a:p>
-                      <a:pPr>
-                        <a:defRPr sz="1000"/>
-                      </a:pPr>
-                      <a:r>
-                        <a:t>Nina Patel</a:t>
-                      </a:r>
-                    </a:p>
-                  </a:txBody>
-                  <a:tcPr/>
-                </a:tc>
-                <a:tc>
-                  <a:txBody>
-                    <a:bodyPr/>
-                    <a:lstStyle/>
-                    <a:p>
-                      <a:pPr>
-                        <a:defRPr sz="1000"/>
-                      </a:pPr>
-                      <a:r>
-                        <a:t>3 business days</a:t>
-                      </a:r>
-                    </a:p>
-                  </a:txBody>
-                  <a:tcPr/>
-                </a:tc>
-                <a:tc>
-                  <a:txBody>
-                    <a:bodyPr/>
-                    <a:lstStyle/>
-                    <a:p>
-                      <a:pPr>
-                        <a:defRPr sz="1000"/>
-                      </a:pPr>
-                      <a:r>
-                        <a:t>Active</a:t>
-                      </a:r>
-                    </a:p>
-                  </a:txBody>
-                  <a:tcPr/>
-                </a:tc>
-              </a:tr>
-              <a:tr h="347472">
-                <a:tc>
-                  <a:txBody>
-                    <a:bodyPr/>
-                    <a:lstStyle/>
-                    <a:p>
-                      <a:pPr>
-                        <a:defRPr sz="1000"/>
-                      </a:pPr>
-                      <a:r>
-                        <a:t>Market Positioning Brief Gate 2</a:t>
-                      </a:r>
-                    </a:p>
-                  </a:txBody>
-                  <a:tcPr/>
-                </a:tc>
-                <a:tc>
-                  <a:txBody>
-                    <a:bodyPr/>
-                    <a:lstStyle/>
-                    <a:p>
-                      <a:pPr>
-                        <a:defRPr sz="1000"/>
-                      </a:pPr>
-                      <a:r>
-                        <a:t>Nina Patel</a:t>
-                      </a:r>
-                    </a:p>
-                  </a:txBody>
-                  <a:tcPr/>
-                </a:tc>
-                <a:tc>
-                  <a:txBody>
-                    <a:bodyPr/>
-                    <a:lstStyle/>
-                    <a:p>
-                      <a:pPr>
-                        <a:defRPr sz="1000"/>
-                      </a:pPr>
-                      <a:r>
-                        <a:t>10 business days</a:t>
-                      </a:r>
-                    </a:p>
-                  </a:txBody>
-                  <a:tcPr/>
-                </a:tc>
-                <a:tc>
-                  <a:txBody>
-                    <a:bodyPr/>
-                    <a:lstStyle/>
-                    <a:p>
-                      <a:pPr>
-                        <a:defRPr sz="1000"/>
-                      </a:pPr>
-                      <a:r>
-                        <a:t>Monitored</a:t>
-                      </a:r>
-                    </a:p>
-                  </a:txBody>
-                  <a:tcPr/>
-                </a:tc>
-              </a:tr>
-              <a:tr h="347472">
-                <a:tc>
-                  <a:txBody>
-                    <a:bodyPr/>
-                    <a:lstStyle/>
-                    <a:p>
-                      <a:pPr>
-                        <a:defRPr sz="1000"/>
-                      </a:pPr>
-                      <a:r>
-                        <a:t>Sec-12</a:t>
-                      </a:r>
-                    </a:p>
-                  </a:txBody>
-                  <a:tcPr/>
-                </a:tc>
-                <a:tc>
-                  <a:txBody>
-                    <a:bodyPr/>
-                    <a:lstStyle/>
-                    <a:p>
-                      <a:pPr>
-                        <a:defRPr sz="1000"/>
-                      </a:pPr>
-                      <a:r>
-                        <a:t>Nina Patel</a:t>
-                      </a:r>
-                    </a:p>
-                  </a:txBody>
-                  <a:tcPr/>
-                </a:tc>
-                <a:tc>
-                  <a:txBody>
-                    <a:bodyPr/>
-                    <a:lstStyle/>
-                    <a:p>
-                      <a:pPr>
-                        <a:defRPr sz="1000"/>
-                      </a:pPr>
-                      <a:r>
-                        <a:t>10 business days</a:t>
-                      </a:r>
-                    </a:p>
-                  </a:txBody>
-                  <a:tcPr/>
-                </a:tc>
-                <a:tc>
-                  <a:txBody>
-                    <a:bodyPr/>
-                    <a:lstStyle/>
-                    <a:p>
-                      <a:pPr>
-                        <a:defRPr sz="1000"/>
-                      </a:pPr>
-                      <a:r>
-                        <a:t>Stage 12 Verified</a:t>
-                      </a:r>
-                    </a:p>
-                  </a:txBody>
-                  <a:tcPr/>
-                </a:tc>
-              </a:tr>
-            </a:tbl>
-          </a:graphicData>
-        </a:graphic>
-      </p:graphicFrame>
-      <p:pic>
-        <p:nvPicPr>
-          <p:cNvPr id="5" name="Picture 4" descr="image.png"/>
-          <p:cNvPicPr>
-            <a:picLocks noChangeAspect="1"/>
-          </p:cNvPicPr>
-          <p:nvPr/>
-        </p:nvPicPr>
-        <p:blipFill>
-          <a:blip r:embed="rId2"/>
-          <a:stretch>
-            <a:fillRect/>
-          </a:stretch>
-        </p:blipFill>
-        <p:spPr>
-          <a:xfrm>
-            <a:off x="6492240" y="3703320"/>
-            <a:ext cx="5120640" cy="1828800"/>
-          </a:xfrm>
-          <a:prstGeom prst="rect">
-            <a:avLst/>
-          </a:prstGeom>
-        </p:spPr>
-      </p:pic>
-    </p:spTree>
-  </p:cSld>
-  <p:clrMapOvr>
-    <a:masterClrMapping/>
-  </p:clrMapOvr>
-</p:sld>
-</file>
-
 <file path=ppt/slides/slide2.xml><?xml version="1.0" encoding="utf-8"?>
 <p:sld xmlns:a="http://schemas.openxmlformats.org/drawingml/2006/main" xmlns:p="http://schemas.openxmlformats.org/presentationml/2006/main" xmlns:r="http://schemas.openxmlformats.org/officeDocument/2006/relationships">
   <p:cSld>
@@ -6573,7 +5247,7 @@
           <a:lstStyle/>
           <a:p>
             <a:r>
-              <a:t>6. Standard Operating Procedures - Market Positioning Brief</a:t>
+              <a:t>6. Appendix, Lineage &amp; Sign-off - Market Positioning Brief</a:t>
             </a:r>
           </a:p>
         </p:txBody>
@@ -6594,7 +5268,7 @@
           <a:lstStyle/>
           <a:p>
             <a:r>
-              <a:t>Summarizes the competitive landscape and recommended positioning statement for the current fiscal year. Section 6 (Standard Operating Procedures) applies to Competitive Intelligence within Sales &amp; Marketing Knowledge Hub and is maintained by Nina Patel. Provides step-by-step execution checklists, intake criteria, and verification gates.</a:t>
+              <a:t>Summarizes the competitive landscape and recommended positioning statement for the current fiscal year. Section 6 (Appendix, Lineage &amp; Sign-off) applies to Competitive Intelligence within Sales &amp; Marketing Knowledge Hub and is maintained by Nina Patel. Records document lineage, governance metadata, version history, and owner sign-off.</a:t>
             </a:r>
           </a:p>
           <a:p>
@@ -6945,1326 +5619,6 @@
                       </a:pPr>
                       <a:r>
                         <a:t>Stage 6 Verified</a:t>
-                      </a:r>
-                    </a:p>
-                  </a:txBody>
-                  <a:tcPr/>
-                </a:tc>
-              </a:tr>
-            </a:tbl>
-          </a:graphicData>
-        </a:graphic>
-      </p:graphicFrame>
-      <p:pic>
-        <p:nvPicPr>
-          <p:cNvPr id="5" name="Picture 4" descr="image.png"/>
-          <p:cNvPicPr>
-            <a:picLocks noChangeAspect="1"/>
-          </p:cNvPicPr>
-          <p:nvPr/>
-        </p:nvPicPr>
-        <p:blipFill>
-          <a:blip r:embed="rId2"/>
-          <a:stretch>
-            <a:fillRect/>
-          </a:stretch>
-        </p:blipFill>
-        <p:spPr>
-          <a:xfrm>
-            <a:off x="6492240" y="3703320"/>
-            <a:ext cx="5120640" cy="1828800"/>
-          </a:xfrm>
-          <a:prstGeom prst="rect">
-            <a:avLst/>
-          </a:prstGeom>
-        </p:spPr>
-      </p:pic>
-    </p:spTree>
-  </p:cSld>
-  <p:clrMapOvr>
-    <a:masterClrMapping/>
-  </p:clrMapOvr>
-</p:sld>
-</file>
-
-<file path=ppt/slides/slide7.xml><?xml version="1.0" encoding="utf-8"?>
-<p:sld xmlns:a="http://schemas.openxmlformats.org/drawingml/2006/main" xmlns:p="http://schemas.openxmlformats.org/presentationml/2006/main" xmlns:r="http://schemas.openxmlformats.org/officeDocument/2006/relationships">
-  <p:cSld>
-    <p:spTree>
-      <p:nvGrpSpPr>
-        <p:cNvPr id="1" name=""/>
-        <p:cNvGrpSpPr/>
-        <p:nvPr/>
-      </p:nvGrpSpPr>
-      <p:grpSpPr/>
-      <p:sp>
-        <p:nvSpPr>
-          <p:cNvPr id="2" name="Title 1"/>
-          <p:cNvSpPr>
-            <a:spLocks noGrp="1"/>
-          </p:cNvSpPr>
-          <p:nvPr>
-            <p:ph type="title"/>
-          </p:nvPr>
-        </p:nvSpPr>
-        <p:spPr/>
-        <p:txBody>
-          <a:bodyPr/>
-          <a:lstStyle/>
-          <a:p>
-            <a:r>
-              <a:t>7. Risk Register &amp; Mitigations - Market Positioning Brief</a:t>
-            </a:r>
-          </a:p>
-        </p:txBody>
-      </p:sp>
-      <p:sp>
-        <p:nvSpPr>
-          <p:cNvPr id="3" name="Content Placeholder 2"/>
-          <p:cNvSpPr>
-            <a:spLocks noGrp="1"/>
-          </p:cNvSpPr>
-          <p:nvPr>
-            <p:ph idx="1"/>
-          </p:nvPr>
-        </p:nvSpPr>
-        <p:spPr/>
-        <p:txBody>
-          <a:bodyPr/>
-          <a:lstStyle/>
-          <a:p>
-            <a:r>
-              <a:t>Summarizes the competitive landscape and recommended positioning statement for the current fiscal year. Section 7 (Risk Register &amp; Mitigations) applies to Competitive Intelligence within Sales &amp; Marketing Knowledge Hub and is maintained by Nina Patel. Catalogs operational, compliance, and delivery risks alongside preventive mitigations.</a:t>
-            </a:r>
-          </a:p>
-          <a:p>
-            <a:pPr lvl="1"/>
-            <a:r>
-              <a:t>Positioning brief is reviewed with sales leadership before each fiscal year planning cycle.</a:t>
-            </a:r>
-          </a:p>
-          <a:p>
-            <a:pPr lvl="1"/>
-            <a:r>
-              <a:t>Messaging updates from this brief flow into the brand and messaging guidelines.</a:t>
-            </a:r>
-          </a:p>
-          <a:p>
-            <a:pPr lvl="1"/>
-            <a:r>
-              <a:t>Section 7 review cadence is tracked by Nina Patel under Competitive Intelligence governance.</a:t>
-            </a:r>
-          </a:p>
-        </p:txBody>
-      </p:sp>
-      <p:graphicFrame>
-        <p:nvGraphicFramePr>
-          <p:cNvPr id="4" name="Table 3"/>
-          <p:cNvGraphicFramePr>
-            <a:graphicFrameLocks noGrp="1"/>
-          </p:cNvGraphicFramePr>
-          <p:nvPr/>
-        </p:nvGraphicFramePr>
-        <p:xfrm>
-          <a:off x="548640" y="3749039"/>
-          <a:ext cx="5669280" cy="1737360"/>
-        </p:xfrm>
-        <a:graphic>
-          <a:graphicData uri="http://schemas.openxmlformats.org/drawingml/2006/table">
-            <a:tbl>
-              <a:tblPr firstRow="1" bandRow="1">
-                <a:tableStyleId>{5C22544A-7EE6-4342-B048-85BDC9FD1C3A}</a:tableStyleId>
-              </a:tblPr>
-              <a:tblGrid>
-                <a:gridCol w="1417320"/>
-                <a:gridCol w="1417320"/>
-                <a:gridCol w="1417320"/>
-                <a:gridCol w="1417320"/>
-              </a:tblGrid>
-              <a:tr h="347472">
-                <a:tc>
-                  <a:txBody>
-                    <a:bodyPr/>
-                    <a:lstStyle/>
-                    <a:p>
-                      <a:pPr>
-                        <a:defRPr b="1" sz="1100"/>
-                      </a:pPr>
-                      <a:r>
-                        <a:t>Control Area</a:t>
-                      </a:r>
-                    </a:p>
-                  </a:txBody>
-                  <a:tcPr/>
-                </a:tc>
-                <a:tc>
-                  <a:txBody>
-                    <a:bodyPr/>
-                    <a:lstStyle/>
-                    <a:p>
-                      <a:pPr>
-                        <a:defRPr b="1" sz="1100"/>
-                      </a:pPr>
-                      <a:r>
-                        <a:t>Owner</a:t>
-                      </a:r>
-                    </a:p>
-                  </a:txBody>
-                  <a:tcPr/>
-                </a:tc>
-                <a:tc>
-                  <a:txBody>
-                    <a:bodyPr/>
-                    <a:lstStyle/>
-                    <a:p>
-                      <a:pPr>
-                        <a:defRPr b="1" sz="1100"/>
-                      </a:pPr>
-                      <a:r>
-                        <a:t>Target SLA</a:t>
-                      </a:r>
-                    </a:p>
-                  </a:txBody>
-                  <a:tcPr/>
-                </a:tc>
-                <a:tc>
-                  <a:txBody>
-                    <a:bodyPr/>
-                    <a:lstStyle/>
-                    <a:p>
-                      <a:pPr>
-                        <a:defRPr b="1" sz="1100"/>
-                      </a:pPr>
-                      <a:r>
-                        <a:t>Verification Status</a:t>
-                      </a:r>
-                    </a:p>
-                  </a:txBody>
-                  <a:tcPr/>
-                </a:tc>
-              </a:tr>
-              <a:tr h="347472">
-                <a:tc>
-                  <a:txBody>
-                    <a:bodyPr/>
-                    <a:lstStyle/>
-                    <a:p>
-                      <a:pPr>
-                        <a:defRPr sz="1000"/>
-                      </a:pPr>
-                      <a:r>
-                        <a:t>Competitive Intelligence</a:t>
-                      </a:r>
-                    </a:p>
-                  </a:txBody>
-                  <a:tcPr/>
-                </a:tc>
-                <a:tc>
-                  <a:txBody>
-                    <a:bodyPr/>
-                    <a:lstStyle/>
-                    <a:p>
-                      <a:pPr>
-                        <a:defRPr sz="1000"/>
-                      </a:pPr>
-                      <a:r>
-                        <a:t>Nina Patel</a:t>
-                      </a:r>
-                    </a:p>
-                  </a:txBody>
-                  <a:tcPr/>
-                </a:tc>
-                <a:tc>
-                  <a:txBody>
-                    <a:bodyPr/>
-                    <a:lstStyle/>
-                    <a:p>
-                      <a:pPr>
-                        <a:defRPr sz="1000"/>
-                      </a:pPr>
-                      <a:r>
-                        <a:t>5 business days</a:t>
-                      </a:r>
-                    </a:p>
-                  </a:txBody>
-                  <a:tcPr/>
-                </a:tc>
-                <a:tc>
-                  <a:txBody>
-                    <a:bodyPr/>
-                    <a:lstStyle/>
-                    <a:p>
-                      <a:pPr>
-                        <a:defRPr sz="1000"/>
-                      </a:pPr>
-                      <a:r>
-                        <a:t>Verified</a:t>
-                      </a:r>
-                    </a:p>
-                  </a:txBody>
-                  <a:tcPr/>
-                </a:tc>
-              </a:tr>
-              <a:tr h="347472">
-                <a:tc>
-                  <a:txBody>
-                    <a:bodyPr/>
-                    <a:lstStyle/>
-                    <a:p>
-                      <a:pPr>
-                        <a:defRPr sz="1000"/>
-                      </a:pPr>
-                      <a:r>
-                        <a:t>Market Positioning Brief Gate 1</a:t>
-                      </a:r>
-                    </a:p>
-                  </a:txBody>
-                  <a:tcPr/>
-                </a:tc>
-                <a:tc>
-                  <a:txBody>
-                    <a:bodyPr/>
-                    <a:lstStyle/>
-                    <a:p>
-                      <a:pPr>
-                        <a:defRPr sz="1000"/>
-                      </a:pPr>
-                      <a:r>
-                        <a:t>Nina Patel</a:t>
-                      </a:r>
-                    </a:p>
-                  </a:txBody>
-                  <a:tcPr/>
-                </a:tc>
-                <a:tc>
-                  <a:txBody>
-                    <a:bodyPr/>
-                    <a:lstStyle/>
-                    <a:p>
-                      <a:pPr>
-                        <a:defRPr sz="1000"/>
-                      </a:pPr>
-                      <a:r>
-                        <a:t>3 business days</a:t>
-                      </a:r>
-                    </a:p>
-                  </a:txBody>
-                  <a:tcPr/>
-                </a:tc>
-                <a:tc>
-                  <a:txBody>
-                    <a:bodyPr/>
-                    <a:lstStyle/>
-                    <a:p>
-                      <a:pPr>
-                        <a:defRPr sz="1000"/>
-                      </a:pPr>
-                      <a:r>
-                        <a:t>Active</a:t>
-                      </a:r>
-                    </a:p>
-                  </a:txBody>
-                  <a:tcPr/>
-                </a:tc>
-              </a:tr>
-              <a:tr h="347472">
-                <a:tc>
-                  <a:txBody>
-                    <a:bodyPr/>
-                    <a:lstStyle/>
-                    <a:p>
-                      <a:pPr>
-                        <a:defRPr sz="1000"/>
-                      </a:pPr>
-                      <a:r>
-                        <a:t>Market Positioning Brief Gate 2</a:t>
-                      </a:r>
-                    </a:p>
-                  </a:txBody>
-                  <a:tcPr/>
-                </a:tc>
-                <a:tc>
-                  <a:txBody>
-                    <a:bodyPr/>
-                    <a:lstStyle/>
-                    <a:p>
-                      <a:pPr>
-                        <a:defRPr sz="1000"/>
-                      </a:pPr>
-                      <a:r>
-                        <a:t>Nina Patel</a:t>
-                      </a:r>
-                    </a:p>
-                  </a:txBody>
-                  <a:tcPr/>
-                </a:tc>
-                <a:tc>
-                  <a:txBody>
-                    <a:bodyPr/>
-                    <a:lstStyle/>
-                    <a:p>
-                      <a:pPr>
-                        <a:defRPr sz="1000"/>
-                      </a:pPr>
-                      <a:r>
-                        <a:t>10 business days</a:t>
-                      </a:r>
-                    </a:p>
-                  </a:txBody>
-                  <a:tcPr/>
-                </a:tc>
-                <a:tc>
-                  <a:txBody>
-                    <a:bodyPr/>
-                    <a:lstStyle/>
-                    <a:p>
-                      <a:pPr>
-                        <a:defRPr sz="1000"/>
-                      </a:pPr>
-                      <a:r>
-                        <a:t>Monitored</a:t>
-                      </a:r>
-                    </a:p>
-                  </a:txBody>
-                  <a:tcPr/>
-                </a:tc>
-              </a:tr>
-              <a:tr h="347472">
-                <a:tc>
-                  <a:txBody>
-                    <a:bodyPr/>
-                    <a:lstStyle/>
-                    <a:p>
-                      <a:pPr>
-                        <a:defRPr sz="1000"/>
-                      </a:pPr>
-                      <a:r>
-                        <a:t>Sec-7</a:t>
-                      </a:r>
-                    </a:p>
-                  </a:txBody>
-                  <a:tcPr/>
-                </a:tc>
-                <a:tc>
-                  <a:txBody>
-                    <a:bodyPr/>
-                    <a:lstStyle/>
-                    <a:p>
-                      <a:pPr>
-                        <a:defRPr sz="1000"/>
-                      </a:pPr>
-                      <a:r>
-                        <a:t>Nina Patel</a:t>
-                      </a:r>
-                    </a:p>
-                  </a:txBody>
-                  <a:tcPr/>
-                </a:tc>
-                <a:tc>
-                  <a:txBody>
-                    <a:bodyPr/>
-                    <a:lstStyle/>
-                    <a:p>
-                      <a:pPr>
-                        <a:defRPr sz="1000"/>
-                      </a:pPr>
-                      <a:r>
-                        <a:t>5 business days</a:t>
-                      </a:r>
-                    </a:p>
-                  </a:txBody>
-                  <a:tcPr/>
-                </a:tc>
-                <a:tc>
-                  <a:txBody>
-                    <a:bodyPr/>
-                    <a:lstStyle/>
-                    <a:p>
-                      <a:pPr>
-                        <a:defRPr sz="1000"/>
-                      </a:pPr>
-                      <a:r>
-                        <a:t>Stage 7 Verified</a:t>
-                      </a:r>
-                    </a:p>
-                  </a:txBody>
-                  <a:tcPr/>
-                </a:tc>
-              </a:tr>
-            </a:tbl>
-          </a:graphicData>
-        </a:graphic>
-      </p:graphicFrame>
-      <p:pic>
-        <p:nvPicPr>
-          <p:cNvPr id="5" name="Picture 4" descr="image.png"/>
-          <p:cNvPicPr>
-            <a:picLocks noChangeAspect="1"/>
-          </p:cNvPicPr>
-          <p:nvPr/>
-        </p:nvPicPr>
-        <p:blipFill>
-          <a:blip r:embed="rId2"/>
-          <a:stretch>
-            <a:fillRect/>
-          </a:stretch>
-        </p:blipFill>
-        <p:spPr>
-          <a:xfrm>
-            <a:off x="6492240" y="3703320"/>
-            <a:ext cx="5120640" cy="1828800"/>
-          </a:xfrm>
-          <a:prstGeom prst="rect">
-            <a:avLst/>
-          </a:prstGeom>
-        </p:spPr>
-      </p:pic>
-    </p:spTree>
-  </p:cSld>
-  <p:clrMapOvr>
-    <a:masterClrMapping/>
-  </p:clrMapOvr>
-</p:sld>
-</file>
-
-<file path=ppt/slides/slide8.xml><?xml version="1.0" encoding="utf-8"?>
-<p:sld xmlns:a="http://schemas.openxmlformats.org/drawingml/2006/main" xmlns:p="http://schemas.openxmlformats.org/presentationml/2006/main" xmlns:r="http://schemas.openxmlformats.org/officeDocument/2006/relationships">
-  <p:cSld>
-    <p:spTree>
-      <p:nvGrpSpPr>
-        <p:cNvPr id="1" name=""/>
-        <p:cNvGrpSpPr/>
-        <p:nvPr/>
-      </p:nvGrpSpPr>
-      <p:grpSpPr/>
-      <p:sp>
-        <p:nvSpPr>
-          <p:cNvPr id="2" name="Title 1"/>
-          <p:cNvSpPr>
-            <a:spLocks noGrp="1"/>
-          </p:cNvSpPr>
-          <p:nvPr>
-            <p:ph type="title"/>
-          </p:nvPr>
-        </p:nvSpPr>
-        <p:spPr/>
-        <p:txBody>
-          <a:bodyPr/>
-          <a:lstStyle/>
-          <a:p>
-            <a:r>
-              <a:t>8. Quality Assurance &amp; Audits - Market Positioning Brief</a:t>
-            </a:r>
-          </a:p>
-        </p:txBody>
-      </p:sp>
-      <p:sp>
-        <p:nvSpPr>
-          <p:cNvPr id="3" name="Content Placeholder 2"/>
-          <p:cNvSpPr>
-            <a:spLocks noGrp="1"/>
-          </p:cNvSpPr>
-          <p:nvPr>
-            <p:ph idx="1"/>
-          </p:nvPr>
-        </p:nvSpPr>
-        <p:spPr/>
-        <p:txBody>
-          <a:bodyPr/>
-          <a:lstStyle/>
-          <a:p>
-            <a:r>
-              <a:t>Summarizes the competitive landscape and recommended positioning statement for the current fiscal year. Section 8 (Quality Assurance &amp; Audits) applies to Competitive Intelligence within Sales &amp; Marketing Knowledge Hub and is maintained by Nina Patel. Specifies sampling frequencies, inspection tolerances, and nonconformance workflows.</a:t>
-            </a:r>
-          </a:p>
-          <a:p>
-            <a:pPr lvl="1"/>
-            <a:r>
-              <a:t>Messaging updates from this brief flow into the brand and messaging guidelines.</a:t>
-            </a:r>
-          </a:p>
-          <a:p>
-            <a:pPr lvl="1"/>
-            <a:r>
-              <a:t>Three primary competitors are tracked across pricing, features, and market presence.</a:t>
-            </a:r>
-          </a:p>
-          <a:p>
-            <a:pPr lvl="1"/>
-            <a:r>
-              <a:t>Section 8 review cadence is tracked by Nina Patel under Competitive Intelligence governance.</a:t>
-            </a:r>
-          </a:p>
-        </p:txBody>
-      </p:sp>
-      <p:graphicFrame>
-        <p:nvGraphicFramePr>
-          <p:cNvPr id="4" name="Table 3"/>
-          <p:cNvGraphicFramePr>
-            <a:graphicFrameLocks noGrp="1"/>
-          </p:cNvGraphicFramePr>
-          <p:nvPr/>
-        </p:nvGraphicFramePr>
-        <p:xfrm>
-          <a:off x="548640" y="3749039"/>
-          <a:ext cx="5669280" cy="1737360"/>
-        </p:xfrm>
-        <a:graphic>
-          <a:graphicData uri="http://schemas.openxmlformats.org/drawingml/2006/table">
-            <a:tbl>
-              <a:tblPr firstRow="1" bandRow="1">
-                <a:tableStyleId>{5C22544A-7EE6-4342-B048-85BDC9FD1C3A}</a:tableStyleId>
-              </a:tblPr>
-              <a:tblGrid>
-                <a:gridCol w="1417320"/>
-                <a:gridCol w="1417320"/>
-                <a:gridCol w="1417320"/>
-                <a:gridCol w="1417320"/>
-              </a:tblGrid>
-              <a:tr h="347472">
-                <a:tc>
-                  <a:txBody>
-                    <a:bodyPr/>
-                    <a:lstStyle/>
-                    <a:p>
-                      <a:pPr>
-                        <a:defRPr b="1" sz="1100"/>
-                      </a:pPr>
-                      <a:r>
-                        <a:t>Control Area</a:t>
-                      </a:r>
-                    </a:p>
-                  </a:txBody>
-                  <a:tcPr/>
-                </a:tc>
-                <a:tc>
-                  <a:txBody>
-                    <a:bodyPr/>
-                    <a:lstStyle/>
-                    <a:p>
-                      <a:pPr>
-                        <a:defRPr b="1" sz="1100"/>
-                      </a:pPr>
-                      <a:r>
-                        <a:t>Owner</a:t>
-                      </a:r>
-                    </a:p>
-                  </a:txBody>
-                  <a:tcPr/>
-                </a:tc>
-                <a:tc>
-                  <a:txBody>
-                    <a:bodyPr/>
-                    <a:lstStyle/>
-                    <a:p>
-                      <a:pPr>
-                        <a:defRPr b="1" sz="1100"/>
-                      </a:pPr>
-                      <a:r>
-                        <a:t>Target SLA</a:t>
-                      </a:r>
-                    </a:p>
-                  </a:txBody>
-                  <a:tcPr/>
-                </a:tc>
-                <a:tc>
-                  <a:txBody>
-                    <a:bodyPr/>
-                    <a:lstStyle/>
-                    <a:p>
-                      <a:pPr>
-                        <a:defRPr b="1" sz="1100"/>
-                      </a:pPr>
-                      <a:r>
-                        <a:t>Verification Status</a:t>
-                      </a:r>
-                    </a:p>
-                  </a:txBody>
-                  <a:tcPr/>
-                </a:tc>
-              </a:tr>
-              <a:tr h="347472">
-                <a:tc>
-                  <a:txBody>
-                    <a:bodyPr/>
-                    <a:lstStyle/>
-                    <a:p>
-                      <a:pPr>
-                        <a:defRPr sz="1000"/>
-                      </a:pPr>
-                      <a:r>
-                        <a:t>Competitive Intelligence</a:t>
-                      </a:r>
-                    </a:p>
-                  </a:txBody>
-                  <a:tcPr/>
-                </a:tc>
-                <a:tc>
-                  <a:txBody>
-                    <a:bodyPr/>
-                    <a:lstStyle/>
-                    <a:p>
-                      <a:pPr>
-                        <a:defRPr sz="1000"/>
-                      </a:pPr>
-                      <a:r>
-                        <a:t>Nina Patel</a:t>
-                      </a:r>
-                    </a:p>
-                  </a:txBody>
-                  <a:tcPr/>
-                </a:tc>
-                <a:tc>
-                  <a:txBody>
-                    <a:bodyPr/>
-                    <a:lstStyle/>
-                    <a:p>
-                      <a:pPr>
-                        <a:defRPr sz="1000"/>
-                      </a:pPr>
-                      <a:r>
-                        <a:t>5 business days</a:t>
-                      </a:r>
-                    </a:p>
-                  </a:txBody>
-                  <a:tcPr/>
-                </a:tc>
-                <a:tc>
-                  <a:txBody>
-                    <a:bodyPr/>
-                    <a:lstStyle/>
-                    <a:p>
-                      <a:pPr>
-                        <a:defRPr sz="1000"/>
-                      </a:pPr>
-                      <a:r>
-                        <a:t>Verified</a:t>
-                      </a:r>
-                    </a:p>
-                  </a:txBody>
-                  <a:tcPr/>
-                </a:tc>
-              </a:tr>
-              <a:tr h="347472">
-                <a:tc>
-                  <a:txBody>
-                    <a:bodyPr/>
-                    <a:lstStyle/>
-                    <a:p>
-                      <a:pPr>
-                        <a:defRPr sz="1000"/>
-                      </a:pPr>
-                      <a:r>
-                        <a:t>Market Positioning Brief Gate 1</a:t>
-                      </a:r>
-                    </a:p>
-                  </a:txBody>
-                  <a:tcPr/>
-                </a:tc>
-                <a:tc>
-                  <a:txBody>
-                    <a:bodyPr/>
-                    <a:lstStyle/>
-                    <a:p>
-                      <a:pPr>
-                        <a:defRPr sz="1000"/>
-                      </a:pPr>
-                      <a:r>
-                        <a:t>Nina Patel</a:t>
-                      </a:r>
-                    </a:p>
-                  </a:txBody>
-                  <a:tcPr/>
-                </a:tc>
-                <a:tc>
-                  <a:txBody>
-                    <a:bodyPr/>
-                    <a:lstStyle/>
-                    <a:p>
-                      <a:pPr>
-                        <a:defRPr sz="1000"/>
-                      </a:pPr>
-                      <a:r>
-                        <a:t>3 business days</a:t>
-                      </a:r>
-                    </a:p>
-                  </a:txBody>
-                  <a:tcPr/>
-                </a:tc>
-                <a:tc>
-                  <a:txBody>
-                    <a:bodyPr/>
-                    <a:lstStyle/>
-                    <a:p>
-                      <a:pPr>
-                        <a:defRPr sz="1000"/>
-                      </a:pPr>
-                      <a:r>
-                        <a:t>Active</a:t>
-                      </a:r>
-                    </a:p>
-                  </a:txBody>
-                  <a:tcPr/>
-                </a:tc>
-              </a:tr>
-              <a:tr h="347472">
-                <a:tc>
-                  <a:txBody>
-                    <a:bodyPr/>
-                    <a:lstStyle/>
-                    <a:p>
-                      <a:pPr>
-                        <a:defRPr sz="1000"/>
-                      </a:pPr>
-                      <a:r>
-                        <a:t>Market Positioning Brief Gate 2</a:t>
-                      </a:r>
-                    </a:p>
-                  </a:txBody>
-                  <a:tcPr/>
-                </a:tc>
-                <a:tc>
-                  <a:txBody>
-                    <a:bodyPr/>
-                    <a:lstStyle/>
-                    <a:p>
-                      <a:pPr>
-                        <a:defRPr sz="1000"/>
-                      </a:pPr>
-                      <a:r>
-                        <a:t>Nina Patel</a:t>
-                      </a:r>
-                    </a:p>
-                  </a:txBody>
-                  <a:tcPr/>
-                </a:tc>
-                <a:tc>
-                  <a:txBody>
-                    <a:bodyPr/>
-                    <a:lstStyle/>
-                    <a:p>
-                      <a:pPr>
-                        <a:defRPr sz="1000"/>
-                      </a:pPr>
-                      <a:r>
-                        <a:t>10 business days</a:t>
-                      </a:r>
-                    </a:p>
-                  </a:txBody>
-                  <a:tcPr/>
-                </a:tc>
-                <a:tc>
-                  <a:txBody>
-                    <a:bodyPr/>
-                    <a:lstStyle/>
-                    <a:p>
-                      <a:pPr>
-                        <a:defRPr sz="1000"/>
-                      </a:pPr>
-                      <a:r>
-                        <a:t>Monitored</a:t>
-                      </a:r>
-                    </a:p>
-                  </a:txBody>
-                  <a:tcPr/>
-                </a:tc>
-              </a:tr>
-              <a:tr h="347472">
-                <a:tc>
-                  <a:txBody>
-                    <a:bodyPr/>
-                    <a:lstStyle/>
-                    <a:p>
-                      <a:pPr>
-                        <a:defRPr sz="1000"/>
-                      </a:pPr>
-                      <a:r>
-                        <a:t>Sec-8</a:t>
-                      </a:r>
-                    </a:p>
-                  </a:txBody>
-                  <a:tcPr/>
-                </a:tc>
-                <a:tc>
-                  <a:txBody>
-                    <a:bodyPr/>
-                    <a:lstStyle/>
-                    <a:p>
-                      <a:pPr>
-                        <a:defRPr sz="1000"/>
-                      </a:pPr>
-                      <a:r>
-                        <a:t>Nina Patel</a:t>
-                      </a:r>
-                    </a:p>
-                  </a:txBody>
-                  <a:tcPr/>
-                </a:tc>
-                <a:tc>
-                  <a:txBody>
-                    <a:bodyPr/>
-                    <a:lstStyle/>
-                    <a:p>
-                      <a:pPr>
-                        <a:defRPr sz="1000"/>
-                      </a:pPr>
-                      <a:r>
-                        <a:t>3 business days</a:t>
-                      </a:r>
-                    </a:p>
-                  </a:txBody>
-                  <a:tcPr/>
-                </a:tc>
-                <a:tc>
-                  <a:txBody>
-                    <a:bodyPr/>
-                    <a:lstStyle/>
-                    <a:p>
-                      <a:pPr>
-                        <a:defRPr sz="1000"/>
-                      </a:pPr>
-                      <a:r>
-                        <a:t>Stage 8 Verified</a:t>
-                      </a:r>
-                    </a:p>
-                  </a:txBody>
-                  <a:tcPr/>
-                </a:tc>
-              </a:tr>
-            </a:tbl>
-          </a:graphicData>
-        </a:graphic>
-      </p:graphicFrame>
-      <p:pic>
-        <p:nvPicPr>
-          <p:cNvPr id="5" name="Picture 4" descr="image.png"/>
-          <p:cNvPicPr>
-            <a:picLocks noChangeAspect="1"/>
-          </p:cNvPicPr>
-          <p:nvPr/>
-        </p:nvPicPr>
-        <p:blipFill>
-          <a:blip r:embed="rId2"/>
-          <a:stretch>
-            <a:fillRect/>
-          </a:stretch>
-        </p:blipFill>
-        <p:spPr>
-          <a:xfrm>
-            <a:off x="6492240" y="3703320"/>
-            <a:ext cx="5120640" cy="1828800"/>
-          </a:xfrm>
-          <a:prstGeom prst="rect">
-            <a:avLst/>
-          </a:prstGeom>
-        </p:spPr>
-      </p:pic>
-    </p:spTree>
-  </p:cSld>
-  <p:clrMapOvr>
-    <a:masterClrMapping/>
-  </p:clrMapOvr>
-</p:sld>
-</file>
-
-<file path=ppt/slides/slide9.xml><?xml version="1.0" encoding="utf-8"?>
-<p:sld xmlns:a="http://schemas.openxmlformats.org/drawingml/2006/main" xmlns:p="http://schemas.openxmlformats.org/presentationml/2006/main" xmlns:r="http://schemas.openxmlformats.org/officeDocument/2006/relationships">
-  <p:cSld>
-    <p:spTree>
-      <p:nvGrpSpPr>
-        <p:cNvPr id="1" name=""/>
-        <p:cNvGrpSpPr/>
-        <p:nvPr/>
-      </p:nvGrpSpPr>
-      <p:grpSpPr/>
-      <p:sp>
-        <p:nvSpPr>
-          <p:cNvPr id="2" name="Title 1"/>
-          <p:cNvSpPr>
-            <a:spLocks noGrp="1"/>
-          </p:cNvSpPr>
-          <p:nvPr>
-            <p:ph type="title"/>
-          </p:nvPr>
-        </p:nvSpPr>
-        <p:spPr/>
-        <p:txBody>
-          <a:bodyPr/>
-          <a:lstStyle/>
-          <a:p>
-            <a:r>
-              <a:t>9. Exception Handling &amp; Escalations - Market Positioning Brief</a:t>
-            </a:r>
-          </a:p>
-        </p:txBody>
-      </p:sp>
-      <p:sp>
-        <p:nvSpPr>
-          <p:cNvPr id="3" name="Content Placeholder 2"/>
-          <p:cNvSpPr>
-            <a:spLocks noGrp="1"/>
-          </p:cNvSpPr>
-          <p:nvPr>
-            <p:ph idx="1"/>
-          </p:nvPr>
-        </p:nvSpPr>
-        <p:spPr/>
-        <p:txBody>
-          <a:bodyPr/>
-          <a:lstStyle/>
-          <a:p>
-            <a:r>
-              <a:t>Summarizes the competitive landscape and recommended positioning statement for the current fiscal year. Section 9 (Exception Handling &amp; Escalations) applies to Competitive Intelligence within Sales &amp; Marketing Knowledge Hub and is maintained by Nina Patel. Outlines severity tiers, response SLAs, and cross-functional escalation paths.</a:t>
-            </a:r>
-          </a:p>
-          <a:p>
-            <a:pPr lvl="1"/>
-            <a:r>
-              <a:t>Three primary competitors are tracked across pricing, features, and market presence.</a:t>
-            </a:r>
-          </a:p>
-          <a:p>
-            <a:pPr lvl="1"/>
-            <a:r>
-              <a:t>Recommended positioning emphasizes real-time data freshness and integration breadth.</a:t>
-            </a:r>
-          </a:p>
-          <a:p>
-            <a:pPr lvl="1"/>
-            <a:r>
-              <a:t>Section 9 review cadence is tracked by Nina Patel under Competitive Intelligence governance.</a:t>
-            </a:r>
-          </a:p>
-        </p:txBody>
-      </p:sp>
-      <p:graphicFrame>
-        <p:nvGraphicFramePr>
-          <p:cNvPr id="4" name="Table 3"/>
-          <p:cNvGraphicFramePr>
-            <a:graphicFrameLocks noGrp="1"/>
-          </p:cNvGraphicFramePr>
-          <p:nvPr/>
-        </p:nvGraphicFramePr>
-        <p:xfrm>
-          <a:off x="548640" y="3749039"/>
-          <a:ext cx="5669280" cy="1737360"/>
-        </p:xfrm>
-        <a:graphic>
-          <a:graphicData uri="http://schemas.openxmlformats.org/drawingml/2006/table">
-            <a:tbl>
-              <a:tblPr firstRow="1" bandRow="1">
-                <a:tableStyleId>{5C22544A-7EE6-4342-B048-85BDC9FD1C3A}</a:tableStyleId>
-              </a:tblPr>
-              <a:tblGrid>
-                <a:gridCol w="1417320"/>
-                <a:gridCol w="1417320"/>
-                <a:gridCol w="1417320"/>
-                <a:gridCol w="1417320"/>
-              </a:tblGrid>
-              <a:tr h="347472">
-                <a:tc>
-                  <a:txBody>
-                    <a:bodyPr/>
-                    <a:lstStyle/>
-                    <a:p>
-                      <a:pPr>
-                        <a:defRPr b="1" sz="1100"/>
-                      </a:pPr>
-                      <a:r>
-                        <a:t>Control Area</a:t>
-                      </a:r>
-                    </a:p>
-                  </a:txBody>
-                  <a:tcPr/>
-                </a:tc>
-                <a:tc>
-                  <a:txBody>
-                    <a:bodyPr/>
-                    <a:lstStyle/>
-                    <a:p>
-                      <a:pPr>
-                        <a:defRPr b="1" sz="1100"/>
-                      </a:pPr>
-                      <a:r>
-                        <a:t>Owner</a:t>
-                      </a:r>
-                    </a:p>
-                  </a:txBody>
-                  <a:tcPr/>
-                </a:tc>
-                <a:tc>
-                  <a:txBody>
-                    <a:bodyPr/>
-                    <a:lstStyle/>
-                    <a:p>
-                      <a:pPr>
-                        <a:defRPr b="1" sz="1100"/>
-                      </a:pPr>
-                      <a:r>
-                        <a:t>Target SLA</a:t>
-                      </a:r>
-                    </a:p>
-                  </a:txBody>
-                  <a:tcPr/>
-                </a:tc>
-                <a:tc>
-                  <a:txBody>
-                    <a:bodyPr/>
-                    <a:lstStyle/>
-                    <a:p>
-                      <a:pPr>
-                        <a:defRPr b="1" sz="1100"/>
-                      </a:pPr>
-                      <a:r>
-                        <a:t>Verification Status</a:t>
-                      </a:r>
-                    </a:p>
-                  </a:txBody>
-                  <a:tcPr/>
-                </a:tc>
-              </a:tr>
-              <a:tr h="347472">
-                <a:tc>
-                  <a:txBody>
-                    <a:bodyPr/>
-                    <a:lstStyle/>
-                    <a:p>
-                      <a:pPr>
-                        <a:defRPr sz="1000"/>
-                      </a:pPr>
-                      <a:r>
-                        <a:t>Competitive Intelligence</a:t>
-                      </a:r>
-                    </a:p>
-                  </a:txBody>
-                  <a:tcPr/>
-                </a:tc>
-                <a:tc>
-                  <a:txBody>
-                    <a:bodyPr/>
-                    <a:lstStyle/>
-                    <a:p>
-                      <a:pPr>
-                        <a:defRPr sz="1000"/>
-                      </a:pPr>
-                      <a:r>
-                        <a:t>Nina Patel</a:t>
-                      </a:r>
-                    </a:p>
-                  </a:txBody>
-                  <a:tcPr/>
-                </a:tc>
-                <a:tc>
-                  <a:txBody>
-                    <a:bodyPr/>
-                    <a:lstStyle/>
-                    <a:p>
-                      <a:pPr>
-                        <a:defRPr sz="1000"/>
-                      </a:pPr>
-                      <a:r>
-                        <a:t>5 business days</a:t>
-                      </a:r>
-                    </a:p>
-                  </a:txBody>
-                  <a:tcPr/>
-                </a:tc>
-                <a:tc>
-                  <a:txBody>
-                    <a:bodyPr/>
-                    <a:lstStyle/>
-                    <a:p>
-                      <a:pPr>
-                        <a:defRPr sz="1000"/>
-                      </a:pPr>
-                      <a:r>
-                        <a:t>Verified</a:t>
-                      </a:r>
-                    </a:p>
-                  </a:txBody>
-                  <a:tcPr/>
-                </a:tc>
-              </a:tr>
-              <a:tr h="347472">
-                <a:tc>
-                  <a:txBody>
-                    <a:bodyPr/>
-                    <a:lstStyle/>
-                    <a:p>
-                      <a:pPr>
-                        <a:defRPr sz="1000"/>
-                      </a:pPr>
-                      <a:r>
-                        <a:t>Market Positioning Brief Gate 1</a:t>
-                      </a:r>
-                    </a:p>
-                  </a:txBody>
-                  <a:tcPr/>
-                </a:tc>
-                <a:tc>
-                  <a:txBody>
-                    <a:bodyPr/>
-                    <a:lstStyle/>
-                    <a:p>
-                      <a:pPr>
-                        <a:defRPr sz="1000"/>
-                      </a:pPr>
-                      <a:r>
-                        <a:t>Nina Patel</a:t>
-                      </a:r>
-                    </a:p>
-                  </a:txBody>
-                  <a:tcPr/>
-                </a:tc>
-                <a:tc>
-                  <a:txBody>
-                    <a:bodyPr/>
-                    <a:lstStyle/>
-                    <a:p>
-                      <a:pPr>
-                        <a:defRPr sz="1000"/>
-                      </a:pPr>
-                      <a:r>
-                        <a:t>3 business days</a:t>
-                      </a:r>
-                    </a:p>
-                  </a:txBody>
-                  <a:tcPr/>
-                </a:tc>
-                <a:tc>
-                  <a:txBody>
-                    <a:bodyPr/>
-                    <a:lstStyle/>
-                    <a:p>
-                      <a:pPr>
-                        <a:defRPr sz="1000"/>
-                      </a:pPr>
-                      <a:r>
-                        <a:t>Active</a:t>
-                      </a:r>
-                    </a:p>
-                  </a:txBody>
-                  <a:tcPr/>
-                </a:tc>
-              </a:tr>
-              <a:tr h="347472">
-                <a:tc>
-                  <a:txBody>
-                    <a:bodyPr/>
-                    <a:lstStyle/>
-                    <a:p>
-                      <a:pPr>
-                        <a:defRPr sz="1000"/>
-                      </a:pPr>
-                      <a:r>
-                        <a:t>Market Positioning Brief Gate 2</a:t>
-                      </a:r>
-                    </a:p>
-                  </a:txBody>
-                  <a:tcPr/>
-                </a:tc>
-                <a:tc>
-                  <a:txBody>
-                    <a:bodyPr/>
-                    <a:lstStyle/>
-                    <a:p>
-                      <a:pPr>
-                        <a:defRPr sz="1000"/>
-                      </a:pPr>
-                      <a:r>
-                        <a:t>Nina Patel</a:t>
-                      </a:r>
-                    </a:p>
-                  </a:txBody>
-                  <a:tcPr/>
-                </a:tc>
-                <a:tc>
-                  <a:txBody>
-                    <a:bodyPr/>
-                    <a:lstStyle/>
-                    <a:p>
-                      <a:pPr>
-                        <a:defRPr sz="1000"/>
-                      </a:pPr>
-                      <a:r>
-                        <a:t>10 business days</a:t>
-                      </a:r>
-                    </a:p>
-                  </a:txBody>
-                  <a:tcPr/>
-                </a:tc>
-                <a:tc>
-                  <a:txBody>
-                    <a:bodyPr/>
-                    <a:lstStyle/>
-                    <a:p>
-                      <a:pPr>
-                        <a:defRPr sz="1000"/>
-                      </a:pPr>
-                      <a:r>
-                        <a:t>Monitored</a:t>
-                      </a:r>
-                    </a:p>
-                  </a:txBody>
-                  <a:tcPr/>
-                </a:tc>
-              </a:tr>
-              <a:tr h="347472">
-                <a:tc>
-                  <a:txBody>
-                    <a:bodyPr/>
-                    <a:lstStyle/>
-                    <a:p>
-                      <a:pPr>
-                        <a:defRPr sz="1000"/>
-                      </a:pPr>
-                      <a:r>
-                        <a:t>Sec-9</a:t>
-                      </a:r>
-                    </a:p>
-                  </a:txBody>
-                  <a:tcPr/>
-                </a:tc>
-                <a:tc>
-                  <a:txBody>
-                    <a:bodyPr/>
-                    <a:lstStyle/>
-                    <a:p>
-                      <a:pPr>
-                        <a:defRPr sz="1000"/>
-                      </a:pPr>
-                      <a:r>
-                        <a:t>Nina Patel</a:t>
-                      </a:r>
-                    </a:p>
-                  </a:txBody>
-                  <a:tcPr/>
-                </a:tc>
-                <a:tc>
-                  <a:txBody>
-                    <a:bodyPr/>
-                    <a:lstStyle/>
-                    <a:p>
-                      <a:pPr>
-                        <a:defRPr sz="1000"/>
-                      </a:pPr>
-                      <a:r>
-                        <a:t>10 business days</a:t>
-                      </a:r>
-                    </a:p>
-                  </a:txBody>
-                  <a:tcPr/>
-                </a:tc>
-                <a:tc>
-                  <a:txBody>
-                    <a:bodyPr/>
-                    <a:lstStyle/>
-                    <a:p>
-                      <a:pPr>
-                        <a:defRPr sz="1000"/>
-                      </a:pPr>
-                      <a:r>
-                        <a:t>Stage 9 Verified</a:t>
                       </a:r>
                     </a:p>
                   </a:txBody>
